--- a/chapter 17.pptx
+++ b/chapter 17.pptx
@@ -5,29 +5,32 @@
     <p:sldMasterId id="2147483648" r:id="rId1"/>
   </p:sldMasterIdLst>
   <p:notesMasterIdLst>
-    <p:notesMasterId r:id="rId19"/>
+    <p:notesMasterId r:id="rId22"/>
   </p:notesMasterIdLst>
   <p:handoutMasterIdLst>
-    <p:handoutMasterId r:id="rId20"/>
+    <p:handoutMasterId r:id="rId23"/>
   </p:handoutMasterIdLst>
   <p:sldIdLst>
     <p:sldId id="259" r:id="rId2"/>
     <p:sldId id="264" r:id="rId3"/>
-    <p:sldId id="280" r:id="rId4"/>
-    <p:sldId id="281" r:id="rId5"/>
-    <p:sldId id="282" r:id="rId6"/>
-    <p:sldId id="283" r:id="rId7"/>
-    <p:sldId id="284" r:id="rId8"/>
-    <p:sldId id="285" r:id="rId9"/>
-    <p:sldId id="286" r:id="rId10"/>
-    <p:sldId id="287" r:id="rId11"/>
-    <p:sldId id="289" r:id="rId12"/>
-    <p:sldId id="288" r:id="rId13"/>
-    <p:sldId id="291" r:id="rId14"/>
-    <p:sldId id="292" r:id="rId15"/>
-    <p:sldId id="293" r:id="rId16"/>
-    <p:sldId id="294" r:id="rId17"/>
-    <p:sldId id="295" r:id="rId18"/>
+    <p:sldId id="296" r:id="rId4"/>
+    <p:sldId id="297" r:id="rId5"/>
+    <p:sldId id="280" r:id="rId6"/>
+    <p:sldId id="281" r:id="rId7"/>
+    <p:sldId id="282" r:id="rId8"/>
+    <p:sldId id="283" r:id="rId9"/>
+    <p:sldId id="284" r:id="rId10"/>
+    <p:sldId id="285" r:id="rId11"/>
+    <p:sldId id="286" r:id="rId12"/>
+    <p:sldId id="287" r:id="rId13"/>
+    <p:sldId id="289" r:id="rId14"/>
+    <p:sldId id="288" r:id="rId15"/>
+    <p:sldId id="291" r:id="rId16"/>
+    <p:sldId id="292" r:id="rId17"/>
+    <p:sldId id="293" r:id="rId18"/>
+    <p:sldId id="294" r:id="rId19"/>
+    <p:sldId id="295" r:id="rId20"/>
+    <p:sldId id="298" r:id="rId21"/>
   </p:sldIdLst>
   <p:sldSz cx="12192000" cy="6858000"/>
   <p:notesSz cx="6858000" cy="9144000"/>
@@ -242,7 +245,7 @@
           <a:p>
             <a:fld id="{13928E3B-7122-43E6-B3BB-09448C56C96C}" type="datetimeFigureOut">
               <a:rPr lang="en-US" smtClean="0"/>
-              <a:t>25/05/12</a:t>
+              <a:t>25/07/20</a:t>
             </a:fld>
             <a:endParaRPr lang="en-US"/>
           </a:p>
@@ -420,7 +423,7 @@
           <a:p>
             <a:fld id="{B98C9CAF-43DF-44BF-8016-DC193E4E594B}" type="datetimeFigureOut">
               <a:rPr lang="en-US" smtClean="0"/>
-              <a:t>25/05/12</a:t>
+              <a:t>25/07/20</a:t>
             </a:fld>
             <a:endParaRPr lang="en-US"/>
           </a:p>
@@ -2593,6 +2596,240 @@
 </p:sldLayout>
 </file>
 
+<file path=ppt/slideLayouts/slideLayout7.xml><?xml version="1.0" encoding="utf-8"?>
+<p:sldLayout xmlns:a="http://schemas.openxmlformats.org/drawingml/2006/main" xmlns:r="http://schemas.openxmlformats.org/officeDocument/2006/relationships" xmlns:p="http://schemas.openxmlformats.org/presentationml/2006/main" preserve="1" userDrawn="1">
+  <p:cSld name="1_Custom Layout">
+    <p:spTree>
+      <p:nvGrpSpPr>
+        <p:cNvPr id="1" name=""/>
+        <p:cNvGrpSpPr/>
+        <p:nvPr/>
+      </p:nvGrpSpPr>
+      <p:grpSpPr>
+        <a:xfrm>
+          <a:off x="0" y="0"/>
+          <a:ext cx="0" cy="0"/>
+          <a:chOff x="0" y="0"/>
+          <a:chExt cx="0" cy="0"/>
+        </a:xfrm>
+      </p:grpSpPr>
+      <p:sp>
+        <p:nvSpPr>
+          <p:cNvPr id="4" name="Slide Number Placeholder 3">
+            <a:extLst>
+              <a:ext uri="{FF2B5EF4-FFF2-40B4-BE49-F238E27FC236}">
+                <a16:creationId xmlns:a16="http://schemas.microsoft.com/office/drawing/2014/main" id="{B3D763EB-F58C-2FDA-883E-D34AC3F89BD8}"/>
+              </a:ext>
+            </a:extLst>
+          </p:cNvPr>
+          <p:cNvSpPr>
+            <a:spLocks noGrp="1"/>
+          </p:cNvSpPr>
+          <p:nvPr>
+            <p:ph type="sldNum" sz="quarter" idx="10"/>
+          </p:nvPr>
+        </p:nvSpPr>
+        <p:spPr/>
+        <p:txBody>
+          <a:bodyPr/>
+          <a:lstStyle/>
+          <a:p>
+            <a:fld id="{AE311D09-C3D9-45E8-99CE-78E12234EEAD}" type="slidenum">
+              <a:rPr lang="en-US" smtClean="0"/>
+              <a:pPr/>
+              <a:t>‹#›</a:t>
+            </a:fld>
+            <a:endParaRPr lang="en-US" dirty="0"/>
+          </a:p>
+        </p:txBody>
+      </p:sp>
+      <p:sp>
+        <p:nvSpPr>
+          <p:cNvPr id="6" name="TextBox 5">
+            <a:extLst>
+              <a:ext uri="{FF2B5EF4-FFF2-40B4-BE49-F238E27FC236}">
+                <a16:creationId xmlns:a16="http://schemas.microsoft.com/office/drawing/2014/main" id="{E9BD9CD7-C12F-5578-3913-F6206D50C27B}"/>
+              </a:ext>
+            </a:extLst>
+          </p:cNvPr>
+          <p:cNvSpPr txBox="1"/>
+          <p:nvPr userDrawn="1"/>
+        </p:nvSpPr>
+        <p:spPr>
+          <a:xfrm>
+            <a:off x="1859302" y="1303253"/>
+            <a:ext cx="1168061" cy="1107996"/>
+          </a:xfrm>
+          <a:prstGeom prst="rect">
+            <a:avLst/>
+          </a:prstGeom>
+          <a:noFill/>
+        </p:spPr>
+        <p:txBody>
+          <a:bodyPr wrap="square" rtlCol="0" anchor="ctr">
+            <a:spAutoFit/>
+          </a:bodyPr>
+          <a:lstStyle/>
+          <a:p>
+            <a:pPr marL="0" indent="0" algn="ctr">
+              <a:buFont typeface="Arial" panose="020B0604020202020204" pitchFamily="34" charset="0"/>
+              <a:buNone/>
+            </a:pPr>
+            <a:r>
+              <a:rPr lang="en-US" sz="6600" b="1" dirty="0">
+                <a:latin typeface="+mj-lt"/>
+              </a:rPr>
+              <a:t>“</a:t>
+            </a:r>
+          </a:p>
+        </p:txBody>
+      </p:sp>
+      <p:sp>
+        <p:nvSpPr>
+          <p:cNvPr id="8" name="TextBox 7">
+            <a:extLst>
+              <a:ext uri="{FF2B5EF4-FFF2-40B4-BE49-F238E27FC236}">
+                <a16:creationId xmlns:a16="http://schemas.microsoft.com/office/drawing/2014/main" id="{E62C21CC-5ED0-E64B-EAB7-020E97E35EDD}"/>
+              </a:ext>
+            </a:extLst>
+          </p:cNvPr>
+          <p:cNvSpPr txBox="1"/>
+          <p:nvPr userDrawn="1"/>
+        </p:nvSpPr>
+        <p:spPr>
+          <a:xfrm>
+            <a:off x="9205913" y="3698406"/>
+            <a:ext cx="1168061" cy="1107996"/>
+          </a:xfrm>
+          <a:prstGeom prst="rect">
+            <a:avLst/>
+          </a:prstGeom>
+          <a:noFill/>
+        </p:spPr>
+        <p:txBody>
+          <a:bodyPr wrap="square" rtlCol="0" anchor="ctr">
+            <a:spAutoFit/>
+          </a:bodyPr>
+          <a:lstStyle/>
+          <a:p>
+            <a:pPr marL="0" indent="0" algn="ctr">
+              <a:buFont typeface="Arial" panose="020B0604020202020204" pitchFamily="34" charset="0"/>
+              <a:buNone/>
+            </a:pPr>
+            <a:r>
+              <a:rPr lang="en-US" sz="6600" b="1" dirty="0">
+                <a:latin typeface="+mj-lt"/>
+              </a:rPr>
+              <a:t>”</a:t>
+            </a:r>
+          </a:p>
+        </p:txBody>
+      </p:sp>
+      <p:sp>
+        <p:nvSpPr>
+          <p:cNvPr id="10" name="Text Placeholder 9">
+            <a:extLst>
+              <a:ext uri="{FF2B5EF4-FFF2-40B4-BE49-F238E27FC236}">
+                <a16:creationId xmlns:a16="http://schemas.microsoft.com/office/drawing/2014/main" id="{3CC271C3-2751-4DDA-C95D-61E65E2C4072}"/>
+              </a:ext>
+            </a:extLst>
+          </p:cNvPr>
+          <p:cNvSpPr>
+            <a:spLocks noGrp="1"/>
+          </p:cNvSpPr>
+          <p:nvPr>
+            <p:ph type="body" sz="quarter" idx="11"/>
+          </p:nvPr>
+        </p:nvSpPr>
+        <p:spPr>
+          <a:xfrm>
+            <a:off x="3027363" y="1627188"/>
+            <a:ext cx="6178550" cy="2625216"/>
+          </a:xfrm>
+          <a:prstGeom prst="rect">
+            <a:avLst/>
+          </a:prstGeom>
+        </p:spPr>
+        <p:txBody>
+          <a:bodyPr anchor="ctr"/>
+          <a:lstStyle>
+            <a:lvl1pPr marL="0" indent="0" algn="ctr">
+              <a:buNone/>
+              <a:defRPr sz="3200" b="0" i="1">
+                <a:solidFill>
+                  <a:schemeClr val="bg2">
+                    <a:lumMod val="25000"/>
+                  </a:schemeClr>
+                </a:solidFill>
+                <a:latin typeface="+mj-lt"/>
+              </a:defRPr>
+            </a:lvl1pPr>
+          </a:lstStyle>
+          <a:p>
+            <a:pPr lvl="0"/>
+            <a:endParaRPr lang="en-US" dirty="0"/>
+          </a:p>
+        </p:txBody>
+      </p:sp>
+      <p:sp>
+        <p:nvSpPr>
+          <p:cNvPr id="12" name="Text Placeholder 11">
+            <a:extLst>
+              <a:ext uri="{FF2B5EF4-FFF2-40B4-BE49-F238E27FC236}">
+                <a16:creationId xmlns:a16="http://schemas.microsoft.com/office/drawing/2014/main" id="{0F6E1FB4-261B-CA90-BDD6-924DC2566383}"/>
+              </a:ext>
+            </a:extLst>
+          </p:cNvPr>
+          <p:cNvSpPr>
+            <a:spLocks noGrp="1"/>
+          </p:cNvSpPr>
+          <p:nvPr>
+            <p:ph type="body" sz="quarter" idx="12"/>
+          </p:nvPr>
+        </p:nvSpPr>
+        <p:spPr>
+          <a:xfrm>
+            <a:off x="3027364" y="5229225"/>
+            <a:ext cx="6178550" cy="711200"/>
+          </a:xfrm>
+          <a:prstGeom prst="rect">
+            <a:avLst/>
+          </a:prstGeom>
+        </p:spPr>
+        <p:txBody>
+          <a:bodyPr anchor="ctr"/>
+          <a:lstStyle>
+            <a:lvl1pPr marL="0" indent="0" algn="ctr">
+              <a:buNone/>
+              <a:defRPr sz="1600">
+                <a:solidFill>
+                  <a:schemeClr val="bg2">
+                    <a:lumMod val="50000"/>
+                  </a:schemeClr>
+                </a:solidFill>
+                <a:latin typeface="+mj-lt"/>
+              </a:defRPr>
+            </a:lvl1pPr>
+          </a:lstStyle>
+          <a:p>
+            <a:pPr lvl="0"/>
+            <a:endParaRPr lang="en-US" dirty="0"/>
+          </a:p>
+        </p:txBody>
+      </p:sp>
+    </p:spTree>
+    <p:extLst>
+      <p:ext uri="{BB962C8B-B14F-4D97-AF65-F5344CB8AC3E}">
+        <p14:creationId xmlns:p14="http://schemas.microsoft.com/office/powerpoint/2010/main" val="3464261209"/>
+      </p:ext>
+    </p:extLst>
+  </p:cSld>
+  <p:clrMapOvr>
+    <a:masterClrMapping/>
+  </p:clrMapOvr>
+</p:sldLayout>
+</file>
+
 <file path=ppt/slideMasters/slideMaster1.xml><?xml version="1.0" encoding="utf-8"?>
 <p:sldMaster xmlns:a="http://schemas.openxmlformats.org/drawingml/2006/main" xmlns:r="http://schemas.openxmlformats.org/officeDocument/2006/relationships" xmlns:p="http://schemas.openxmlformats.org/presentationml/2006/main">
   <p:cSld>
@@ -2719,7 +2956,7 @@
           <p:nvPr userDrawn="1"/>
         </p:nvPicPr>
         <p:blipFill>
-          <a:blip r:embed="rId8">
+          <a:blip r:embed="rId9">
             <a:extLst>
               <a:ext uri="{28A0092B-C50C-407E-A947-70E740481C1C}">
                 <a14:useLocalDpi xmlns:a14="http://schemas.microsoft.com/office/drawing/2010/main" val="0"/>
@@ -2755,6 +2992,7 @@
     <p:sldLayoutId id="2147483650" r:id="rId4"/>
     <p:sldLayoutId id="2147483652" r:id="rId5"/>
     <p:sldLayoutId id="2147483653" r:id="rId6"/>
+    <p:sldLayoutId id="2147483655" r:id="rId7"/>
   </p:sldLayoutIdLst>
   <p:hf hdr="0" ftr="0" dt="0"/>
   <p:txStyles>
@@ -3092,7 +3330,7 @@
           <p:cNvPr id="2" name="Content Placeholder 1">
             <a:extLst>
               <a:ext uri="{FF2B5EF4-FFF2-40B4-BE49-F238E27FC236}">
-                <a16:creationId xmlns:a16="http://schemas.microsoft.com/office/drawing/2014/main" id="{9C8BBB0D-C999-99C5-EAE9-1E6F097DDBF8}"/>
+                <a16:creationId xmlns:a16="http://schemas.microsoft.com/office/drawing/2014/main" id="{A54E6E08-C4BF-BDD5-8F2E-5710EDC31ADC}"/>
               </a:ext>
             </a:extLst>
           </p:cNvPr>
@@ -3110,14 +3348,32 @@
           <a:p>
             <a:r>
               <a:rPr lang="en-US" dirty="0"/>
-              <a:t>Distributed system designers generally parameterize the timeout detection mechanism so that it can be tuned for a system or infrastructure.</a:t>
+              <a:t>When a data center contains tens of thousands of physical computers, it is almost a certainty that one or more will fail every day.</a:t>
             </a:r>
           </a:p>
           <a:p>
             <a:pPr lvl="1"/>
             <a:r>
               <a:rPr lang="en-US" dirty="0"/>
-              <a:t>One parameter is the </a:t>
+              <a:t> Amazon reports that in a data center with around 64,000 computers, each with two spinning disk drives, approximately 5 computers and 17 disks will fail every day.</a:t>
+            </a:r>
+          </a:p>
+          <a:p>
+            <a:r>
+              <a:rPr lang="en-US" dirty="0"/>
+              <a:t>In addition to computer and disk failures, network switches can fail; the data center can overheat, causing all the computers to fail.</a:t>
+            </a:r>
+          </a:p>
+          <a:p>
+            <a:r>
+              <a:rPr lang="en-US" dirty="0"/>
+              <a:t>Although your cloud provider will have relatively few total outages, the physical computer on which your specific VM is running may fail.</a:t>
+            </a:r>
+          </a:p>
+          <a:p>
+            <a:r>
+              <a:rPr lang="en-US" dirty="0"/>
+              <a:t>We’ll discuss two concepts especially relevant to failure in the cloud: </a:t>
             </a:r>
             <a:r>
               <a:rPr lang="en-US" dirty="0">
@@ -3125,63 +3381,25 @@
                   <a:schemeClr val="accent1"/>
                 </a:solidFill>
               </a:rPr>
-              <a:t>timeout interval</a:t>
+              <a:t>timeouts</a:t>
+            </a:r>
+            <a:r>
+              <a:rPr lang="en-US" dirty="0"/>
+              <a:t> and </a:t>
+            </a:r>
+            <a:r>
+              <a:rPr lang="en-US" dirty="0">
+                <a:solidFill>
+                  <a:schemeClr val="accent1"/>
+                </a:solidFill>
+              </a:rPr>
+              <a:t>long tail latency</a:t>
             </a:r>
             <a:r>
               <a:rPr lang="en-US" dirty="0"/>
               <a:t>.</a:t>
             </a:r>
           </a:p>
-          <a:p>
-            <a:pPr lvl="1"/>
-            <a:r>
-              <a:rPr lang="en-US" dirty="0"/>
-              <a:t>Most systems do not trigger failure recovery after a single missed response. The number of missed responses before failure recovery is a second parameter for the timeout mechanism.</a:t>
-            </a:r>
-            <a:endParaRPr lang="en-US" dirty="0">
-              <a:solidFill>
-                <a:schemeClr val="accent4">
-                  <a:lumMod val="50000"/>
-                </a:schemeClr>
-              </a:solidFill>
-            </a:endParaRPr>
-          </a:p>
-          <a:p>
-            <a:r>
-              <a:rPr lang="en-US" dirty="0">
-                <a:solidFill>
-                  <a:schemeClr val="tx1">
-                    <a:lumMod val="95000"/>
-                    <a:lumOff val="5000"/>
-                  </a:schemeClr>
-                </a:solidFill>
-              </a:rPr>
-              <a:t>Timeout settings differ by environment:</a:t>
-            </a:r>
-          </a:p>
-          <a:p>
-            <a:pPr lvl="1">
-              <a:buFont typeface="Arial" panose="020B0604020202020204" pitchFamily="34" charset="0"/>
-              <a:buChar char="•"/>
-            </a:pPr>
-            <a:r>
-              <a:rPr lang="en-US" dirty="0"/>
-              <a:t>In single data center systems, you can use shorter timeouts since delays are rare and failures are often real.</a:t>
-            </a:r>
-          </a:p>
-          <a:p>
-            <a:pPr lvl="1">
-              <a:buFont typeface="Arial" panose="020B0604020202020204" pitchFamily="34" charset="0"/>
-              <a:buChar char="•"/>
-            </a:pPr>
-            <a:r>
-              <a:rPr lang="en-US" dirty="0"/>
-              <a:t>In wider, less reliable networks you should use more relaxed timeout settings to avoid reacting to normal delays as if they were failures.</a:t>
-            </a:r>
-          </a:p>
-          <a:p>
-            <a:endParaRPr lang="en-US" dirty="0"/>
-          </a:p>
         </p:txBody>
       </p:sp>
       <p:sp>
@@ -3189,7 +3407,7 @@
           <p:cNvPr id="3" name="Title 2">
             <a:extLst>
               <a:ext uri="{FF2B5EF4-FFF2-40B4-BE49-F238E27FC236}">
-                <a16:creationId xmlns:a16="http://schemas.microsoft.com/office/drawing/2014/main" id="{B3E82180-CF63-569E-C9B6-F71C612D27A7}"/>
+                <a16:creationId xmlns:a16="http://schemas.microsoft.com/office/drawing/2014/main" id="{30772A3B-84AA-EA49-54FA-0856935E1540}"/>
               </a:ext>
             </a:extLst>
           </p:cNvPr>
@@ -3207,7 +3425,7 @@
           <a:p>
             <a:r>
               <a:rPr lang="en-US" dirty="0"/>
-              <a:t>Timeouts</a:t>
+              <a:t>17.2 Failure in the Cloud</a:t>
             </a:r>
           </a:p>
         </p:txBody>
@@ -3217,7 +3435,7 @@
           <p:cNvPr id="4" name="Slide Number Placeholder 3">
             <a:extLst>
               <a:ext uri="{FF2B5EF4-FFF2-40B4-BE49-F238E27FC236}">
-                <a16:creationId xmlns:a16="http://schemas.microsoft.com/office/drawing/2014/main" id="{328516FA-42DF-A57E-E93E-62E1BBDEF1CF}"/>
+                <a16:creationId xmlns:a16="http://schemas.microsoft.com/office/drawing/2014/main" id="{ACCDF35E-DCE7-A79E-66A4-C704B4E938D7}"/>
               </a:ext>
             </a:extLst>
           </p:cNvPr>
@@ -3245,7 +3463,7 @@
     </p:spTree>
     <p:extLst>
       <p:ext uri="{BB962C8B-B14F-4D97-AF65-F5344CB8AC3E}">
-        <p14:creationId xmlns:p14="http://schemas.microsoft.com/office/powerpoint/2010/main" val="3221678274"/>
+        <p14:creationId xmlns:p14="http://schemas.microsoft.com/office/powerpoint/2010/main" val="4113126826"/>
       </p:ext>
     </p:extLst>
   </p:cSld>
@@ -3272,43 +3490,12 @@
           <a:chExt cx="0" cy="0"/>
         </a:xfrm>
       </p:grpSpPr>
-      <p:pic>
-        <p:nvPicPr>
-          <p:cNvPr id="8" name="Picture Placeholder 7">
-            <a:extLst>
-              <a:ext uri="{FF2B5EF4-FFF2-40B4-BE49-F238E27FC236}">
-                <a16:creationId xmlns:a16="http://schemas.microsoft.com/office/drawing/2014/main" id="{C311109B-940C-652E-8BD8-F30C168A96C4}"/>
-              </a:ext>
-            </a:extLst>
-          </p:cNvPr>
-          <p:cNvPicPr>
-            <a:picLocks noGrp="1" noChangeAspect="1"/>
-          </p:cNvPicPr>
-          <p:nvPr>
-            <p:ph type="pic" sz="quarter" idx="11"/>
-          </p:nvPr>
-        </p:nvPicPr>
-        <p:blipFill>
-          <a:blip r:embed="rId2">
-            <a:extLst>
-              <a:ext uri="{28A0092B-C50C-407E-A947-70E740481C1C}">
-                <a14:useLocalDpi xmlns:a14="http://schemas.microsoft.com/office/drawing/2010/main" val="0"/>
-              </a:ext>
-            </a:extLst>
-          </a:blip>
-          <a:srcRect l="663" r="663"/>
-          <a:stretch>
-            <a:fillRect/>
-          </a:stretch>
-        </p:blipFill>
-        <p:spPr/>
-      </p:pic>
-      <p:sp>
-        <p:nvSpPr>
-          <p:cNvPr id="3" name="Content Placeholder 2">
-            <a:extLst>
-              <a:ext uri="{FF2B5EF4-FFF2-40B4-BE49-F238E27FC236}">
-                <a16:creationId xmlns:a16="http://schemas.microsoft.com/office/drawing/2014/main" id="{D163E54C-6A35-D85A-4410-85DEA1A85275}"/>
+      <p:sp>
+        <p:nvSpPr>
+          <p:cNvPr id="2" name="Content Placeholder 1">
+            <a:extLst>
+              <a:ext uri="{FF2B5EF4-FFF2-40B4-BE49-F238E27FC236}">
+                <a16:creationId xmlns:a16="http://schemas.microsoft.com/office/drawing/2014/main" id="{16E5DD95-8172-F85A-C6E1-5215400C709D}"/>
               </a:ext>
             </a:extLst>
           </p:cNvPr>
@@ -3325,40 +3512,71 @@
           <a:lstStyle/>
           <a:p>
             <a:r>
+              <a:rPr lang="en-US" dirty="0"/>
+              <a:t>Recall that </a:t>
+            </a:r>
+            <a:r>
               <a:rPr lang="en-US" dirty="0">
                 <a:solidFill>
                   <a:schemeClr val="accent1"/>
                 </a:solidFill>
               </a:rPr>
-              <a:t>Long-tail latency </a:t>
-            </a:r>
-            <a:r>
-              <a:rPr lang="en-US" dirty="0"/>
-              <a:t>refers to the impact of a small percentage of requests that take significantly longer to process than the majority of requests.</a:t>
-            </a:r>
-          </a:p>
-          <a:p>
-            <a:r>
-              <a:rPr lang="en-US" dirty="0"/>
-              <a:t>This figure shows a histogram of the latency of 1,000 “launch instance” requests to Amazon Web Services. </a:t>
-            </a:r>
-          </a:p>
-        </p:txBody>
-      </p:sp>
-      <p:sp>
-        <p:nvSpPr>
-          <p:cNvPr id="4" name="Content Placeholder 3">
-            <a:extLst>
-              <a:ext uri="{FF2B5EF4-FFF2-40B4-BE49-F238E27FC236}">
-                <a16:creationId xmlns:a16="http://schemas.microsoft.com/office/drawing/2014/main" id="{AAAF8368-E5EB-D9D6-B666-E24F86CDDAB3}"/>
-              </a:ext>
-            </a:extLst>
-          </p:cNvPr>
-          <p:cNvSpPr>
-            <a:spLocks noGrp="1"/>
-          </p:cNvSpPr>
-          <p:nvPr>
-            <p:ph sz="half" idx="12"/>
+              <a:t>timeout</a:t>
+            </a:r>
+            <a:r>
+              <a:rPr lang="en-US" dirty="0"/>
+              <a:t> is a tactic for availability. In a distributed system, timeouts are used to detect failure. There are several consequences of using timeouts:</a:t>
+            </a:r>
+          </a:p>
+          <a:p>
+            <a:pPr lvl="1"/>
+            <a:r>
+              <a:rPr lang="en-US" dirty="0"/>
+              <a:t>Timeouts can’t distinguish between a failed computer or broken network connection and a slow reply to a message that exceeds the timeout period. This will cause you to label some slow responses as failures.</a:t>
+            </a:r>
+          </a:p>
+          <a:p>
+            <a:pPr lvl="1"/>
+            <a:r>
+              <a:rPr lang="en-US" dirty="0"/>
+              <a:t>A timeout will not tell you where the failure or slowness occurs.</a:t>
+            </a:r>
+          </a:p>
+          <a:p>
+            <a:pPr lvl="1"/>
+            <a:r>
+              <a:rPr lang="en-US" dirty="0"/>
+              <a:t>Many times, a request to a service triggers that service to make requests to other services, which make more requests. Even if each of the responses in this chain has a latency that is close to (but slower than) the expected average response time, the overall latency may falsely suggest a failure.</a:t>
+            </a:r>
+          </a:p>
+          <a:p>
+            <a:r>
+              <a:rPr lang="en-US" dirty="0"/>
+              <a:t>There is usually a cost for a recovery action. Jumping to a conclusion that there was a failure, when there was actually just a temporary delay, may add a recovery cost when it isn’t necessary.</a:t>
+            </a:r>
+          </a:p>
+          <a:p>
+            <a:endParaRPr lang="en-US" dirty="0"/>
+          </a:p>
+          <a:p>
+            <a:endParaRPr lang="en-US" dirty="0"/>
+          </a:p>
+        </p:txBody>
+      </p:sp>
+      <p:sp>
+        <p:nvSpPr>
+          <p:cNvPr id="3" name="Title 2">
+            <a:extLst>
+              <a:ext uri="{FF2B5EF4-FFF2-40B4-BE49-F238E27FC236}">
+                <a16:creationId xmlns:a16="http://schemas.microsoft.com/office/drawing/2014/main" id="{533A58F3-0DEA-56E3-4521-E4C1E8C569A6}"/>
+              </a:ext>
+            </a:extLst>
+          </p:cNvPr>
+          <p:cNvSpPr>
+            <a:spLocks noGrp="1"/>
+          </p:cNvSpPr>
+          <p:nvPr>
+            <p:ph type="title"/>
           </p:nvPr>
         </p:nvSpPr>
         <p:spPr/>
@@ -3368,67 +3586,25 @@
           <a:p>
             <a:r>
               <a:rPr lang="en-US" dirty="0"/>
-              <a:t>You must be careful which statistic you use. In this case, the histogram peaks at a latency of 22 seconds, the average latency over all the measurements is 28 seconds, and the median latency is 23 seconds.</a:t>
-            </a:r>
-          </a:p>
-          <a:p>
-            <a:pPr lvl="1"/>
-            <a:r>
-              <a:rPr lang="en-US" dirty="0"/>
-              <a:t>Although the mean latency for each service-to-service request to a cloud-based service may be within tolerable limits, a reasonable number of these requests can have much greater latency.</a:t>
-            </a:r>
-          </a:p>
-          <a:p>
-            <a:pPr lvl="1"/>
-            <a:r>
-              <a:rPr lang="en-US" dirty="0"/>
-              <a:t>Notice how right side of the histogram looks like a long tail on the ground.</a:t>
-            </a:r>
-          </a:p>
-        </p:txBody>
-      </p:sp>
-      <p:sp>
-        <p:nvSpPr>
-          <p:cNvPr id="5" name="Title 4">
-            <a:extLst>
-              <a:ext uri="{FF2B5EF4-FFF2-40B4-BE49-F238E27FC236}">
-                <a16:creationId xmlns:a16="http://schemas.microsoft.com/office/drawing/2014/main" id="{6E44E832-10D6-DA1F-377B-09B7684AA281}"/>
-              </a:ext>
-            </a:extLst>
-          </p:cNvPr>
-          <p:cNvSpPr>
-            <a:spLocks noGrp="1"/>
-          </p:cNvSpPr>
-          <p:nvPr>
-            <p:ph type="title"/>
-          </p:nvPr>
-        </p:nvSpPr>
-        <p:spPr/>
-        <p:txBody>
-          <a:bodyPr/>
-          <a:lstStyle/>
-          <a:p>
-            <a:r>
-              <a:rPr lang="en-US" dirty="0"/>
-              <a:t>Long Tail Latency</a:t>
-            </a:r>
-          </a:p>
-        </p:txBody>
-      </p:sp>
-      <p:sp>
-        <p:nvSpPr>
-          <p:cNvPr id="6" name="Slide Number Placeholder 5">
-            <a:extLst>
-              <a:ext uri="{FF2B5EF4-FFF2-40B4-BE49-F238E27FC236}">
-                <a16:creationId xmlns:a16="http://schemas.microsoft.com/office/drawing/2014/main" id="{6762A936-F40E-CFD3-EB01-7C0351991945}"/>
-              </a:ext>
-            </a:extLst>
-          </p:cNvPr>
-          <p:cNvSpPr>
-            <a:spLocks noGrp="1"/>
-          </p:cNvSpPr>
-          <p:nvPr>
-            <p:ph type="sldNum" sz="quarter" idx="13"/>
+              <a:t>Timeouts</a:t>
+            </a:r>
+          </a:p>
+        </p:txBody>
+      </p:sp>
+      <p:sp>
+        <p:nvSpPr>
+          <p:cNvPr id="4" name="Slide Number Placeholder 3">
+            <a:extLst>
+              <a:ext uri="{FF2B5EF4-FFF2-40B4-BE49-F238E27FC236}">
+                <a16:creationId xmlns:a16="http://schemas.microsoft.com/office/drawing/2014/main" id="{FC6B1EDC-ADFF-73F4-6772-A9A33AF40ED6}"/>
+              </a:ext>
+            </a:extLst>
+          </p:cNvPr>
+          <p:cNvSpPr>
+            <a:spLocks noGrp="1"/>
+          </p:cNvSpPr>
+          <p:nvPr>
+            <p:ph type="sldNum" sz="quarter" idx="10"/>
           </p:nvPr>
         </p:nvSpPr>
         <p:spPr/>
@@ -3448,7 +3624,7 @@
     </p:spTree>
     <p:extLst>
       <p:ext uri="{BB962C8B-B14F-4D97-AF65-F5344CB8AC3E}">
-        <p14:creationId xmlns:p14="http://schemas.microsoft.com/office/powerpoint/2010/main" val="3507271902"/>
+        <p14:creationId xmlns:p14="http://schemas.microsoft.com/office/powerpoint/2010/main" val="3918695811"/>
       </p:ext>
     </p:extLst>
   </p:cSld>
@@ -3480,7 +3656,7 @@
           <p:cNvPr id="2" name="Content Placeholder 1">
             <a:extLst>
               <a:ext uri="{FF2B5EF4-FFF2-40B4-BE49-F238E27FC236}">
-                <a16:creationId xmlns:a16="http://schemas.microsoft.com/office/drawing/2014/main" id="{4B7584A5-2EAE-4DDD-A22B-3B929133188E}"/>
+                <a16:creationId xmlns:a16="http://schemas.microsoft.com/office/drawing/2014/main" id="{9C8BBB0D-C999-99C5-EAE9-1E6F097DDBF8}"/>
               </a:ext>
             </a:extLst>
           </p:cNvPr>
@@ -3498,13 +3674,14 @@
           <a:p>
             <a:r>
               <a:rPr lang="en-US" dirty="0"/>
-              <a:t>If a service hosted in a cloud receives more requests than it can process within the required latency, the service becomes overloaded.</a:t>
-            </a:r>
-          </a:p>
-          <a:p>
-            <a:r>
-              <a:rPr lang="en-US" dirty="0"/>
-              <a:t>Sometimes, you can fix this problem by running the service on a different virtual machine that has more resources. This is called </a:t>
+              <a:t>Distributed system designers generally parameterize the timeout detection mechanism so that it can be tuned for a system or infrastructure.</a:t>
+            </a:r>
+          </a:p>
+          <a:p>
+            <a:pPr lvl="1"/>
+            <a:r>
+              <a:rPr lang="en-US" dirty="0"/>
+              <a:t>One parameter is the </a:t>
             </a:r>
             <a:r>
               <a:rPr lang="en-US" dirty="0">
@@ -3512,7 +3689,7 @@
                   <a:schemeClr val="accent1"/>
                 </a:solidFill>
               </a:rPr>
-              <a:t>vertical scaling</a:t>
+              <a:t>timeout interval</a:t>
             </a:r>
             <a:r>
               <a:rPr lang="en-US" dirty="0"/>
@@ -3520,24 +3697,54 @@
             </a:r>
           </a:p>
           <a:p>
-            <a:r>
-              <a:rPr lang="en-US" dirty="0"/>
-              <a:t>There are limits to what can be achieved with vertical scaling. In particular, there may not be a large enough VM instance type to support the workload.</a:t>
-            </a:r>
+            <a:pPr lvl="1"/>
+            <a:r>
+              <a:rPr lang="en-US" dirty="0"/>
+              <a:t>Most systems do not trigger failure recovery after a single missed response. The number of missed responses before failure recovery is a second parameter for the timeout mechanism.</a:t>
+            </a:r>
+            <a:endParaRPr lang="en-US" dirty="0">
+              <a:solidFill>
+                <a:schemeClr val="accent4">
+                  <a:lumMod val="50000"/>
+                </a:schemeClr>
+              </a:solidFill>
+            </a:endParaRPr>
           </a:p>
           <a:p>
             <a:r>
               <a:rPr lang="en-US" dirty="0">
                 <a:solidFill>
-                  <a:schemeClr val="accent1"/>
+                  <a:schemeClr val="tx1">
+                    <a:lumMod val="95000"/>
+                    <a:lumOff val="5000"/>
+                  </a:schemeClr>
                 </a:solidFill>
               </a:rPr>
-              <a:t>Horizontal scaling</a:t>
-            </a:r>
-            <a:r>
-              <a:rPr lang="en-US" dirty="0"/>
-              <a:t> involves having multiple copies of the same service and using a load balancer to distribute requests among them—equivalent to the maintain multiple copies of computations tactic and the load balancer pattern.</a:t>
-            </a:r>
+              <a:t>Timeout settings differ by environment:</a:t>
+            </a:r>
+          </a:p>
+          <a:p>
+            <a:pPr lvl="1">
+              <a:buFont typeface="Arial" panose="020B0604020202020204" pitchFamily="34" charset="0"/>
+              <a:buChar char="•"/>
+            </a:pPr>
+            <a:r>
+              <a:rPr lang="en-US" dirty="0"/>
+              <a:t>In single data center systems, you can use shorter timeouts since delays are rare and failures are often real.</a:t>
+            </a:r>
+          </a:p>
+          <a:p>
+            <a:pPr lvl="1">
+              <a:buFont typeface="Arial" panose="020B0604020202020204" pitchFamily="34" charset="0"/>
+              <a:buChar char="•"/>
+            </a:pPr>
+            <a:r>
+              <a:rPr lang="en-US" dirty="0"/>
+              <a:t>In wider, less reliable networks you should use more relaxed timeout settings to avoid reacting to normal delays as if they were failures.</a:t>
+            </a:r>
+          </a:p>
+          <a:p>
+            <a:endParaRPr lang="en-US" dirty="0"/>
           </a:p>
         </p:txBody>
       </p:sp>
@@ -3546,7 +3753,7 @@
           <p:cNvPr id="3" name="Title 2">
             <a:extLst>
               <a:ext uri="{FF2B5EF4-FFF2-40B4-BE49-F238E27FC236}">
-                <a16:creationId xmlns:a16="http://schemas.microsoft.com/office/drawing/2014/main" id="{3FF002B1-8C75-84E0-923B-F639313513BA}"/>
+                <a16:creationId xmlns:a16="http://schemas.microsoft.com/office/drawing/2014/main" id="{B3E82180-CF63-569E-C9B6-F71C612D27A7}"/>
               </a:ext>
             </a:extLst>
           </p:cNvPr>
@@ -3559,14 +3766,12 @@
         </p:nvSpPr>
         <p:spPr/>
         <p:txBody>
-          <a:bodyPr>
-            <a:noAutofit/>
-          </a:bodyPr>
+          <a:bodyPr/>
           <a:lstStyle/>
           <a:p>
             <a:r>
-              <a:rPr lang="en-US" sz="3200" dirty="0"/>
-              <a:t>17.3 Multiple Instances for Performance and Availability</a:t>
+              <a:rPr lang="en-US" dirty="0"/>
+              <a:t>Timeouts</a:t>
             </a:r>
           </a:p>
         </p:txBody>
@@ -3576,7 +3781,7 @@
           <p:cNvPr id="4" name="Slide Number Placeholder 3">
             <a:extLst>
               <a:ext uri="{FF2B5EF4-FFF2-40B4-BE49-F238E27FC236}">
-                <a16:creationId xmlns:a16="http://schemas.microsoft.com/office/drawing/2014/main" id="{535C1357-5EDE-7790-CCDF-203B74BB53BB}"/>
+                <a16:creationId xmlns:a16="http://schemas.microsoft.com/office/drawing/2014/main" id="{328516FA-42DF-A57E-E93E-62E1BBDEF1CF}"/>
               </a:ext>
             </a:extLst>
           </p:cNvPr>
@@ -3604,7 +3809,7 @@
     </p:spTree>
     <p:extLst>
       <p:ext uri="{BB962C8B-B14F-4D97-AF65-F5344CB8AC3E}">
-        <p14:creationId xmlns:p14="http://schemas.microsoft.com/office/powerpoint/2010/main" val="2368022643"/>
+        <p14:creationId xmlns:p14="http://schemas.microsoft.com/office/powerpoint/2010/main" val="3221678274"/>
       </p:ext>
     </p:extLst>
   </p:cSld>
@@ -3636,7 +3841,7 @@
           <p:cNvPr id="8" name="Picture Placeholder 7">
             <a:extLst>
               <a:ext uri="{FF2B5EF4-FFF2-40B4-BE49-F238E27FC236}">
-                <a16:creationId xmlns:a16="http://schemas.microsoft.com/office/drawing/2014/main" id="{724870F5-897E-9915-8588-1D62A52AEEBB}"/>
+                <a16:creationId xmlns:a16="http://schemas.microsoft.com/office/drawing/2014/main" id="{C311109B-940C-652E-8BD8-F30C168A96C4}"/>
               </a:ext>
             </a:extLst>
           </p:cNvPr>
@@ -3655,7 +3860,7 @@
               </a:ext>
             </a:extLst>
           </a:blip>
-          <a:srcRect l="536" r="536"/>
+          <a:srcRect l="663" r="663"/>
           <a:stretch>
             <a:fillRect/>
           </a:stretch>
@@ -3667,7 +3872,7 @@
           <p:cNvPr id="3" name="Content Placeholder 2">
             <a:extLst>
               <a:ext uri="{FF2B5EF4-FFF2-40B4-BE49-F238E27FC236}">
-                <a16:creationId xmlns:a16="http://schemas.microsoft.com/office/drawing/2014/main" id="{5D89FAB1-63EB-FFEB-94C4-A72CCB440963}"/>
+                <a16:creationId xmlns:a16="http://schemas.microsoft.com/office/drawing/2014/main" id="{D163E54C-6A35-D85A-4410-85DEA1A85275}"/>
               </a:ext>
             </a:extLst>
           </p:cNvPr>
@@ -3684,50 +3889,22 @@
           <a:lstStyle/>
           <a:p>
             <a:r>
-              <a:rPr lang="en-US" dirty="0"/>
-              <a:t>Suppose the load balancer sends the first request to instance 1, the second request to instance 2, the third request back to instance 1, and so forth.</a:t>
-            </a:r>
-          </a:p>
-          <a:p>
-            <a:pPr lvl="1"/>
-            <a:r>
-              <a:rPr lang="en-US" dirty="0"/>
-              <a:t>The algorithm we provided is called </a:t>
-            </a:r>
-            <a:r>
               <a:rPr lang="en-US" dirty="0">
                 <a:solidFill>
                   <a:schemeClr val="accent1"/>
                 </a:solidFill>
               </a:rPr>
-              <a:t>round-robin</a:t>
-            </a:r>
-            <a:r>
-              <a:rPr lang="en-US" dirty="0"/>
-              <a:t>.</a:t>
-            </a:r>
-          </a:p>
-          <a:p>
-            <a:pPr lvl="1"/>
-            <a:r>
-              <a:rPr lang="en-US" dirty="0">
-                <a:solidFill>
-                  <a:schemeClr val="tx1"/>
-                </a:solidFill>
-              </a:rPr>
-              <a:t>round-robin</a:t>
-            </a:r>
-            <a:r>
-              <a:rPr lang="en-US" dirty="0">
-                <a:solidFill>
-                  <a:schemeClr val="accent1"/>
-                </a:solidFill>
-              </a:rPr>
-              <a:t> </a:t>
-            </a:r>
-            <a:r>
-              <a:rPr lang="en-US" dirty="0"/>
-              <a:t>balances the load uniformly if every request consumes roughly the same resources.</a:t>
+              <a:t>Long-tail latency </a:t>
+            </a:r>
+            <a:r>
+              <a:rPr lang="en-US" dirty="0"/>
+              <a:t>refers to the impact of a small percentage of requests that take significantly longer to process than the majority of requests.</a:t>
+            </a:r>
+          </a:p>
+          <a:p>
+            <a:r>
+              <a:rPr lang="en-US" dirty="0"/>
+              <a:t>This figure shows a histogram of the latency of 1,000 “launch instance” requests to Amazon Web Services. </a:t>
             </a:r>
           </a:p>
         </p:txBody>
@@ -3737,7 +3914,7 @@
           <p:cNvPr id="4" name="Content Placeholder 3">
             <a:extLst>
               <a:ext uri="{FF2B5EF4-FFF2-40B4-BE49-F238E27FC236}">
-                <a16:creationId xmlns:a16="http://schemas.microsoft.com/office/drawing/2014/main" id="{F56C0A6D-DBB7-F434-73A9-B3FBA4AF365B}"/>
+                <a16:creationId xmlns:a16="http://schemas.microsoft.com/office/drawing/2014/main" id="{AAAF8368-E5EB-D9D6-B666-E24F86CDDAB3}"/>
               </a:ext>
             </a:extLst>
           </p:cNvPr>
@@ -3753,35 +3930,23 @@
           <a:bodyPr/>
           <a:lstStyle/>
           <a:p>
+            <a:r>
+              <a:rPr lang="en-US" dirty="0"/>
+              <a:t>You must be careful which statistic you use. In this case, the histogram peaks at a latency of 22 seconds, the average latency over all the measurements is 28 seconds, and the median latency is 23 seconds.</a:t>
+            </a:r>
+          </a:p>
+          <a:p>
             <a:pPr lvl="1"/>
             <a:r>
               <a:rPr lang="en-US" dirty="0"/>
-              <a:t>From a client’s perspective, the service’s IP address is actually the address of the load balancer.</a:t>
+              <a:t>Although the mean latency for each service-to-service request to a cloud-based service may be within tolerable limits, a reasonable number of these requests can have much greater latency.</a:t>
             </a:r>
           </a:p>
           <a:p>
             <a:pPr lvl="1"/>
             <a:r>
               <a:rPr lang="en-US" dirty="0"/>
-              <a:t>Load balancers may get overloaded. In this case, the solution is to balance the load of the load balancer, sometimes referred to as </a:t>
-            </a:r>
-            <a:r>
-              <a:rPr lang="en-US" dirty="0">
-                <a:solidFill>
-                  <a:schemeClr val="accent1"/>
-                </a:solidFill>
-              </a:rPr>
-              <a:t>global load balancing</a:t>
-            </a:r>
-            <a:r>
-              <a:rPr lang="en-US" dirty="0"/>
-              <a:t>. That is, a message goes through a hierarchy of load balancers before arriving at the service instance.</a:t>
-            </a:r>
-          </a:p>
-          <a:p>
-            <a:r>
-              <a:rPr lang="en-US" dirty="0"/>
-              <a:t>Load balancers increase the amount of work that can be handled. We'll see how load balancers also serve to increase the availability of services.</a:t>
+              <a:t>Notice how right side of the histogram looks like a long tail on the ground.</a:t>
             </a:r>
           </a:p>
         </p:txBody>
@@ -3791,7 +3956,7 @@
           <p:cNvPr id="5" name="Title 4">
             <a:extLst>
               <a:ext uri="{FF2B5EF4-FFF2-40B4-BE49-F238E27FC236}">
-                <a16:creationId xmlns:a16="http://schemas.microsoft.com/office/drawing/2014/main" id="{880C7085-0CFE-0FA4-1531-85760CE5A07B}"/>
+                <a16:creationId xmlns:a16="http://schemas.microsoft.com/office/drawing/2014/main" id="{6E44E832-10D6-DA1F-377B-09B7684AA281}"/>
               </a:ext>
             </a:extLst>
           </p:cNvPr>
@@ -3809,7 +3974,7 @@
           <a:p>
             <a:r>
               <a:rPr lang="en-US" dirty="0"/>
-              <a:t>Load Balancers</a:t>
+              <a:t>Long Tail Latency</a:t>
             </a:r>
           </a:p>
         </p:txBody>
@@ -3819,7 +3984,7 @@
           <p:cNvPr id="6" name="Slide Number Placeholder 5">
             <a:extLst>
               <a:ext uri="{FF2B5EF4-FFF2-40B4-BE49-F238E27FC236}">
-                <a16:creationId xmlns:a16="http://schemas.microsoft.com/office/drawing/2014/main" id="{6BC41EE5-BF20-5664-564F-590A9CA53507}"/>
+                <a16:creationId xmlns:a16="http://schemas.microsoft.com/office/drawing/2014/main" id="{6762A936-F40E-CFD3-EB01-7C0351991945}"/>
               </a:ext>
             </a:extLst>
           </p:cNvPr>
@@ -3847,7 +4012,7 @@
     </p:spTree>
     <p:extLst>
       <p:ext uri="{BB962C8B-B14F-4D97-AF65-F5344CB8AC3E}">
-        <p14:creationId xmlns:p14="http://schemas.microsoft.com/office/powerpoint/2010/main" val="2571040086"/>
+        <p14:creationId xmlns:p14="http://schemas.microsoft.com/office/powerpoint/2010/main" val="3507271902"/>
       </p:ext>
     </p:extLst>
   </p:cSld>
@@ -3879,7 +4044,7 @@
           <p:cNvPr id="2" name="Content Placeholder 1">
             <a:extLst>
               <a:ext uri="{FF2B5EF4-FFF2-40B4-BE49-F238E27FC236}">
-                <a16:creationId xmlns:a16="http://schemas.microsoft.com/office/drawing/2014/main" id="{D24B453F-8A55-9D54-DCDF-0DEFDE240B07}"/>
+                <a16:creationId xmlns:a16="http://schemas.microsoft.com/office/drawing/2014/main" id="{4B7584A5-2EAE-4DDD-A22B-3B929133188E}"/>
               </a:ext>
             </a:extLst>
           </p:cNvPr>
@@ -3897,102 +4062,45 @@
           <a:p>
             <a:r>
               <a:rPr lang="en-US" dirty="0"/>
-              <a:t>While requests go </a:t>
-            </a:r>
-            <a:r>
-              <a:rPr lang="en-US" i="1" dirty="0"/>
-              <a:t>through</a:t>
-            </a:r>
-            <a:r>
-              <a:rPr lang="en-US" dirty="0"/>
-              <a:t> the load balancer, responses go </a:t>
-            </a:r>
-            <a:r>
-              <a:rPr lang="en-US" i="1" dirty="0"/>
-              <a:t>directly</a:t>
-            </a:r>
-            <a:r>
-              <a:rPr lang="en-US" dirty="0"/>
-              <a:t> back to the clients.</a:t>
-            </a:r>
-          </a:p>
-          <a:p>
-            <a:pPr lvl="1"/>
-            <a:r>
-              <a:rPr lang="en-US" dirty="0"/>
-              <a:t>As a consequence, the load balancer has no information about whether a message was processed by a service instance, or how long it took to process a message.</a:t>
-            </a:r>
-          </a:p>
-          <a:p>
-            <a:pPr lvl="1"/>
-            <a:r>
-              <a:rPr lang="en-US" dirty="0"/>
-              <a:t>Hence the load balancer would not know whether any service instance was alive or if it had failed.</a:t>
-            </a:r>
-          </a:p>
-          <a:p>
+              <a:t>If a service hosted in a cloud receives more requests than it can process within the required latency, the service becomes overloaded.</a:t>
+            </a:r>
+          </a:p>
+          <a:p>
+            <a:r>
+              <a:rPr lang="en-US" dirty="0"/>
+              <a:t>Sometimes, you can fix this problem by running the service on a different virtual machine that has more resources. This is called </a:t>
+            </a:r>
             <a:r>
               <a:rPr lang="en-US" dirty="0">
                 <a:solidFill>
                   <a:schemeClr val="accent1"/>
                 </a:solidFill>
               </a:rPr>
-              <a:t>Health checks </a:t>
-            </a:r>
-            <a:r>
-              <a:rPr lang="en-US" dirty="0"/>
-              <a:t>are a mechanism that allow the load balancer to determine whether an instance is performing properly.</a:t>
-            </a:r>
-          </a:p>
-          <a:p>
-            <a:pPr lvl="1"/>
-            <a:r>
-              <a:rPr lang="en-US" dirty="0"/>
-              <a:t>The load balancer will periodically check the health of the instances assigned to it.</a:t>
-            </a:r>
-          </a:p>
-          <a:p>
-            <a:pPr lvl="1"/>
-            <a:r>
-              <a:rPr lang="en-US" dirty="0"/>
-              <a:t>If an instance fails to respond to a health check, it is marked as unhealthy and no further messages are sent to it.</a:t>
-            </a:r>
-          </a:p>
-          <a:p>
-            <a:pPr lvl="1"/>
-            <a:r>
-              <a:rPr lang="en-US" dirty="0"/>
-              <a:t>Health checks can consist of </a:t>
-            </a:r>
-            <a:r>
-              <a:rPr lang="en-US" i="1" dirty="0">
-                <a:solidFill>
-                  <a:schemeClr val="tx1"/>
+              <a:t>vertical scaling</a:t>
+            </a:r>
+            <a:r>
+              <a:rPr lang="en-US" dirty="0"/>
+              <a:t>.</a:t>
+            </a:r>
+          </a:p>
+          <a:p>
+            <a:r>
+              <a:rPr lang="en-US" dirty="0"/>
+              <a:t>There are limits to what can be achieved with vertical scaling. In particular, there may not be a large enough VM instance type to support the workload.</a:t>
+            </a:r>
+          </a:p>
+          <a:p>
+            <a:r>
+              <a:rPr lang="en-US" dirty="0">
+                <a:solidFill>
+                  <a:schemeClr val="accent1"/>
                 </a:solidFill>
               </a:rPr>
-              <a:t>pings</a:t>
-            </a:r>
-            <a:r>
-              <a:rPr lang="en-US" dirty="0"/>
-              <a:t> from the load balancer to the instance, opening a </a:t>
-            </a:r>
-            <a:r>
-              <a:rPr lang="en-US" i="1" dirty="0">
-                <a:solidFill>
-                  <a:schemeClr val="tx1"/>
-                </a:solidFill>
-              </a:rPr>
-              <a:t>TCP</a:t>
-            </a:r>
-            <a:r>
-              <a:rPr lang="en-US" dirty="0"/>
-              <a:t> connection to the instance or even sending a message for processing.</a:t>
-            </a:r>
-          </a:p>
-          <a:p>
-            <a:r>
-              <a:rPr lang="en-US" dirty="0"/>
-              <a:t>A load balancer with health checking improves availability by hiding the failure of a service instance from clients.</a:t>
+              <a:t>Horizontal scaling</a:t>
+            </a:r>
+            <a:r>
+              <a:rPr lang="en-US" dirty="0"/>
+              <a:t> involves having multiple copies of the same service and using a load balancer to distribute requests among them—equivalent to the maintain multiple copies of computations tactic and the load balancer pattern.</a:t>
             </a:r>
           </a:p>
         </p:txBody>
@@ -4002,7 +4110,7 @@
           <p:cNvPr id="3" name="Title 2">
             <a:extLst>
               <a:ext uri="{FF2B5EF4-FFF2-40B4-BE49-F238E27FC236}">
-                <a16:creationId xmlns:a16="http://schemas.microsoft.com/office/drawing/2014/main" id="{E5DB2526-D329-E7EF-1C6A-7A7CECA98CA7}"/>
+                <a16:creationId xmlns:a16="http://schemas.microsoft.com/office/drawing/2014/main" id="{3FF002B1-8C75-84E0-923B-F639313513BA}"/>
               </a:ext>
             </a:extLst>
           </p:cNvPr>
@@ -4015,12 +4123,14 @@
         </p:nvSpPr>
         <p:spPr/>
         <p:txBody>
-          <a:bodyPr/>
+          <a:bodyPr>
+            <a:noAutofit/>
+          </a:bodyPr>
           <a:lstStyle/>
           <a:p>
             <a:r>
-              <a:rPr lang="en-US" dirty="0"/>
-              <a:t>Load Balancers</a:t>
+              <a:rPr lang="en-US" sz="3200" dirty="0"/>
+              <a:t>17.3 Multiple Instances for Performance and Availability</a:t>
             </a:r>
           </a:p>
         </p:txBody>
@@ -4030,7 +4140,7 @@
           <p:cNvPr id="4" name="Slide Number Placeholder 3">
             <a:extLst>
               <a:ext uri="{FF2B5EF4-FFF2-40B4-BE49-F238E27FC236}">
-                <a16:creationId xmlns:a16="http://schemas.microsoft.com/office/drawing/2014/main" id="{53A7559B-8452-76EB-9371-DB186974718C}"/>
+                <a16:creationId xmlns:a16="http://schemas.microsoft.com/office/drawing/2014/main" id="{535C1357-5EDE-7790-CCDF-203B74BB53BB}"/>
               </a:ext>
             </a:extLst>
           </p:cNvPr>
@@ -4058,7 +4168,7 @@
     </p:spTree>
     <p:extLst>
       <p:ext uri="{BB962C8B-B14F-4D97-AF65-F5344CB8AC3E}">
-        <p14:creationId xmlns:p14="http://schemas.microsoft.com/office/powerpoint/2010/main" val="1641035556"/>
+        <p14:creationId xmlns:p14="http://schemas.microsoft.com/office/powerpoint/2010/main" val="2368022643"/>
       </p:ext>
     </p:extLst>
   </p:cSld>
@@ -4085,12 +4195,43 @@
           <a:chExt cx="0" cy="0"/>
         </a:xfrm>
       </p:grpSpPr>
-      <p:sp>
-        <p:nvSpPr>
-          <p:cNvPr id="2" name="Content Placeholder 1">
-            <a:extLst>
-              <a:ext uri="{FF2B5EF4-FFF2-40B4-BE49-F238E27FC236}">
-                <a16:creationId xmlns:a16="http://schemas.microsoft.com/office/drawing/2014/main" id="{2F139890-0649-79B5-043E-4232FDE65EF1}"/>
+      <p:pic>
+        <p:nvPicPr>
+          <p:cNvPr id="8" name="Picture Placeholder 7">
+            <a:extLst>
+              <a:ext uri="{FF2B5EF4-FFF2-40B4-BE49-F238E27FC236}">
+                <a16:creationId xmlns:a16="http://schemas.microsoft.com/office/drawing/2014/main" id="{724870F5-897E-9915-8588-1D62A52AEEBB}"/>
+              </a:ext>
+            </a:extLst>
+          </p:cNvPr>
+          <p:cNvPicPr>
+            <a:picLocks noGrp="1" noChangeAspect="1"/>
+          </p:cNvPicPr>
+          <p:nvPr>
+            <p:ph type="pic" sz="quarter" idx="11"/>
+          </p:nvPr>
+        </p:nvPicPr>
+        <p:blipFill>
+          <a:blip r:embed="rId2">
+            <a:extLst>
+              <a:ext uri="{28A0092B-C50C-407E-A947-70E740481C1C}">
+                <a14:useLocalDpi xmlns:a14="http://schemas.microsoft.com/office/drawing/2010/main" val="0"/>
+              </a:ext>
+            </a:extLst>
+          </a:blip>
+          <a:srcRect l="536" r="536"/>
+          <a:stretch>
+            <a:fillRect/>
+          </a:stretch>
+        </p:blipFill>
+        <p:spPr/>
+      </p:pic>
+      <p:sp>
+        <p:nvSpPr>
+          <p:cNvPr id="3" name="Content Placeholder 2">
+            <a:extLst>
+              <a:ext uri="{FF2B5EF4-FFF2-40B4-BE49-F238E27FC236}">
+                <a16:creationId xmlns:a16="http://schemas.microsoft.com/office/drawing/2014/main" id="{5D89FAB1-63EB-FFEB-94C4-A72CCB440963}"/>
               </a:ext>
             </a:extLst>
           </p:cNvPr>
@@ -4108,7 +4249,14 @@
           <a:p>
             <a:r>
               <a:rPr lang="en-US" dirty="0"/>
-              <a:t>In a traditional data center, organizations must buy enough hardware for the peak workload, which leads to wasted capacity when usage is low. In contrast, cloud computing allows you to dynamically adjust resources based on your needs—this is the concept of </a:t>
+              <a:t>Suppose the load balancer sends the first request to instance 1, the second request to instance 2, the third request back to instance 1, and so forth.</a:t>
+            </a:r>
+          </a:p>
+          <a:p>
+            <a:pPr lvl="1"/>
+            <a:r>
+              <a:rPr lang="en-US" dirty="0"/>
+              <a:t>The algorithm we provided is called </a:t>
             </a:r>
             <a:r>
               <a:rPr lang="en-US" dirty="0">
@@ -4116,94 +4264,52 @@
                   <a:schemeClr val="accent1"/>
                 </a:solidFill>
               </a:rPr>
-              <a:t>elasticity</a:t>
-            </a:r>
-            <a:r>
-              <a:rPr lang="en-US" b="1" dirty="0"/>
+              <a:t>round-robin</a:t>
+            </a:r>
+            <a:r>
+              <a:rPr lang="en-US" dirty="0"/>
               <a:t>.</a:t>
             </a:r>
           </a:p>
           <a:p>
+            <a:pPr lvl="1"/>
             <a:r>
               <a:rPr lang="en-US" dirty="0">
                 <a:solidFill>
+                  <a:schemeClr val="tx1"/>
+                </a:solidFill>
+              </a:rPr>
+              <a:t>round-robin</a:t>
+            </a:r>
+            <a:r>
+              <a:rPr lang="en-US" dirty="0">
+                <a:solidFill>
                   <a:schemeClr val="accent1"/>
                 </a:solidFill>
               </a:rPr>
-              <a:t>Autoscaling</a:t>
-            </a:r>
-            <a:r>
-              <a:rPr lang="en-US" dirty="0"/>
-              <a:t> is an infrastructure service that </a:t>
-            </a:r>
-            <a:r>
-              <a:rPr lang="en-US" i="1" dirty="0"/>
-              <a:t>automatically adds or removes VM or container instances</a:t>
-            </a:r>
-            <a:r>
-              <a:rPr lang="en-US" dirty="0"/>
-              <a:t> based on current demand. </a:t>
-            </a:r>
-          </a:p>
-          <a:p>
-            <a:pPr lvl="1"/>
-            <a:r>
-              <a:rPr lang="en-US" dirty="0"/>
-              <a:t>It usually works with load balancers to manage traffic to these instances. </a:t>
-            </a:r>
-          </a:p>
-          <a:p>
-            <a:pPr lvl="1"/>
-            <a:r>
-              <a:rPr lang="en-US" dirty="0"/>
-              <a:t>Autoscaling containers is slightly different from autoscaling VMs.</a:t>
-            </a:r>
-          </a:p>
-          <a:p>
-            <a:r>
-              <a:rPr lang="en-US" dirty="0"/>
-              <a:t>Autoscaling containers is slightly different from autoscaling VMs.</a:t>
-            </a:r>
-          </a:p>
-          <a:p>
-            <a:r>
-              <a:rPr lang="en-US" dirty="0">
-                <a:solidFill>
-                  <a:schemeClr val="accent4">
-                    <a:lumMod val="50000"/>
-                  </a:schemeClr>
-                </a:solidFill>
-              </a:rPr>
-              <a:t>Autoscaling VMs:</a:t>
-            </a:r>
-          </a:p>
-          <a:p>
-            <a:pPr lvl="1"/>
-            <a:r>
-              <a:rPr lang="en-US" dirty="0"/>
-              <a:t>When the existing service instances can’t handle all the incoming client requests, autoscaling creates another instance using the same VM image and registers it with the load balancer</a:t>
-            </a:r>
-            <a:r>
-              <a:rPr lang="en-US" b="1" i="1" dirty="0"/>
-              <a:t>.</a:t>
-            </a:r>
-          </a:p>
-        </p:txBody>
-      </p:sp>
-      <p:sp>
-        <p:nvSpPr>
-          <p:cNvPr id="3" name="Title 2">
-            <a:extLst>
-              <a:ext uri="{FF2B5EF4-FFF2-40B4-BE49-F238E27FC236}">
-                <a16:creationId xmlns:a16="http://schemas.microsoft.com/office/drawing/2014/main" id="{A8797769-4FA8-0C80-3383-A929A701892F}"/>
-              </a:ext>
-            </a:extLst>
-          </p:cNvPr>
-          <p:cNvSpPr>
-            <a:spLocks noGrp="1"/>
-          </p:cNvSpPr>
-          <p:nvPr>
-            <p:ph type="title"/>
+              <a:t> </a:t>
+            </a:r>
+            <a:r>
+              <a:rPr lang="en-US" dirty="0"/>
+              <a:t>balances the load uniformly if every request consumes roughly the same resources.</a:t>
+            </a:r>
+          </a:p>
+        </p:txBody>
+      </p:sp>
+      <p:sp>
+        <p:nvSpPr>
+          <p:cNvPr id="4" name="Content Placeholder 3">
+            <a:extLst>
+              <a:ext uri="{FF2B5EF4-FFF2-40B4-BE49-F238E27FC236}">
+                <a16:creationId xmlns:a16="http://schemas.microsoft.com/office/drawing/2014/main" id="{F56C0A6D-DBB7-F434-73A9-B3FBA4AF365B}"/>
+              </a:ext>
+            </a:extLst>
+          </p:cNvPr>
+          <p:cNvSpPr>
+            <a:spLocks noGrp="1"/>
+          </p:cNvSpPr>
+          <p:nvPr>
+            <p:ph sz="half" idx="12"/>
           </p:nvPr>
         </p:nvSpPr>
         <p:spPr/>
@@ -4211,27 +4317,81 @@
           <a:bodyPr/>
           <a:lstStyle/>
           <a:p>
-            <a:r>
-              <a:rPr lang="en-US" dirty="0"/>
-              <a:t>Autoscaling</a:t>
-            </a:r>
-          </a:p>
-        </p:txBody>
-      </p:sp>
-      <p:sp>
-        <p:nvSpPr>
-          <p:cNvPr id="4" name="Slide Number Placeholder 3">
-            <a:extLst>
-              <a:ext uri="{FF2B5EF4-FFF2-40B4-BE49-F238E27FC236}">
-                <a16:creationId xmlns:a16="http://schemas.microsoft.com/office/drawing/2014/main" id="{05FBCF61-4AB8-E32F-CD3F-1DDA9110D882}"/>
-              </a:ext>
-            </a:extLst>
-          </p:cNvPr>
-          <p:cNvSpPr>
-            <a:spLocks noGrp="1"/>
-          </p:cNvSpPr>
-          <p:nvPr>
-            <p:ph type="sldNum" sz="quarter" idx="10"/>
+            <a:pPr lvl="1"/>
+            <a:r>
+              <a:rPr lang="en-US" dirty="0"/>
+              <a:t>From a client’s perspective, the service’s IP address is actually the address of the load balancer.</a:t>
+            </a:r>
+          </a:p>
+          <a:p>
+            <a:pPr lvl="1"/>
+            <a:r>
+              <a:rPr lang="en-US" dirty="0"/>
+              <a:t>Load balancers may get overloaded. In this case, the solution is to balance the load of the load balancer, sometimes referred to as </a:t>
+            </a:r>
+            <a:r>
+              <a:rPr lang="en-US" dirty="0">
+                <a:solidFill>
+                  <a:schemeClr val="accent1"/>
+                </a:solidFill>
+              </a:rPr>
+              <a:t>global load balancing</a:t>
+            </a:r>
+            <a:r>
+              <a:rPr lang="en-US" dirty="0"/>
+              <a:t>. That is, a message goes through a hierarchy of load balancers before arriving at the service instance.</a:t>
+            </a:r>
+          </a:p>
+          <a:p>
+            <a:r>
+              <a:rPr lang="en-US" dirty="0"/>
+              <a:t>Load balancers increase the amount of work that can be handled. We'll see how load balancers also serve to increase the availability of services.</a:t>
+            </a:r>
+          </a:p>
+        </p:txBody>
+      </p:sp>
+      <p:sp>
+        <p:nvSpPr>
+          <p:cNvPr id="5" name="Title 4">
+            <a:extLst>
+              <a:ext uri="{FF2B5EF4-FFF2-40B4-BE49-F238E27FC236}">
+                <a16:creationId xmlns:a16="http://schemas.microsoft.com/office/drawing/2014/main" id="{880C7085-0CFE-0FA4-1531-85760CE5A07B}"/>
+              </a:ext>
+            </a:extLst>
+          </p:cNvPr>
+          <p:cNvSpPr>
+            <a:spLocks noGrp="1"/>
+          </p:cNvSpPr>
+          <p:nvPr>
+            <p:ph type="title"/>
+          </p:nvPr>
+        </p:nvSpPr>
+        <p:spPr/>
+        <p:txBody>
+          <a:bodyPr/>
+          <a:lstStyle/>
+          <a:p>
+            <a:r>
+              <a:rPr lang="en-US" dirty="0"/>
+              <a:t>Load Balancers</a:t>
+            </a:r>
+          </a:p>
+        </p:txBody>
+      </p:sp>
+      <p:sp>
+        <p:nvSpPr>
+          <p:cNvPr id="6" name="Slide Number Placeholder 5">
+            <a:extLst>
+              <a:ext uri="{FF2B5EF4-FFF2-40B4-BE49-F238E27FC236}">
+                <a16:creationId xmlns:a16="http://schemas.microsoft.com/office/drawing/2014/main" id="{6BC41EE5-BF20-5664-564F-590A9CA53507}"/>
+              </a:ext>
+            </a:extLst>
+          </p:cNvPr>
+          <p:cNvSpPr>
+            <a:spLocks noGrp="1"/>
+          </p:cNvSpPr>
+          <p:nvPr>
+            <p:ph type="sldNum" sz="quarter" idx="13"/>
           </p:nvPr>
         </p:nvSpPr>
         <p:spPr/>
@@ -4251,7 +4411,7 @@
     </p:spTree>
     <p:extLst>
       <p:ext uri="{BB962C8B-B14F-4D97-AF65-F5344CB8AC3E}">
-        <p14:creationId xmlns:p14="http://schemas.microsoft.com/office/powerpoint/2010/main" val="4139797072"/>
+        <p14:creationId xmlns:p14="http://schemas.microsoft.com/office/powerpoint/2010/main" val="2571040086"/>
       </p:ext>
     </p:extLst>
   </p:cSld>
@@ -4283,7 +4443,7 @@
           <p:cNvPr id="2" name="Content Placeholder 1">
             <a:extLst>
               <a:ext uri="{FF2B5EF4-FFF2-40B4-BE49-F238E27FC236}">
-                <a16:creationId xmlns:a16="http://schemas.microsoft.com/office/drawing/2014/main" id="{1CCBEDC6-5BB1-BDF5-A906-6E48A0A7FDB5}"/>
+                <a16:creationId xmlns:a16="http://schemas.microsoft.com/office/drawing/2014/main" id="{D24B453F-8A55-9D54-DCDF-0DEFDE240B07}"/>
               </a:ext>
             </a:extLst>
           </p:cNvPr>
@@ -4299,116 +4459,105 @@
           <a:bodyPr/>
           <a:lstStyle/>
           <a:p>
+            <a:r>
+              <a:rPr lang="en-US" dirty="0"/>
+              <a:t>While requests go </a:t>
+            </a:r>
+            <a:r>
+              <a:rPr lang="en-US" i="1" dirty="0"/>
+              <a:t>through</a:t>
+            </a:r>
+            <a:r>
+              <a:rPr lang="en-US" dirty="0"/>
+              <a:t> the load balancer, responses go </a:t>
+            </a:r>
+            <a:r>
+              <a:rPr lang="en-US" i="1" dirty="0"/>
+              <a:t>directly</a:t>
+            </a:r>
+            <a:r>
+              <a:rPr lang="en-US" dirty="0"/>
+              <a:t> back to the clients.</a:t>
+            </a:r>
+          </a:p>
+          <a:p>
             <a:pPr lvl="1"/>
             <a:r>
               <a:rPr lang="en-US" dirty="0"/>
-              <a:t>if the client request rate decreases, an instance can be removed from the load balancer pool, halted, and deallocated</a:t>
-            </a:r>
-            <a:r>
-              <a:rPr lang="en-US" b="1" i="1" dirty="0"/>
-              <a:t>.</a:t>
-            </a:r>
-            <a:endParaRPr lang="en-US" dirty="0"/>
+              <a:t>As a consequence, the load balancer has no information about whether a message was processed by a service instance, or how long it took to process a message.</a:t>
+            </a:r>
           </a:p>
           <a:p>
             <a:pPr lvl="1"/>
             <a:r>
               <a:rPr lang="en-US" dirty="0"/>
-              <a:t>Autoscalers don’t react to short-term spikes in resource usage. Instead, they look at averages over several minutes because:</a:t>
-            </a:r>
-          </a:p>
-          <a:p>
-            <a:pPr lvl="2"/>
-            <a:r>
-              <a:rPr lang="en-US" dirty="0"/>
-              <a:t>Resource usage can spike briefly but doesn't always mean more capacity is needed</a:t>
-            </a:r>
-          </a:p>
-          <a:p>
-            <a:pPr lvl="2"/>
-            <a:r>
-              <a:rPr lang="en-US" dirty="0"/>
-              <a:t>allocating and starting a new VM takes a relatively long time, on the order of minutes.</a:t>
+              <a:t>Hence the load balancer would not know whether any service instance was alive or if it had failed.</a:t>
             </a:r>
           </a:p>
           <a:p>
             <a:r>
               <a:rPr lang="en-US" dirty="0">
                 <a:solidFill>
-                  <a:schemeClr val="accent4">
-                    <a:lumMod val="50000"/>
-                  </a:schemeClr>
+                  <a:schemeClr val="accent1"/>
                 </a:solidFill>
               </a:rPr>
-              <a:t>Autoscaling Containers:</a:t>
+              <a:t>Health checks </a:t>
+            </a:r>
+            <a:r>
+              <a:rPr lang="en-US" dirty="0"/>
+              <a:t>are a mechanism that allow the load balancer to determine whether an instance is performing properly.</a:t>
             </a:r>
           </a:p>
           <a:p>
             <a:pPr lvl="1"/>
             <a:r>
               <a:rPr lang="en-US" dirty="0"/>
-              <a:t>Because containers are executing on runtime engines that are hosted on VMs, scaling containers involves two different types of decisions.</a:t>
-            </a:r>
-          </a:p>
-          <a:p>
-            <a:pPr lvl="2"/>
-            <a:r>
-              <a:rPr lang="en-US" dirty="0"/>
-              <a:t>Should you add a new </a:t>
-            </a:r>
-            <a:r>
-              <a:rPr lang="en-US" b="1" dirty="0"/>
-              <a:t>container </a:t>
-            </a:r>
-            <a:r>
-              <a:rPr lang="en-US" dirty="0"/>
-              <a:t>(or Pod) based on workload?</a:t>
-            </a:r>
-            <a:endParaRPr lang="fa-IR" dirty="0"/>
-          </a:p>
-          <a:p>
-            <a:pPr lvl="2"/>
-            <a:r>
-              <a:rPr lang="en-US" dirty="0"/>
-              <a:t>If yes then can it be run on an </a:t>
-            </a:r>
-            <a:r>
-              <a:rPr lang="en-US" b="1" dirty="0"/>
-              <a:t>existing VM</a:t>
-            </a:r>
-            <a:r>
-              <a:rPr lang="en-US" dirty="0"/>
-              <a:t>, or do you need to create a </a:t>
-            </a:r>
-            <a:r>
-              <a:rPr lang="en-US" b="1" dirty="0"/>
-              <a:t>new VM</a:t>
-            </a:r>
-            <a:r>
-              <a:rPr lang="en-US" dirty="0"/>
-              <a:t> for it?</a:t>
-            </a:r>
-            <a:endParaRPr lang="en-US" dirty="0">
-              <a:solidFill>
-                <a:schemeClr val="accent4">
-                  <a:lumMod val="50000"/>
-                </a:schemeClr>
-              </a:solidFill>
-            </a:endParaRPr>
+              <a:t>The load balancer will periodically check the health of the instances assigned to it.</a:t>
+            </a:r>
           </a:p>
           <a:p>
             <a:pPr lvl="1"/>
             <a:r>
               <a:rPr lang="en-US" dirty="0"/>
-              <a:t>The software that controls the scaling of containers is independent of the software that controls the scaling of VMs. This allows the scaling of containers to be portable across different cloud providers.</a:t>
-            </a:r>
-            <a:endParaRPr lang="en-US" dirty="0">
-              <a:solidFill>
-                <a:schemeClr val="accent4">
-                  <a:lumMod val="50000"/>
-                </a:schemeClr>
-              </a:solidFill>
-            </a:endParaRPr>
+              <a:t>If an instance fails to respond to a health check, it is marked as unhealthy and no further messages are sent to it.</a:t>
+            </a:r>
+          </a:p>
+          <a:p>
+            <a:pPr lvl="1"/>
+            <a:r>
+              <a:rPr lang="en-US" dirty="0"/>
+              <a:t>Health checks can consist of </a:t>
+            </a:r>
+            <a:r>
+              <a:rPr lang="en-US" i="1" dirty="0">
+                <a:solidFill>
+                  <a:schemeClr val="tx1"/>
+                </a:solidFill>
+              </a:rPr>
+              <a:t>pings</a:t>
+            </a:r>
+            <a:r>
+              <a:rPr lang="en-US" dirty="0"/>
+              <a:t> from the load balancer to the instance, opening a </a:t>
+            </a:r>
+            <a:r>
+              <a:rPr lang="en-US" i="1" dirty="0">
+                <a:solidFill>
+                  <a:schemeClr val="tx1"/>
+                </a:solidFill>
+              </a:rPr>
+              <a:t>TCP</a:t>
+            </a:r>
+            <a:r>
+              <a:rPr lang="en-US" dirty="0"/>
+              <a:t> connection to the instance or even sending a message for processing.</a:t>
+            </a:r>
+          </a:p>
+          <a:p>
+            <a:r>
+              <a:rPr lang="en-US" dirty="0"/>
+              <a:t>A load balancer with health checking improves availability by hiding the failure of a service instance from clients.</a:t>
+            </a:r>
           </a:p>
         </p:txBody>
       </p:sp>
@@ -4417,7 +4566,7 @@
           <p:cNvPr id="3" name="Title 2">
             <a:extLst>
               <a:ext uri="{FF2B5EF4-FFF2-40B4-BE49-F238E27FC236}">
-                <a16:creationId xmlns:a16="http://schemas.microsoft.com/office/drawing/2014/main" id="{41B99649-811A-D3BC-8382-696D7D271327}"/>
+                <a16:creationId xmlns:a16="http://schemas.microsoft.com/office/drawing/2014/main" id="{E5DB2526-D329-E7EF-1C6A-7A7CECA98CA7}"/>
               </a:ext>
             </a:extLst>
           </p:cNvPr>
@@ -4435,7 +4584,7 @@
           <a:p>
             <a:r>
               <a:rPr lang="en-US" dirty="0"/>
-              <a:t>Autoscaling</a:t>
+              <a:t>Load Balancers</a:t>
             </a:r>
           </a:p>
         </p:txBody>
@@ -4445,7 +4594,7 @@
           <p:cNvPr id="4" name="Slide Number Placeholder 3">
             <a:extLst>
               <a:ext uri="{FF2B5EF4-FFF2-40B4-BE49-F238E27FC236}">
-                <a16:creationId xmlns:a16="http://schemas.microsoft.com/office/drawing/2014/main" id="{76FA2490-085D-B94A-7E5C-10B4564AC494}"/>
+                <a16:creationId xmlns:a16="http://schemas.microsoft.com/office/drawing/2014/main" id="{53A7559B-8452-76EB-9371-DB186974718C}"/>
               </a:ext>
             </a:extLst>
           </p:cNvPr>
@@ -4473,7 +4622,7 @@
     </p:spTree>
     <p:extLst>
       <p:ext uri="{BB962C8B-B14F-4D97-AF65-F5344CB8AC3E}">
-        <p14:creationId xmlns:p14="http://schemas.microsoft.com/office/powerpoint/2010/main" val="1129629048"/>
+        <p14:creationId xmlns:p14="http://schemas.microsoft.com/office/powerpoint/2010/main" val="1641035556"/>
       </p:ext>
     </p:extLst>
   </p:cSld>
@@ -4500,6 +4649,421 @@
           <a:chExt cx="0" cy="0"/>
         </a:xfrm>
       </p:grpSpPr>
+      <p:sp>
+        <p:nvSpPr>
+          <p:cNvPr id="2" name="Content Placeholder 1">
+            <a:extLst>
+              <a:ext uri="{FF2B5EF4-FFF2-40B4-BE49-F238E27FC236}">
+                <a16:creationId xmlns:a16="http://schemas.microsoft.com/office/drawing/2014/main" id="{2F139890-0649-79B5-043E-4232FDE65EF1}"/>
+              </a:ext>
+            </a:extLst>
+          </p:cNvPr>
+          <p:cNvSpPr>
+            <a:spLocks noGrp="1"/>
+          </p:cNvSpPr>
+          <p:nvPr>
+            <p:ph sz="half" idx="2"/>
+          </p:nvPr>
+        </p:nvSpPr>
+        <p:spPr/>
+        <p:txBody>
+          <a:bodyPr/>
+          <a:lstStyle/>
+          <a:p>
+            <a:r>
+              <a:rPr lang="en-US" dirty="0"/>
+              <a:t>In a traditional data center, organizations must buy enough hardware for the peak workload, which leads to wasted capacity when usage is low. In contrast, cloud computing allows you to dynamically adjust resources based on your needs—this is the concept of </a:t>
+            </a:r>
+            <a:r>
+              <a:rPr lang="en-US" dirty="0">
+                <a:solidFill>
+                  <a:schemeClr val="accent1"/>
+                </a:solidFill>
+              </a:rPr>
+              <a:t>elasticity</a:t>
+            </a:r>
+            <a:r>
+              <a:rPr lang="en-US" b="1" dirty="0"/>
+              <a:t>.</a:t>
+            </a:r>
+          </a:p>
+          <a:p>
+            <a:r>
+              <a:rPr lang="en-US" dirty="0">
+                <a:solidFill>
+                  <a:schemeClr val="accent1"/>
+                </a:solidFill>
+              </a:rPr>
+              <a:t>Autoscaling</a:t>
+            </a:r>
+            <a:r>
+              <a:rPr lang="en-US" dirty="0"/>
+              <a:t> is an infrastructure service that </a:t>
+            </a:r>
+            <a:r>
+              <a:rPr lang="en-US" i="1" dirty="0"/>
+              <a:t>automatically adds or removes VM or container instances</a:t>
+            </a:r>
+            <a:r>
+              <a:rPr lang="en-US" dirty="0"/>
+              <a:t> based on current demand. </a:t>
+            </a:r>
+          </a:p>
+          <a:p>
+            <a:pPr lvl="1"/>
+            <a:r>
+              <a:rPr lang="en-US" dirty="0"/>
+              <a:t>It usually works with load balancers to manage traffic to these instances. </a:t>
+            </a:r>
+          </a:p>
+          <a:p>
+            <a:pPr lvl="1"/>
+            <a:r>
+              <a:rPr lang="en-US" dirty="0"/>
+              <a:t>Autoscaling containers is slightly different from autoscaling VMs.</a:t>
+            </a:r>
+          </a:p>
+          <a:p>
+            <a:r>
+              <a:rPr lang="en-US" dirty="0"/>
+              <a:t>Autoscaling containers is slightly different from autoscaling VMs.</a:t>
+            </a:r>
+          </a:p>
+          <a:p>
+            <a:r>
+              <a:rPr lang="en-US" dirty="0">
+                <a:solidFill>
+                  <a:schemeClr val="accent4">
+                    <a:lumMod val="50000"/>
+                  </a:schemeClr>
+                </a:solidFill>
+              </a:rPr>
+              <a:t>Autoscaling VMs:</a:t>
+            </a:r>
+          </a:p>
+          <a:p>
+            <a:pPr lvl="1"/>
+            <a:r>
+              <a:rPr lang="en-US" dirty="0"/>
+              <a:t>When the existing service instances can’t handle all the incoming client requests, autoscaling creates another instance using the same VM image and registers it with the load balancer</a:t>
+            </a:r>
+            <a:r>
+              <a:rPr lang="en-US" b="1" i="1" dirty="0"/>
+              <a:t>.</a:t>
+            </a:r>
+          </a:p>
+        </p:txBody>
+      </p:sp>
+      <p:sp>
+        <p:nvSpPr>
+          <p:cNvPr id="3" name="Title 2">
+            <a:extLst>
+              <a:ext uri="{FF2B5EF4-FFF2-40B4-BE49-F238E27FC236}">
+                <a16:creationId xmlns:a16="http://schemas.microsoft.com/office/drawing/2014/main" id="{A8797769-4FA8-0C80-3383-A929A701892F}"/>
+              </a:ext>
+            </a:extLst>
+          </p:cNvPr>
+          <p:cNvSpPr>
+            <a:spLocks noGrp="1"/>
+          </p:cNvSpPr>
+          <p:nvPr>
+            <p:ph type="title"/>
+          </p:nvPr>
+        </p:nvSpPr>
+        <p:spPr/>
+        <p:txBody>
+          <a:bodyPr/>
+          <a:lstStyle/>
+          <a:p>
+            <a:r>
+              <a:rPr lang="en-US" dirty="0"/>
+              <a:t>Autoscaling</a:t>
+            </a:r>
+          </a:p>
+        </p:txBody>
+      </p:sp>
+      <p:sp>
+        <p:nvSpPr>
+          <p:cNvPr id="4" name="Slide Number Placeholder 3">
+            <a:extLst>
+              <a:ext uri="{FF2B5EF4-FFF2-40B4-BE49-F238E27FC236}">
+                <a16:creationId xmlns:a16="http://schemas.microsoft.com/office/drawing/2014/main" id="{05FBCF61-4AB8-E32F-CD3F-1DDA9110D882}"/>
+              </a:ext>
+            </a:extLst>
+          </p:cNvPr>
+          <p:cNvSpPr>
+            <a:spLocks noGrp="1"/>
+          </p:cNvSpPr>
+          <p:nvPr>
+            <p:ph type="sldNum" sz="quarter" idx="10"/>
+          </p:nvPr>
+        </p:nvSpPr>
+        <p:spPr/>
+        <p:txBody>
+          <a:bodyPr/>
+          <a:lstStyle/>
+          <a:p>
+            <a:fld id="{AE311D09-C3D9-45E8-99CE-78E12234EEAD}" type="slidenum">
+              <a:rPr lang="en-US" smtClean="0"/>
+              <a:pPr/>
+              <a:t>17</a:t>
+            </a:fld>
+            <a:endParaRPr lang="en-US" dirty="0"/>
+          </a:p>
+        </p:txBody>
+      </p:sp>
+    </p:spTree>
+    <p:extLst>
+      <p:ext uri="{BB962C8B-B14F-4D97-AF65-F5344CB8AC3E}">
+        <p14:creationId xmlns:p14="http://schemas.microsoft.com/office/powerpoint/2010/main" val="4139797072"/>
+      </p:ext>
+    </p:extLst>
+  </p:cSld>
+  <p:clrMapOvr>
+    <a:masterClrMapping/>
+  </p:clrMapOvr>
+</p:sld>
+</file>
+
+<file path=ppt/slides/slide18.xml><?xml version="1.0" encoding="utf-8"?>
+<p:sld xmlns:a="http://schemas.openxmlformats.org/drawingml/2006/main" xmlns:r="http://schemas.openxmlformats.org/officeDocument/2006/relationships" xmlns:p="http://schemas.openxmlformats.org/presentationml/2006/main">
+  <p:cSld>
+    <p:spTree>
+      <p:nvGrpSpPr>
+        <p:cNvPr id="1" name=""/>
+        <p:cNvGrpSpPr/>
+        <p:nvPr/>
+      </p:nvGrpSpPr>
+      <p:grpSpPr>
+        <a:xfrm>
+          <a:off x="0" y="0"/>
+          <a:ext cx="0" cy="0"/>
+          <a:chOff x="0" y="0"/>
+          <a:chExt cx="0" cy="0"/>
+        </a:xfrm>
+      </p:grpSpPr>
+      <p:sp>
+        <p:nvSpPr>
+          <p:cNvPr id="2" name="Content Placeholder 1">
+            <a:extLst>
+              <a:ext uri="{FF2B5EF4-FFF2-40B4-BE49-F238E27FC236}">
+                <a16:creationId xmlns:a16="http://schemas.microsoft.com/office/drawing/2014/main" id="{1CCBEDC6-5BB1-BDF5-A906-6E48A0A7FDB5}"/>
+              </a:ext>
+            </a:extLst>
+          </p:cNvPr>
+          <p:cNvSpPr>
+            <a:spLocks noGrp="1"/>
+          </p:cNvSpPr>
+          <p:nvPr>
+            <p:ph sz="half" idx="2"/>
+          </p:nvPr>
+        </p:nvSpPr>
+        <p:spPr/>
+        <p:txBody>
+          <a:bodyPr/>
+          <a:lstStyle/>
+          <a:p>
+            <a:pPr lvl="1"/>
+            <a:r>
+              <a:rPr lang="en-US" dirty="0"/>
+              <a:t>if the client request rate decreases, an instance can be removed from the load balancer pool, halted, and deallocated</a:t>
+            </a:r>
+            <a:r>
+              <a:rPr lang="en-US" b="1" i="1" dirty="0"/>
+              <a:t>.</a:t>
+            </a:r>
+            <a:endParaRPr lang="en-US" dirty="0"/>
+          </a:p>
+          <a:p>
+            <a:pPr lvl="1"/>
+            <a:r>
+              <a:rPr lang="en-US" dirty="0"/>
+              <a:t>Autoscalers don’t react to short-term spikes in resource usage. Instead, they look at averages over several minutes because:</a:t>
+            </a:r>
+          </a:p>
+          <a:p>
+            <a:pPr lvl="2"/>
+            <a:r>
+              <a:rPr lang="en-US" dirty="0"/>
+              <a:t>Resource usage can spike briefly but doesn't always mean more capacity is needed</a:t>
+            </a:r>
+          </a:p>
+          <a:p>
+            <a:pPr lvl="2"/>
+            <a:r>
+              <a:rPr lang="en-US" dirty="0"/>
+              <a:t>allocating and starting a new VM takes a relatively long time, on the order of minutes.</a:t>
+            </a:r>
+          </a:p>
+          <a:p>
+            <a:r>
+              <a:rPr lang="en-US" dirty="0">
+                <a:solidFill>
+                  <a:schemeClr val="accent4">
+                    <a:lumMod val="50000"/>
+                  </a:schemeClr>
+                </a:solidFill>
+              </a:rPr>
+              <a:t>Autoscaling Containers:</a:t>
+            </a:r>
+          </a:p>
+          <a:p>
+            <a:pPr lvl="1"/>
+            <a:r>
+              <a:rPr lang="en-US" dirty="0"/>
+              <a:t>Because containers are executing on runtime engines that are hosted on VMs, scaling containers involves two different types of decisions.</a:t>
+            </a:r>
+          </a:p>
+          <a:p>
+            <a:pPr lvl="2"/>
+            <a:r>
+              <a:rPr lang="en-US" dirty="0"/>
+              <a:t>Should you add a new </a:t>
+            </a:r>
+            <a:r>
+              <a:rPr lang="en-US" b="1" dirty="0"/>
+              <a:t>container </a:t>
+            </a:r>
+            <a:r>
+              <a:rPr lang="en-US" dirty="0"/>
+              <a:t>(or Pod) based on workload?</a:t>
+            </a:r>
+            <a:endParaRPr lang="fa-IR" dirty="0"/>
+          </a:p>
+          <a:p>
+            <a:pPr lvl="2"/>
+            <a:r>
+              <a:rPr lang="en-US" dirty="0"/>
+              <a:t>If yes then can it be run on an </a:t>
+            </a:r>
+            <a:r>
+              <a:rPr lang="en-US" b="1" dirty="0"/>
+              <a:t>existing VM</a:t>
+            </a:r>
+            <a:r>
+              <a:rPr lang="en-US" dirty="0"/>
+              <a:t>, or do you need to create a </a:t>
+            </a:r>
+            <a:r>
+              <a:rPr lang="en-US" b="1" dirty="0"/>
+              <a:t>new VM</a:t>
+            </a:r>
+            <a:r>
+              <a:rPr lang="en-US" dirty="0"/>
+              <a:t> for it?</a:t>
+            </a:r>
+            <a:endParaRPr lang="en-US" dirty="0">
+              <a:solidFill>
+                <a:schemeClr val="accent4">
+                  <a:lumMod val="50000"/>
+                </a:schemeClr>
+              </a:solidFill>
+            </a:endParaRPr>
+          </a:p>
+          <a:p>
+            <a:pPr lvl="1"/>
+            <a:r>
+              <a:rPr lang="en-US" dirty="0"/>
+              <a:t>The software that controls the scaling of containers is independent of the software that controls the scaling of VMs. This allows the scaling of containers to be portable across different cloud providers.</a:t>
+            </a:r>
+            <a:endParaRPr lang="en-US" dirty="0">
+              <a:solidFill>
+                <a:schemeClr val="accent4">
+                  <a:lumMod val="50000"/>
+                </a:schemeClr>
+              </a:solidFill>
+            </a:endParaRPr>
+          </a:p>
+        </p:txBody>
+      </p:sp>
+      <p:sp>
+        <p:nvSpPr>
+          <p:cNvPr id="3" name="Title 2">
+            <a:extLst>
+              <a:ext uri="{FF2B5EF4-FFF2-40B4-BE49-F238E27FC236}">
+                <a16:creationId xmlns:a16="http://schemas.microsoft.com/office/drawing/2014/main" id="{41B99649-811A-D3BC-8382-696D7D271327}"/>
+              </a:ext>
+            </a:extLst>
+          </p:cNvPr>
+          <p:cNvSpPr>
+            <a:spLocks noGrp="1"/>
+          </p:cNvSpPr>
+          <p:nvPr>
+            <p:ph type="title"/>
+          </p:nvPr>
+        </p:nvSpPr>
+        <p:spPr/>
+        <p:txBody>
+          <a:bodyPr/>
+          <a:lstStyle/>
+          <a:p>
+            <a:r>
+              <a:rPr lang="en-US" dirty="0"/>
+              <a:t>Autoscaling</a:t>
+            </a:r>
+          </a:p>
+        </p:txBody>
+      </p:sp>
+      <p:sp>
+        <p:nvSpPr>
+          <p:cNvPr id="4" name="Slide Number Placeholder 3">
+            <a:extLst>
+              <a:ext uri="{FF2B5EF4-FFF2-40B4-BE49-F238E27FC236}">
+                <a16:creationId xmlns:a16="http://schemas.microsoft.com/office/drawing/2014/main" id="{76FA2490-085D-B94A-7E5C-10B4564AC494}"/>
+              </a:ext>
+            </a:extLst>
+          </p:cNvPr>
+          <p:cNvSpPr>
+            <a:spLocks noGrp="1"/>
+          </p:cNvSpPr>
+          <p:nvPr>
+            <p:ph type="sldNum" sz="quarter" idx="10"/>
+          </p:nvPr>
+        </p:nvSpPr>
+        <p:spPr/>
+        <p:txBody>
+          <a:bodyPr/>
+          <a:lstStyle/>
+          <a:p>
+            <a:fld id="{AE311D09-C3D9-45E8-99CE-78E12234EEAD}" type="slidenum">
+              <a:rPr lang="en-US" smtClean="0"/>
+              <a:pPr/>
+              <a:t>18</a:t>
+            </a:fld>
+            <a:endParaRPr lang="en-US" dirty="0"/>
+          </a:p>
+        </p:txBody>
+      </p:sp>
+    </p:spTree>
+    <p:extLst>
+      <p:ext uri="{BB962C8B-B14F-4D97-AF65-F5344CB8AC3E}">
+        <p14:creationId xmlns:p14="http://schemas.microsoft.com/office/powerpoint/2010/main" val="1129629048"/>
+      </p:ext>
+    </p:extLst>
+  </p:cSld>
+  <p:clrMapOvr>
+    <a:masterClrMapping/>
+  </p:clrMapOvr>
+</p:sld>
+</file>
+
+<file path=ppt/slides/slide19.xml><?xml version="1.0" encoding="utf-8"?>
+<p:sld xmlns:a="http://schemas.openxmlformats.org/drawingml/2006/main" xmlns:r="http://schemas.openxmlformats.org/officeDocument/2006/relationships" xmlns:p="http://schemas.openxmlformats.org/presentationml/2006/main">
+  <p:cSld>
+    <p:spTree>
+      <p:nvGrpSpPr>
+        <p:cNvPr id="1" name=""/>
+        <p:cNvGrpSpPr/>
+        <p:nvPr/>
+      </p:nvGrpSpPr>
+      <p:grpSpPr>
+        <a:xfrm>
+          <a:off x="0" y="0"/>
+          <a:ext cx="0" cy="0"/>
+          <a:chOff x="0" y="0"/>
+          <a:chExt cx="0" cy="0"/>
+        </a:xfrm>
+      </p:grpSpPr>
       <p:pic>
         <p:nvPicPr>
           <p:cNvPr id="7" name="Picture Placeholder 6">
@@ -4596,7 +5160,7 @@
             <a:fld id="{AE311D09-C3D9-45E8-99CE-78E12234EEAD}" type="slidenum">
               <a:rPr lang="en-US" smtClean="0"/>
               <a:pPr/>
-              <a:t>17</a:t>
+              <a:t>19</a:t>
             </a:fld>
             <a:endParaRPr lang="en-US" dirty="0"/>
           </a:p>
@@ -4701,6 +5265,119 @@
 </p:sld>
 </file>
 
+<file path=ppt/slides/slide20.xml><?xml version="1.0" encoding="utf-8"?>
+<p:sld xmlns:a="http://schemas.openxmlformats.org/drawingml/2006/main" xmlns:r="http://schemas.openxmlformats.org/officeDocument/2006/relationships" xmlns:p="http://schemas.openxmlformats.org/presentationml/2006/main">
+  <p:cSld>
+    <p:spTree>
+      <p:nvGrpSpPr>
+        <p:cNvPr id="1" name=""/>
+        <p:cNvGrpSpPr/>
+        <p:nvPr/>
+      </p:nvGrpSpPr>
+      <p:grpSpPr>
+        <a:xfrm>
+          <a:off x="0" y="0"/>
+          <a:ext cx="0" cy="0"/>
+          <a:chOff x="0" y="0"/>
+          <a:chExt cx="0" cy="0"/>
+        </a:xfrm>
+      </p:grpSpPr>
+      <p:sp>
+        <p:nvSpPr>
+          <p:cNvPr id="2" name="Content Placeholder 1">
+            <a:extLst>
+              <a:ext uri="{FF2B5EF4-FFF2-40B4-BE49-F238E27FC236}">
+                <a16:creationId xmlns:a16="http://schemas.microsoft.com/office/drawing/2014/main" id="{EF87E895-2B91-5058-AC60-8131B1E3FF3D}"/>
+              </a:ext>
+            </a:extLst>
+          </p:cNvPr>
+          <p:cNvSpPr>
+            <a:spLocks noGrp="1"/>
+          </p:cNvSpPr>
+          <p:nvPr>
+            <p:ph sz="half" idx="2"/>
+          </p:nvPr>
+        </p:nvSpPr>
+        <p:spPr/>
+        <p:txBody>
+          <a:bodyPr/>
+          <a:lstStyle/>
+          <a:p>
+            <a:endParaRPr lang="en-US"/>
+          </a:p>
+        </p:txBody>
+      </p:sp>
+      <p:sp>
+        <p:nvSpPr>
+          <p:cNvPr id="3" name="Title 2">
+            <a:extLst>
+              <a:ext uri="{FF2B5EF4-FFF2-40B4-BE49-F238E27FC236}">
+                <a16:creationId xmlns:a16="http://schemas.microsoft.com/office/drawing/2014/main" id="{9EF6E8BB-A3AA-8BBB-9D09-1F248225FF3E}"/>
+              </a:ext>
+            </a:extLst>
+          </p:cNvPr>
+          <p:cNvSpPr>
+            <a:spLocks noGrp="1"/>
+          </p:cNvSpPr>
+          <p:nvPr>
+            <p:ph type="title"/>
+          </p:nvPr>
+        </p:nvSpPr>
+        <p:spPr/>
+        <p:txBody>
+          <a:bodyPr/>
+          <a:lstStyle/>
+          <a:p>
+            <a:r>
+              <a:rPr lang="en-US" dirty="0"/>
+              <a:t>Summary</a:t>
+            </a:r>
+          </a:p>
+        </p:txBody>
+      </p:sp>
+      <p:sp>
+        <p:nvSpPr>
+          <p:cNvPr id="4" name="Slide Number Placeholder 3">
+            <a:extLst>
+              <a:ext uri="{FF2B5EF4-FFF2-40B4-BE49-F238E27FC236}">
+                <a16:creationId xmlns:a16="http://schemas.microsoft.com/office/drawing/2014/main" id="{645DA133-531F-16FD-7F0D-0B9F16475796}"/>
+              </a:ext>
+            </a:extLst>
+          </p:cNvPr>
+          <p:cNvSpPr>
+            <a:spLocks noGrp="1"/>
+          </p:cNvSpPr>
+          <p:nvPr>
+            <p:ph type="sldNum" sz="quarter" idx="10"/>
+          </p:nvPr>
+        </p:nvSpPr>
+        <p:spPr/>
+        <p:txBody>
+          <a:bodyPr/>
+          <a:lstStyle/>
+          <a:p>
+            <a:fld id="{AE311D09-C3D9-45E8-99CE-78E12234EEAD}" type="slidenum">
+              <a:rPr lang="en-US" smtClean="0"/>
+              <a:pPr/>
+              <a:t>20</a:t>
+            </a:fld>
+            <a:endParaRPr lang="en-US" dirty="0"/>
+          </a:p>
+        </p:txBody>
+      </p:sp>
+    </p:spTree>
+    <p:extLst>
+      <p:ext uri="{BB962C8B-B14F-4D97-AF65-F5344CB8AC3E}">
+        <p14:creationId xmlns:p14="http://schemas.microsoft.com/office/powerpoint/2010/main" val="4234178764"/>
+      </p:ext>
+    </p:extLst>
+  </p:cSld>
+  <p:clrMapOvr>
+    <a:masterClrMapping/>
+  </p:clrMapOvr>
+</p:sld>
+</file>
+
 <file path=ppt/slides/slide3.xml><?xml version="1.0" encoding="utf-8"?>
 <p:sld xmlns:a="http://schemas.openxmlformats.org/drawingml/2006/main" xmlns:r="http://schemas.openxmlformats.org/officeDocument/2006/relationships" xmlns:p="http://schemas.openxmlformats.org/presentationml/2006/main">
   <p:cSld>
@@ -4720,18 +5397,18 @@
       </p:grpSpPr>
       <p:sp>
         <p:nvSpPr>
-          <p:cNvPr id="5" name="Content Placeholder 4">
-            <a:extLst>
-              <a:ext uri="{FF2B5EF4-FFF2-40B4-BE49-F238E27FC236}">
-                <a16:creationId xmlns:a16="http://schemas.microsoft.com/office/drawing/2014/main" id="{1C9A72A4-59EC-3D64-920D-9765C3C1A0D6}"/>
-              </a:ext>
-            </a:extLst>
-          </p:cNvPr>
-          <p:cNvSpPr>
-            <a:spLocks noGrp="1"/>
-          </p:cNvSpPr>
-          <p:nvPr>
-            <p:ph sz="half" idx="2"/>
+          <p:cNvPr id="2" name="Slide Number Placeholder 1">
+            <a:extLst>
+              <a:ext uri="{FF2B5EF4-FFF2-40B4-BE49-F238E27FC236}">
+                <a16:creationId xmlns:a16="http://schemas.microsoft.com/office/drawing/2014/main" id="{0E23F34B-6F2C-03A2-1012-4C56E164AF7D}"/>
+              </a:ext>
+            </a:extLst>
+          </p:cNvPr>
+          <p:cNvSpPr>
+            <a:spLocks noGrp="1"/>
+          </p:cNvSpPr>
+          <p:nvPr>
+            <p:ph type="sldNum" sz="quarter" idx="10"/>
           </p:nvPr>
         </p:nvSpPr>
         <p:spPr/>
@@ -4739,90 +5416,29 @@
           <a:bodyPr/>
           <a:lstStyle/>
           <a:p>
-            <a:pPr>
-              <a:buClr>
-                <a:schemeClr val="tx1"/>
-              </a:buClr>
-            </a:pPr>
-            <a:r>
-              <a:rPr lang="en-US" dirty="0">
-                <a:solidFill>
-                  <a:schemeClr val="accent1"/>
-                </a:solidFill>
-              </a:rPr>
-              <a:t>Cloud computing </a:t>
-            </a:r>
-            <a:r>
-              <a:rPr lang="en-US" dirty="0"/>
-              <a:t>is about the on-demand availability of resources.</a:t>
-            </a:r>
-          </a:p>
-          <a:p>
-            <a:pPr>
-              <a:buClr>
-                <a:schemeClr val="tx1"/>
-              </a:buClr>
-            </a:pPr>
-            <a:r>
-              <a:rPr lang="en-US" dirty="0"/>
-              <a:t>In this chapter, we will focus on how a software architect can use infrastructure services from the cloud to deliver the services that the architect is designing and developing.</a:t>
-            </a:r>
-          </a:p>
-          <a:p>
-            <a:pPr>
-              <a:buClr>
-                <a:schemeClr val="tx1"/>
-              </a:buClr>
-            </a:pPr>
-            <a:r>
-              <a:rPr lang="en-US" dirty="0"/>
-              <a:t>Along the way, we will take a journey into some of the most important principles and techniques of distributed computing. </a:t>
-            </a:r>
-          </a:p>
-          <a:p>
-            <a:pPr lvl="1"/>
-            <a:r>
-              <a:rPr lang="en-US" dirty="0">
-                <a:solidFill>
-                  <a:schemeClr val="accent1"/>
-                </a:solidFill>
-              </a:rPr>
-              <a:t>distributed computing</a:t>
-            </a:r>
-            <a:r>
-              <a:rPr lang="en-US" dirty="0"/>
-              <a:t> means using multiple computers to work cooperatively together, thereby producing faster performance and a more robust system.</a:t>
-            </a:r>
-          </a:p>
-          <a:p>
-            <a:pPr lvl="1"/>
-            <a:r>
-              <a:rPr lang="en-US" dirty="0"/>
-              <a:t>Distributed computing is a fundamental and essential for cloud-based systems.</a:t>
-            </a:r>
-          </a:p>
-          <a:p>
-            <a:r>
-              <a:rPr lang="en-US" dirty="0"/>
-              <a:t>The treatment we give here is a brief overview of the principles most relevant to architecture.</a:t>
-            </a:r>
-          </a:p>
-        </p:txBody>
-      </p:sp>
-      <p:sp>
-        <p:nvSpPr>
-          <p:cNvPr id="4" name="Title 3">
-            <a:extLst>
-              <a:ext uri="{FF2B5EF4-FFF2-40B4-BE49-F238E27FC236}">
-                <a16:creationId xmlns:a16="http://schemas.microsoft.com/office/drawing/2014/main" id="{15EFF02B-5C44-D42D-0875-C69B3B166D0A}"/>
-              </a:ext>
-            </a:extLst>
-          </p:cNvPr>
-          <p:cNvSpPr>
-            <a:spLocks noGrp="1"/>
-          </p:cNvSpPr>
-          <p:nvPr>
-            <p:ph type="title"/>
+            <a:fld id="{AE311D09-C3D9-45E8-99CE-78E12234EEAD}" type="slidenum">
+              <a:rPr lang="en-US" smtClean="0"/>
+              <a:pPr/>
+              <a:t>3</a:t>
+            </a:fld>
+            <a:endParaRPr lang="en-US" dirty="0"/>
+          </a:p>
+        </p:txBody>
+      </p:sp>
+      <p:sp>
+        <p:nvSpPr>
+          <p:cNvPr id="3" name="Text Placeholder 2">
+            <a:extLst>
+              <a:ext uri="{FF2B5EF4-FFF2-40B4-BE49-F238E27FC236}">
+                <a16:creationId xmlns:a16="http://schemas.microsoft.com/office/drawing/2014/main" id="{B49C609F-AD13-A294-DA3C-0959121D50D0}"/>
+              </a:ext>
+            </a:extLst>
+          </p:cNvPr>
+          <p:cNvSpPr>
+            <a:spLocks noGrp="1"/>
+          </p:cNvSpPr>
+          <p:nvPr>
+            <p:ph type="body" sz="quarter" idx="11"/>
           </p:nvPr>
         </p:nvSpPr>
         <p:spPr/>
@@ -4832,7 +5448,35 @@
           <a:p>
             <a:r>
               <a:rPr lang="en-US" dirty="0"/>
-              <a:t>Introduction</a:t>
+              <a:t>A distributed system is one in which the failure of a computer you didn’t even know existed can render your own computer unusable.</a:t>
+            </a:r>
+          </a:p>
+        </p:txBody>
+      </p:sp>
+      <p:sp>
+        <p:nvSpPr>
+          <p:cNvPr id="4" name="Text Placeholder 3">
+            <a:extLst>
+              <a:ext uri="{FF2B5EF4-FFF2-40B4-BE49-F238E27FC236}">
+                <a16:creationId xmlns:a16="http://schemas.microsoft.com/office/drawing/2014/main" id="{C92728C8-4BEE-635D-6FD9-D79988F02071}"/>
+              </a:ext>
+            </a:extLst>
+          </p:cNvPr>
+          <p:cNvSpPr>
+            <a:spLocks noGrp="1"/>
+          </p:cNvSpPr>
+          <p:nvPr>
+            <p:ph type="body" sz="quarter" idx="12"/>
+          </p:nvPr>
+        </p:nvSpPr>
+        <p:spPr/>
+        <p:txBody>
+          <a:bodyPr/>
+          <a:lstStyle/>
+          <a:p>
+            <a:r>
+              <a:rPr lang="en-US" dirty="0"/>
+              <a:t>—Leslie Lamport</a:t>
             </a:r>
           </a:p>
         </p:txBody>
@@ -4840,7 +5484,7 @@
     </p:spTree>
     <p:extLst>
       <p:ext uri="{BB962C8B-B14F-4D97-AF65-F5344CB8AC3E}">
-        <p14:creationId xmlns:p14="http://schemas.microsoft.com/office/powerpoint/2010/main" val="1662834164"/>
+        <p14:creationId xmlns:p14="http://schemas.microsoft.com/office/powerpoint/2010/main" val="3657298562"/>
       </p:ext>
     </p:extLst>
   </p:cSld>
@@ -4872,7 +5516,7 @@
           <p:cNvPr id="2" name="Content Placeholder 1">
             <a:extLst>
               <a:ext uri="{FF2B5EF4-FFF2-40B4-BE49-F238E27FC236}">
-                <a16:creationId xmlns:a16="http://schemas.microsoft.com/office/drawing/2014/main" id="{FC2F0CFE-5D4D-35DF-1FD3-B502033DA23D}"/>
+                <a16:creationId xmlns:a16="http://schemas.microsoft.com/office/drawing/2014/main" id="{506161CD-A22F-9C5D-EE7E-B87A27236E26}"/>
               </a:ext>
             </a:extLst>
           </p:cNvPr>
@@ -4888,79 +5532,6 @@
           <a:bodyPr/>
           <a:lstStyle/>
           <a:p>
-            <a:r>
-              <a:rPr lang="en-US" dirty="0">
-                <a:solidFill>
-                  <a:schemeClr val="accent1"/>
-                </a:solidFill>
-              </a:rPr>
-              <a:t>Public clouds </a:t>
-            </a:r>
-            <a:r>
-              <a:rPr lang="en-US" dirty="0"/>
-              <a:t>are owned and provided by cloud service providers. </a:t>
-            </a:r>
-          </a:p>
-          <a:p>
-            <a:pPr lvl="1"/>
-            <a:r>
-              <a:rPr lang="en-US" dirty="0"/>
-              <a:t>companies like AWS, Azure, or Google Cloud.</a:t>
-            </a:r>
-          </a:p>
-          <a:p>
-            <a:r>
-              <a:rPr lang="en-US" dirty="0">
-                <a:solidFill>
-                  <a:schemeClr val="accent1"/>
-                </a:solidFill>
-              </a:rPr>
-              <a:t>Private clouds </a:t>
-            </a:r>
-            <a:r>
-              <a:rPr lang="en-US" dirty="0"/>
-              <a:t>are owned and operated by an organization for the use of members of that organization.</a:t>
-            </a:r>
-          </a:p>
-          <a:p>
-            <a:pPr lvl="1"/>
-            <a:r>
-              <a:rPr lang="en-US" dirty="0"/>
-              <a:t>An organization might choose a private cloud because of concerns such as control, security, etc.</a:t>
-            </a:r>
-          </a:p>
-          <a:p>
-            <a:r>
-              <a:rPr lang="en-US" dirty="0"/>
-              <a:t>The </a:t>
-            </a:r>
-            <a:r>
-              <a:rPr lang="en-US" dirty="0">
-                <a:solidFill>
-                  <a:schemeClr val="accent1"/>
-                </a:solidFill>
-              </a:rPr>
-              <a:t>hybrid cloud </a:t>
-            </a:r>
-            <a:r>
-              <a:rPr lang="en-US" dirty="0"/>
-              <a:t>approach is a mixed model, in which some workloads are run in a private cloud and other workloads are run in a public cloud.</a:t>
-            </a:r>
-          </a:p>
-          <a:p>
-            <a:pPr lvl="1"/>
-            <a:r>
-              <a:rPr lang="en-US" dirty="0"/>
-              <a:t>It might be used because some data are legally required to be subject to greater control and scrutiny.</a:t>
-            </a:r>
-          </a:p>
-          <a:p>
-            <a:r>
-              <a:rPr lang="en-US" dirty="0"/>
-              <a:t>For an architect designing software using cloud services, there is not much difference, from a technical perspective, between private clouds and public clouds.</a:t>
-            </a:r>
-          </a:p>
-          <a:p>
             <a:endParaRPr lang="en-US" dirty="0"/>
           </a:p>
         </p:txBody>
@@ -4970,7 +5541,7 @@
           <p:cNvPr id="3" name="Title 2">
             <a:extLst>
               <a:ext uri="{FF2B5EF4-FFF2-40B4-BE49-F238E27FC236}">
-                <a16:creationId xmlns:a16="http://schemas.microsoft.com/office/drawing/2014/main" id="{64A1F920-947D-F23F-97DE-0BFEFE12B804}"/>
+                <a16:creationId xmlns:a16="http://schemas.microsoft.com/office/drawing/2014/main" id="{F7EA99A5-297E-F022-0341-30C37F523A1B}"/>
               </a:ext>
             </a:extLst>
           </p:cNvPr>
@@ -4988,7 +5559,7 @@
           <a:p>
             <a:r>
               <a:rPr lang="en-US" dirty="0"/>
-              <a:t>17.1 Cloud Basics</a:t>
+              <a:t>Chapter Outline</a:t>
             </a:r>
           </a:p>
         </p:txBody>
@@ -4998,7 +5569,7 @@
           <p:cNvPr id="4" name="Slide Number Placeholder 3">
             <a:extLst>
               <a:ext uri="{FF2B5EF4-FFF2-40B4-BE49-F238E27FC236}">
-                <a16:creationId xmlns:a16="http://schemas.microsoft.com/office/drawing/2014/main" id="{C42C0315-C056-9812-EF7E-A26F61F487AD}"/>
+                <a16:creationId xmlns:a16="http://schemas.microsoft.com/office/drawing/2014/main" id="{3D3DB827-F6DA-B5EC-83C6-51CBA9D0E19C}"/>
               </a:ext>
             </a:extLst>
           </p:cNvPr>
@@ -5026,7 +5597,7 @@
     </p:spTree>
     <p:extLst>
       <p:ext uri="{BB962C8B-B14F-4D97-AF65-F5344CB8AC3E}">
-        <p14:creationId xmlns:p14="http://schemas.microsoft.com/office/powerpoint/2010/main" val="1594606508"/>
+        <p14:creationId xmlns:p14="http://schemas.microsoft.com/office/powerpoint/2010/main" val="4091285075"/>
       </p:ext>
     </p:extLst>
   </p:cSld>
@@ -5053,43 +5624,12 @@
           <a:chExt cx="0" cy="0"/>
         </a:xfrm>
       </p:grpSpPr>
-      <p:pic>
-        <p:nvPicPr>
-          <p:cNvPr id="8" name="Picture Placeholder 7">
-            <a:extLst>
-              <a:ext uri="{FF2B5EF4-FFF2-40B4-BE49-F238E27FC236}">
-                <a16:creationId xmlns:a16="http://schemas.microsoft.com/office/drawing/2014/main" id="{1E2B8A1A-A76C-6ED3-C724-1D297270FC19}"/>
-              </a:ext>
-            </a:extLst>
-          </p:cNvPr>
-          <p:cNvPicPr>
-            <a:picLocks noGrp="1" noChangeAspect="1"/>
-          </p:cNvPicPr>
-          <p:nvPr>
-            <p:ph type="pic" sz="quarter" idx="11"/>
-          </p:nvPr>
-        </p:nvPicPr>
-        <p:blipFill>
-          <a:blip r:embed="rId2">
-            <a:extLst>
-              <a:ext uri="{28A0092B-C50C-407E-A947-70E740481C1C}">
-                <a14:useLocalDpi xmlns:a14="http://schemas.microsoft.com/office/drawing/2010/main" val="0"/>
-              </a:ext>
-            </a:extLst>
-          </a:blip>
-          <a:srcRect t="9856" b="9856"/>
-          <a:stretch>
-            <a:fillRect/>
-          </a:stretch>
-        </p:blipFill>
-        <p:spPr/>
-      </p:pic>
-      <p:sp>
-        <p:nvSpPr>
-          <p:cNvPr id="3" name="Content Placeholder 2">
-            <a:extLst>
-              <a:ext uri="{FF2B5EF4-FFF2-40B4-BE49-F238E27FC236}">
-                <a16:creationId xmlns:a16="http://schemas.microsoft.com/office/drawing/2014/main" id="{A3E6E0FB-3525-0424-F677-410C03ED4091}"/>
+      <p:sp>
+        <p:nvSpPr>
+          <p:cNvPr id="5" name="Content Placeholder 4">
+            <a:extLst>
+              <a:ext uri="{FF2B5EF4-FFF2-40B4-BE49-F238E27FC236}">
+                <a16:creationId xmlns:a16="http://schemas.microsoft.com/office/drawing/2014/main" id="{1C9A72A4-59EC-3D64-920D-9765C3C1A0D6}"/>
               </a:ext>
             </a:extLst>
           </p:cNvPr>
@@ -5105,41 +5645,90 @@
           <a:bodyPr/>
           <a:lstStyle/>
           <a:p>
-            <a:r>
-              <a:rPr lang="en-US" dirty="0"/>
-              <a:t>The data center consists of rows and rows of such racks. </a:t>
+            <a:pPr>
+              <a:buClr>
+                <a:schemeClr val="tx1"/>
+              </a:buClr>
+            </a:pPr>
+            <a:r>
+              <a:rPr lang="en-US" dirty="0">
+                <a:solidFill>
+                  <a:schemeClr val="accent1"/>
+                </a:solidFill>
+              </a:rPr>
+              <a:t>Cloud computing </a:t>
+            </a:r>
+            <a:r>
+              <a:rPr lang="en-US" dirty="0"/>
+              <a:t>is about the on-demand availability of resources.</a:t>
+            </a:r>
+          </a:p>
+          <a:p>
+            <a:pPr>
+              <a:buClr>
+                <a:schemeClr val="tx1"/>
+              </a:buClr>
+            </a:pPr>
+            <a:r>
+              <a:rPr lang="en-US" dirty="0"/>
+              <a:t>In this chapter, we will focus on how a software architect can use infrastructure services from the cloud to deliver the services that the architect is designing and developing.</a:t>
+            </a:r>
+          </a:p>
+          <a:p>
+            <a:pPr>
+              <a:buClr>
+                <a:schemeClr val="tx1"/>
+              </a:buClr>
+            </a:pPr>
+            <a:r>
+              <a:rPr lang="en-US" dirty="0"/>
+              <a:t>Along the way, we will take a journey into some of the most important principles and techniques of distributed computing. </a:t>
             </a:r>
           </a:p>
           <a:p>
             <a:pPr lvl="1"/>
             <a:r>
-              <a:rPr lang="en-US" dirty="0"/>
-              <a:t>Each rack consists of more than 25 computers (each with multiple CPUs).</a:t>
+              <a:rPr lang="en-US" dirty="0">
+                <a:solidFill>
+                  <a:schemeClr val="accent1"/>
+                </a:solidFill>
+              </a:rPr>
+              <a:t>distributed computing</a:t>
+            </a:r>
+            <a:r>
+              <a:rPr lang="en-US" dirty="0"/>
+              <a:t> means using multiple computers to work cooperatively together, thereby producing faster performance and a more robust system.</a:t>
             </a:r>
           </a:p>
           <a:p>
             <a:pPr lvl="1"/>
             <a:r>
               <a:rPr lang="en-US" dirty="0"/>
-              <a:t>Cloud data centers are one reason why energy efficiency has become a critical quality attribute in some applications.</a:t>
-            </a:r>
-          </a:p>
-        </p:txBody>
-      </p:sp>
-      <p:sp>
-        <p:nvSpPr>
-          <p:cNvPr id="4" name="Content Placeholder 3">
-            <a:extLst>
-              <a:ext uri="{FF2B5EF4-FFF2-40B4-BE49-F238E27FC236}">
-                <a16:creationId xmlns:a16="http://schemas.microsoft.com/office/drawing/2014/main" id="{FA7B9540-6FFD-A66E-4625-9578FB72DCC0}"/>
-              </a:ext>
-            </a:extLst>
-          </p:cNvPr>
-          <p:cNvSpPr>
-            <a:spLocks noGrp="1"/>
-          </p:cNvSpPr>
-          <p:nvPr>
-            <p:ph sz="half" idx="12"/>
+              <a:t>Distributed computing is a fundamental and essential for cloud-based systems.</a:t>
+            </a:r>
+          </a:p>
+          <a:p>
+            <a:r>
+              <a:rPr lang="en-US" dirty="0"/>
+              <a:t>The treatment we give here is a brief overview of the principles most relevant to architecture.</a:t>
+            </a:r>
+          </a:p>
+        </p:txBody>
+      </p:sp>
+      <p:sp>
+        <p:nvSpPr>
+          <p:cNvPr id="4" name="Title 3">
+            <a:extLst>
+              <a:ext uri="{FF2B5EF4-FFF2-40B4-BE49-F238E27FC236}">
+                <a16:creationId xmlns:a16="http://schemas.microsoft.com/office/drawing/2014/main" id="{15EFF02B-5C44-D42D-0875-C69B3B166D0A}"/>
+              </a:ext>
+            </a:extLst>
+          </p:cNvPr>
+          <p:cNvSpPr>
+            <a:spLocks noGrp="1"/>
+          </p:cNvSpPr>
+          <p:nvPr>
+            <p:ph type="title"/>
           </p:nvPr>
         </p:nvSpPr>
         <p:spPr/>
@@ -5148,119 +5737,16 @@
           <a:lstStyle/>
           <a:p>
             <a:r>
-              <a:rPr lang="en-US" dirty="0">
-                <a:solidFill>
-                  <a:schemeClr val="accent1"/>
-                </a:solidFill>
-              </a:rPr>
-              <a:t>Cloud regions</a:t>
-            </a:r>
-            <a:r>
-              <a:rPr lang="en-US" dirty="0"/>
-              <a:t> are physical and logical groupings of data centers around the world.</a:t>
-            </a:r>
-          </a:p>
-          <a:p>
-            <a:pPr lvl="1"/>
-            <a:r>
-              <a:rPr lang="en-US" dirty="0"/>
-              <a:t>Regions reduce latency by being closer to users and help with legal compliance (like GDPR) by keeping data in-country.</a:t>
-            </a:r>
-          </a:p>
-          <a:p>
-            <a:r>
-              <a:rPr lang="en-US" dirty="0"/>
-              <a:t>There are two main gateways into a cloud: a </a:t>
-            </a:r>
-            <a:r>
-              <a:rPr lang="en-US" dirty="0">
-                <a:solidFill>
-                  <a:schemeClr val="accent1"/>
-                </a:solidFill>
-              </a:rPr>
-              <a:t>management gateway </a:t>
-            </a:r>
-            <a:r>
-              <a:rPr lang="en-US" dirty="0"/>
-              <a:t>and a </a:t>
-            </a:r>
-            <a:r>
-              <a:rPr lang="en-US" dirty="0">
-                <a:solidFill>
-                  <a:schemeClr val="accent1"/>
-                </a:solidFill>
-              </a:rPr>
-              <a:t>message gateway</a:t>
-            </a:r>
-            <a:r>
-              <a:rPr lang="en-US" dirty="0"/>
-              <a:t>. Here we will focus on the management gateway.</a:t>
-            </a:r>
-          </a:p>
-        </p:txBody>
-      </p:sp>
-      <p:sp>
-        <p:nvSpPr>
-          <p:cNvPr id="5" name="Title 4">
-            <a:extLst>
-              <a:ext uri="{FF2B5EF4-FFF2-40B4-BE49-F238E27FC236}">
-                <a16:creationId xmlns:a16="http://schemas.microsoft.com/office/drawing/2014/main" id="{07760120-6E7E-0AFA-ED84-2212D1B22885}"/>
-              </a:ext>
-            </a:extLst>
-          </p:cNvPr>
-          <p:cNvSpPr>
-            <a:spLocks noGrp="1"/>
-          </p:cNvSpPr>
-          <p:nvPr>
-            <p:ph type="title"/>
-          </p:nvPr>
-        </p:nvSpPr>
-        <p:spPr/>
-        <p:txBody>
-          <a:bodyPr/>
-          <a:lstStyle/>
-          <a:p>
-            <a:r>
-              <a:rPr lang="en-US" dirty="0"/>
-              <a:t>17.1 Cloud Basics</a:t>
-            </a:r>
-          </a:p>
-        </p:txBody>
-      </p:sp>
-      <p:sp>
-        <p:nvSpPr>
-          <p:cNvPr id="6" name="Slide Number Placeholder 5">
-            <a:extLst>
-              <a:ext uri="{FF2B5EF4-FFF2-40B4-BE49-F238E27FC236}">
-                <a16:creationId xmlns:a16="http://schemas.microsoft.com/office/drawing/2014/main" id="{F39747D8-9C7E-7418-BAF4-A40E542EBB32}"/>
-              </a:ext>
-            </a:extLst>
-          </p:cNvPr>
-          <p:cNvSpPr>
-            <a:spLocks noGrp="1"/>
-          </p:cNvSpPr>
-          <p:nvPr>
-            <p:ph type="sldNum" sz="quarter" idx="13"/>
-          </p:nvPr>
-        </p:nvSpPr>
-        <p:spPr/>
-        <p:txBody>
-          <a:bodyPr/>
-          <a:lstStyle/>
-          <a:p>
-            <a:fld id="{AE311D09-C3D9-45E8-99CE-78E12234EEAD}" type="slidenum">
-              <a:rPr lang="en-US" smtClean="0"/>
-              <a:pPr/>
-              <a:t>5</a:t>
-            </a:fld>
-            <a:endParaRPr lang="en-US" dirty="0"/>
+              <a:rPr lang="en-US" dirty="0"/>
+              <a:t>Introduction</a:t>
+            </a:r>
           </a:p>
         </p:txBody>
       </p:sp>
     </p:spTree>
     <p:extLst>
       <p:ext uri="{BB962C8B-B14F-4D97-AF65-F5344CB8AC3E}">
-        <p14:creationId xmlns:p14="http://schemas.microsoft.com/office/powerpoint/2010/main" val="418176556"/>
+        <p14:creationId xmlns:p14="http://schemas.microsoft.com/office/powerpoint/2010/main" val="1662834164"/>
       </p:ext>
     </p:extLst>
   </p:cSld>
@@ -5287,95 +5773,149 @@
           <a:chExt cx="0" cy="0"/>
         </a:xfrm>
       </p:grpSpPr>
-      <p:pic>
-        <p:nvPicPr>
-          <p:cNvPr id="7" name="Picture Placeholder 6">
-            <a:extLst>
-              <a:ext uri="{FF2B5EF4-FFF2-40B4-BE49-F238E27FC236}">
-                <a16:creationId xmlns:a16="http://schemas.microsoft.com/office/drawing/2014/main" id="{6F945284-F800-B4D6-61C3-54A78D9F6163}"/>
-              </a:ext>
-            </a:extLst>
-          </p:cNvPr>
-          <p:cNvPicPr>
-            <a:picLocks noGrp="1" noChangeAspect="1"/>
-          </p:cNvPicPr>
-          <p:nvPr>
-            <p:ph type="pic" sz="quarter" idx="11"/>
-          </p:nvPr>
-        </p:nvPicPr>
-        <p:blipFill>
-          <a:blip r:embed="rId2">
-            <a:extLst>
-              <a:ext uri="{28A0092B-C50C-407E-A947-70E740481C1C}">
-                <a14:useLocalDpi xmlns:a14="http://schemas.microsoft.com/office/drawing/2010/main" val="0"/>
-              </a:ext>
-            </a:extLst>
-          </a:blip>
-          <a:srcRect t="238" b="238"/>
-          <a:stretch/>
-        </p:blipFill>
-        <p:spPr>
-          <a:xfrm>
-            <a:off x="1650709" y="518312"/>
-            <a:ext cx="8890581" cy="5000952"/>
-          </a:xfrm>
-        </p:spPr>
-      </p:pic>
-      <p:sp>
-        <p:nvSpPr>
-          <p:cNvPr id="3" name="Text Placeholder 2">
-            <a:extLst>
-              <a:ext uri="{FF2B5EF4-FFF2-40B4-BE49-F238E27FC236}">
-                <a16:creationId xmlns:a16="http://schemas.microsoft.com/office/drawing/2014/main" id="{55B12EBA-06DC-0D87-0AFC-6AA19145A1D0}"/>
-              </a:ext>
-            </a:extLst>
-          </p:cNvPr>
-          <p:cNvSpPr>
-            <a:spLocks noGrp="1"/>
-          </p:cNvSpPr>
-          <p:nvPr>
-            <p:ph type="body" sz="quarter" idx="12"/>
-          </p:nvPr>
-        </p:nvSpPr>
-        <p:spPr>
-          <a:xfrm>
-            <a:off x="555625" y="5683250"/>
-            <a:ext cx="11036300" cy="878915"/>
-          </a:xfrm>
-        </p:spPr>
+      <p:sp>
+        <p:nvSpPr>
+          <p:cNvPr id="2" name="Content Placeholder 1">
+            <a:extLst>
+              <a:ext uri="{FF2B5EF4-FFF2-40B4-BE49-F238E27FC236}">
+                <a16:creationId xmlns:a16="http://schemas.microsoft.com/office/drawing/2014/main" id="{FC2F0CFE-5D4D-35DF-1FD3-B502033DA23D}"/>
+              </a:ext>
+            </a:extLst>
+          </p:cNvPr>
+          <p:cNvSpPr>
+            <a:spLocks noGrp="1"/>
+          </p:cNvSpPr>
+          <p:nvPr>
+            <p:ph sz="half" idx="2"/>
+          </p:nvPr>
+        </p:nvSpPr>
+        <p:spPr/>
         <p:txBody>
           <a:bodyPr/>
           <a:lstStyle/>
           <a:p>
             <a:r>
-              <a:rPr lang="en-US" dirty="0"/>
-              <a:t>management gateway vs message gateway</a:t>
-            </a:r>
-          </a:p>
-        </p:txBody>
-      </p:sp>
-      <p:sp>
-        <p:nvSpPr>
-          <p:cNvPr id="5" name="Slide Number Placeholder 4">
-            <a:extLst>
-              <a:ext uri="{FF2B5EF4-FFF2-40B4-BE49-F238E27FC236}">
-                <a16:creationId xmlns:a16="http://schemas.microsoft.com/office/drawing/2014/main" id="{1D85CE4E-3DE3-7B82-0CBD-5CBD20708DFA}"/>
-              </a:ext>
-            </a:extLst>
-          </p:cNvPr>
-          <p:cNvSpPr>
-            <a:spLocks noGrp="1"/>
-          </p:cNvSpPr>
-          <p:nvPr>
-            <p:ph type="sldNum" sz="quarter" idx="13"/>
-          </p:nvPr>
-        </p:nvSpPr>
-        <p:spPr>
-          <a:xfrm>
-            <a:off x="556149" y="153671"/>
-            <a:ext cx="670079" cy="641281"/>
-          </a:xfrm>
-        </p:spPr>
+              <a:rPr lang="en-US" dirty="0">
+                <a:solidFill>
+                  <a:schemeClr val="accent1"/>
+                </a:solidFill>
+              </a:rPr>
+              <a:t>Public clouds </a:t>
+            </a:r>
+            <a:r>
+              <a:rPr lang="en-US" dirty="0"/>
+              <a:t>are owned and provided by cloud service providers. </a:t>
+            </a:r>
+          </a:p>
+          <a:p>
+            <a:pPr lvl="1"/>
+            <a:r>
+              <a:rPr lang="en-US" dirty="0"/>
+              <a:t>companies like AWS, Azure, or Google Cloud.</a:t>
+            </a:r>
+          </a:p>
+          <a:p>
+            <a:r>
+              <a:rPr lang="en-US" dirty="0">
+                <a:solidFill>
+                  <a:schemeClr val="accent1"/>
+                </a:solidFill>
+              </a:rPr>
+              <a:t>Private clouds </a:t>
+            </a:r>
+            <a:r>
+              <a:rPr lang="en-US" dirty="0"/>
+              <a:t>are owned and operated by an organization for the use of members of that organization.</a:t>
+            </a:r>
+          </a:p>
+          <a:p>
+            <a:pPr lvl="1"/>
+            <a:r>
+              <a:rPr lang="en-US" dirty="0"/>
+              <a:t>An organization might choose a private cloud because of concerns such as control, security, etc.</a:t>
+            </a:r>
+          </a:p>
+          <a:p>
+            <a:r>
+              <a:rPr lang="en-US" dirty="0"/>
+              <a:t>The </a:t>
+            </a:r>
+            <a:r>
+              <a:rPr lang="en-US" dirty="0">
+                <a:solidFill>
+                  <a:schemeClr val="accent1"/>
+                </a:solidFill>
+              </a:rPr>
+              <a:t>hybrid cloud </a:t>
+            </a:r>
+            <a:r>
+              <a:rPr lang="en-US" dirty="0"/>
+              <a:t>approach is a mixed model, in which some workloads are run in a private cloud and other workloads are run in a public cloud.</a:t>
+            </a:r>
+          </a:p>
+          <a:p>
+            <a:pPr lvl="1"/>
+            <a:r>
+              <a:rPr lang="en-US" dirty="0"/>
+              <a:t>It might be used because some data are legally required to be subject to greater control and scrutiny.</a:t>
+            </a:r>
+          </a:p>
+          <a:p>
+            <a:r>
+              <a:rPr lang="en-US" dirty="0"/>
+              <a:t>For an architect designing software using cloud services, there is not much difference, from a technical perspective, between private clouds and public clouds.</a:t>
+            </a:r>
+          </a:p>
+          <a:p>
+            <a:endParaRPr lang="en-US" dirty="0"/>
+          </a:p>
+        </p:txBody>
+      </p:sp>
+      <p:sp>
+        <p:nvSpPr>
+          <p:cNvPr id="3" name="Title 2">
+            <a:extLst>
+              <a:ext uri="{FF2B5EF4-FFF2-40B4-BE49-F238E27FC236}">
+                <a16:creationId xmlns:a16="http://schemas.microsoft.com/office/drawing/2014/main" id="{64A1F920-947D-F23F-97DE-0BFEFE12B804}"/>
+              </a:ext>
+            </a:extLst>
+          </p:cNvPr>
+          <p:cNvSpPr>
+            <a:spLocks noGrp="1"/>
+          </p:cNvSpPr>
+          <p:nvPr>
+            <p:ph type="title"/>
+          </p:nvPr>
+        </p:nvSpPr>
+        <p:spPr/>
+        <p:txBody>
+          <a:bodyPr/>
+          <a:lstStyle/>
+          <a:p>
+            <a:r>
+              <a:rPr lang="en-US" dirty="0"/>
+              <a:t>17.1 Cloud Basics</a:t>
+            </a:r>
+          </a:p>
+        </p:txBody>
+      </p:sp>
+      <p:sp>
+        <p:nvSpPr>
+          <p:cNvPr id="4" name="Slide Number Placeholder 3">
+            <a:extLst>
+              <a:ext uri="{FF2B5EF4-FFF2-40B4-BE49-F238E27FC236}">
+                <a16:creationId xmlns:a16="http://schemas.microsoft.com/office/drawing/2014/main" id="{C42C0315-C056-9812-EF7E-A26F61F487AD}"/>
+              </a:ext>
+            </a:extLst>
+          </p:cNvPr>
+          <p:cNvSpPr>
+            <a:spLocks noGrp="1"/>
+          </p:cNvSpPr>
+          <p:nvPr>
+            <p:ph type="sldNum" sz="quarter" idx="10"/>
+          </p:nvPr>
+        </p:nvSpPr>
+        <p:spPr/>
         <p:txBody>
           <a:bodyPr/>
           <a:lstStyle/>
@@ -5392,7 +5932,7 @@
     </p:spTree>
     <p:extLst>
       <p:ext uri="{BB962C8B-B14F-4D97-AF65-F5344CB8AC3E}">
-        <p14:creationId xmlns:p14="http://schemas.microsoft.com/office/powerpoint/2010/main" val="538104930"/>
+        <p14:creationId xmlns:p14="http://schemas.microsoft.com/office/powerpoint/2010/main" val="1594606508"/>
       </p:ext>
     </p:extLst>
   </p:cSld>
@@ -5419,12 +5959,43 @@
           <a:chExt cx="0" cy="0"/>
         </a:xfrm>
       </p:grpSpPr>
-      <p:sp>
-        <p:nvSpPr>
-          <p:cNvPr id="2" name="Content Placeholder 1">
-            <a:extLst>
-              <a:ext uri="{FF2B5EF4-FFF2-40B4-BE49-F238E27FC236}">
-                <a16:creationId xmlns:a16="http://schemas.microsoft.com/office/drawing/2014/main" id="{9F576ADD-90E3-70B5-5281-4ED5C41F8800}"/>
+      <p:pic>
+        <p:nvPicPr>
+          <p:cNvPr id="8" name="Picture Placeholder 7">
+            <a:extLst>
+              <a:ext uri="{FF2B5EF4-FFF2-40B4-BE49-F238E27FC236}">
+                <a16:creationId xmlns:a16="http://schemas.microsoft.com/office/drawing/2014/main" id="{1E2B8A1A-A76C-6ED3-C724-1D297270FC19}"/>
+              </a:ext>
+            </a:extLst>
+          </p:cNvPr>
+          <p:cNvPicPr>
+            <a:picLocks noGrp="1" noChangeAspect="1"/>
+          </p:cNvPicPr>
+          <p:nvPr>
+            <p:ph type="pic" sz="quarter" idx="11"/>
+          </p:nvPr>
+        </p:nvPicPr>
+        <p:blipFill>
+          <a:blip r:embed="rId2">
+            <a:extLst>
+              <a:ext uri="{28A0092B-C50C-407E-A947-70E740481C1C}">
+                <a14:useLocalDpi xmlns:a14="http://schemas.microsoft.com/office/drawing/2010/main" val="0"/>
+              </a:ext>
+            </a:extLst>
+          </a:blip>
+          <a:srcRect t="9856" b="9856"/>
+          <a:stretch>
+            <a:fillRect/>
+          </a:stretch>
+        </p:blipFill>
+        <p:spPr/>
+      </p:pic>
+      <p:sp>
+        <p:nvSpPr>
+          <p:cNvPr id="3" name="Content Placeholder 2">
+            <a:extLst>
+              <a:ext uri="{FF2B5EF4-FFF2-40B4-BE49-F238E27FC236}">
+                <a16:creationId xmlns:a16="http://schemas.microsoft.com/office/drawing/2014/main" id="{A3E6E0FB-3525-0424-F677-410C03ED4091}"/>
               </a:ext>
             </a:extLst>
           </p:cNvPr>
@@ -5442,28 +6013,70 @@
           <a:p>
             <a:r>
               <a:rPr lang="en-US" dirty="0"/>
-              <a:t>Steps to have a VM allocated for you in the cloud:</a:t>
+              <a:t>The data center consists of rows and rows of such racks. </a:t>
             </a:r>
           </a:p>
           <a:p>
             <a:pPr lvl="1"/>
             <a:r>
               <a:rPr lang="en-US" dirty="0"/>
-              <a:t>You send a request with parameters like region and instance type (e.g., CPU and memory size). </a:t>
+              <a:t>Each rack consists of more than 25 computers (each with multiple CPUs).</a:t>
             </a:r>
           </a:p>
           <a:p>
             <a:pPr lvl="1"/>
             <a:r>
               <a:rPr lang="en-US" dirty="0"/>
-              <a:t>The management gateway is responsible for many physical computers, and each has a hypervisor that manages the VMs on it.</a:t>
+              <a:t>Cloud data centers are one reason why energy efficiency has become a critical quality attribute in some applications.</a:t>
+            </a:r>
+          </a:p>
+        </p:txBody>
+      </p:sp>
+      <p:sp>
+        <p:nvSpPr>
+          <p:cNvPr id="4" name="Content Placeholder 3">
+            <a:extLst>
+              <a:ext uri="{FF2B5EF4-FFF2-40B4-BE49-F238E27FC236}">
+                <a16:creationId xmlns:a16="http://schemas.microsoft.com/office/drawing/2014/main" id="{FA7B9540-6FFD-A66E-4625-9578FB72DCC0}"/>
+              </a:ext>
+            </a:extLst>
+          </p:cNvPr>
+          <p:cNvSpPr>
+            <a:spLocks noGrp="1"/>
+          </p:cNvSpPr>
+          <p:nvPr>
+            <p:ph sz="half" idx="12"/>
+          </p:nvPr>
+        </p:nvSpPr>
+        <p:spPr/>
+        <p:txBody>
+          <a:bodyPr/>
+          <a:lstStyle/>
+          <a:p>
+            <a:r>
+              <a:rPr lang="en-US" dirty="0">
+                <a:solidFill>
+                  <a:schemeClr val="accent1"/>
+                </a:solidFill>
+              </a:rPr>
+              <a:t>Cloud regions</a:t>
+            </a:r>
+            <a:r>
+              <a:rPr lang="en-US" dirty="0"/>
+              <a:t> are physical and logical groupings of data centers around the world.</a:t>
             </a:r>
           </a:p>
           <a:p>
             <a:pPr lvl="1"/>
             <a:r>
               <a:rPr lang="en-US" dirty="0"/>
-              <a:t>The </a:t>
+              <a:t>Regions reduce latency by being closer to users and help with legal compliance (like GDPR) by keeping data in-country.</a:t>
+            </a:r>
+          </a:p>
+          <a:p>
+            <a:r>
+              <a:rPr lang="en-US" dirty="0"/>
+              <a:t>There are two main gateways into a cloud: a </a:t>
             </a:r>
             <a:r>
               <a:rPr lang="en-US" dirty="0">
@@ -5475,57 +6088,29 @@
             </a:r>
             <a:r>
               <a:rPr lang="en-US" dirty="0"/>
-              <a:t>finds a hypervisor with enough free resources then asks that hypervisor to create an additional VM.</a:t>
-            </a:r>
-          </a:p>
-          <a:p>
-            <a:pPr lvl="1"/>
-            <a:r>
-              <a:rPr lang="en-US" dirty="0"/>
-              <a:t>Once created, you receive its IP address. Cloud providers ensure resources are always available.</a:t>
-            </a:r>
-          </a:p>
-          <a:p>
-            <a:r>
-              <a:rPr lang="en-US" dirty="0"/>
-              <a:t>The management gateway performs other functions besides allocating new VMs. </a:t>
-            </a:r>
-          </a:p>
-          <a:p>
-            <a:pPr lvl="1"/>
-            <a:r>
-              <a:rPr lang="en-US" dirty="0"/>
-              <a:t>collecting billing information about the VM.</a:t>
-            </a:r>
-          </a:p>
-          <a:p>
-            <a:pPr lvl="1"/>
-            <a:r>
-              <a:rPr lang="en-US" dirty="0"/>
-              <a:t>providing the capability to monitor and destroy the VM.</a:t>
-            </a:r>
-          </a:p>
-          <a:p>
-            <a:r>
-              <a:rPr lang="en-US" dirty="0"/>
-              <a:t>The management gateway is accessed through its API.</a:t>
-            </a:r>
-          </a:p>
-          <a:p>
-            <a:pPr lvl="1"/>
-            <a:r>
-              <a:rPr lang="en-US" dirty="0"/>
-              <a:t>Usually there is also a web interface (like AWS Console), but it's mostly useful for simple tasks.</a:t>
-            </a:r>
-          </a:p>
-        </p:txBody>
-      </p:sp>
-      <p:sp>
-        <p:nvSpPr>
-          <p:cNvPr id="3" name="Title 2">
-            <a:extLst>
-              <a:ext uri="{FF2B5EF4-FFF2-40B4-BE49-F238E27FC236}">
-                <a16:creationId xmlns:a16="http://schemas.microsoft.com/office/drawing/2014/main" id="{00205917-227A-694F-46C0-3F83497FC5CA}"/>
+              <a:t>and a </a:t>
+            </a:r>
+            <a:r>
+              <a:rPr lang="en-US" dirty="0">
+                <a:solidFill>
+                  <a:schemeClr val="accent1"/>
+                </a:solidFill>
+              </a:rPr>
+              <a:t>message gateway</a:t>
+            </a:r>
+            <a:r>
+              <a:rPr lang="en-US" dirty="0"/>
+              <a:t>. Here we will focus on the management gateway.</a:t>
+            </a:r>
+          </a:p>
+        </p:txBody>
+      </p:sp>
+      <p:sp>
+        <p:nvSpPr>
+          <p:cNvPr id="5" name="Title 4">
+            <a:extLst>
+              <a:ext uri="{FF2B5EF4-FFF2-40B4-BE49-F238E27FC236}">
+                <a16:creationId xmlns:a16="http://schemas.microsoft.com/office/drawing/2014/main" id="{07760120-6E7E-0AFA-ED84-2212D1B22885}"/>
               </a:ext>
             </a:extLst>
           </p:cNvPr>
@@ -5550,18 +6135,18 @@
       </p:sp>
       <p:sp>
         <p:nvSpPr>
-          <p:cNvPr id="4" name="Slide Number Placeholder 3">
-            <a:extLst>
-              <a:ext uri="{FF2B5EF4-FFF2-40B4-BE49-F238E27FC236}">
-                <a16:creationId xmlns:a16="http://schemas.microsoft.com/office/drawing/2014/main" id="{B11FF0F3-CD28-A5F3-312E-020B13D9A278}"/>
-              </a:ext>
-            </a:extLst>
-          </p:cNvPr>
-          <p:cNvSpPr>
-            <a:spLocks noGrp="1"/>
-          </p:cNvSpPr>
-          <p:nvPr>
-            <p:ph type="sldNum" sz="quarter" idx="10"/>
+          <p:cNvPr id="6" name="Slide Number Placeholder 5">
+            <a:extLst>
+              <a:ext uri="{FF2B5EF4-FFF2-40B4-BE49-F238E27FC236}">
+                <a16:creationId xmlns:a16="http://schemas.microsoft.com/office/drawing/2014/main" id="{F39747D8-9C7E-7418-BAF4-A40E542EBB32}"/>
+              </a:ext>
+            </a:extLst>
+          </p:cNvPr>
+          <p:cNvSpPr>
+            <a:spLocks noGrp="1"/>
+          </p:cNvSpPr>
+          <p:nvPr>
+            <p:ph type="sldNum" sz="quarter" idx="13"/>
           </p:nvPr>
         </p:nvSpPr>
         <p:spPr/>
@@ -5581,7 +6166,7 @@
     </p:spTree>
     <p:extLst>
       <p:ext uri="{BB962C8B-B14F-4D97-AF65-F5344CB8AC3E}">
-        <p14:creationId xmlns:p14="http://schemas.microsoft.com/office/powerpoint/2010/main" val="2215206880"/>
+        <p14:creationId xmlns:p14="http://schemas.microsoft.com/office/powerpoint/2010/main" val="418176556"/>
       </p:ext>
     </p:extLst>
   </p:cSld>
@@ -5608,128 +6193,95 @@
           <a:chExt cx="0" cy="0"/>
         </a:xfrm>
       </p:grpSpPr>
-      <p:sp>
-        <p:nvSpPr>
-          <p:cNvPr id="2" name="Content Placeholder 1">
-            <a:extLst>
-              <a:ext uri="{FF2B5EF4-FFF2-40B4-BE49-F238E27FC236}">
-                <a16:creationId xmlns:a16="http://schemas.microsoft.com/office/drawing/2014/main" id="{A54E6E08-C4BF-BDD5-8F2E-5710EDC31ADC}"/>
-              </a:ext>
-            </a:extLst>
-          </p:cNvPr>
-          <p:cNvSpPr>
-            <a:spLocks noGrp="1"/>
-          </p:cNvSpPr>
-          <p:nvPr>
-            <p:ph sz="half" idx="2"/>
-          </p:nvPr>
-        </p:nvSpPr>
-        <p:spPr/>
+      <p:pic>
+        <p:nvPicPr>
+          <p:cNvPr id="7" name="Picture Placeholder 6">
+            <a:extLst>
+              <a:ext uri="{FF2B5EF4-FFF2-40B4-BE49-F238E27FC236}">
+                <a16:creationId xmlns:a16="http://schemas.microsoft.com/office/drawing/2014/main" id="{6F945284-F800-B4D6-61C3-54A78D9F6163}"/>
+              </a:ext>
+            </a:extLst>
+          </p:cNvPr>
+          <p:cNvPicPr>
+            <a:picLocks noGrp="1" noChangeAspect="1"/>
+          </p:cNvPicPr>
+          <p:nvPr>
+            <p:ph type="pic" sz="quarter" idx="11"/>
+          </p:nvPr>
+        </p:nvPicPr>
+        <p:blipFill>
+          <a:blip r:embed="rId2">
+            <a:extLst>
+              <a:ext uri="{28A0092B-C50C-407E-A947-70E740481C1C}">
+                <a14:useLocalDpi xmlns:a14="http://schemas.microsoft.com/office/drawing/2010/main" val="0"/>
+              </a:ext>
+            </a:extLst>
+          </a:blip>
+          <a:srcRect t="238" b="238"/>
+          <a:stretch/>
+        </p:blipFill>
+        <p:spPr>
+          <a:xfrm>
+            <a:off x="1650709" y="518312"/>
+            <a:ext cx="8890581" cy="5000952"/>
+          </a:xfrm>
+        </p:spPr>
+      </p:pic>
+      <p:sp>
+        <p:nvSpPr>
+          <p:cNvPr id="3" name="Text Placeholder 2">
+            <a:extLst>
+              <a:ext uri="{FF2B5EF4-FFF2-40B4-BE49-F238E27FC236}">
+                <a16:creationId xmlns:a16="http://schemas.microsoft.com/office/drawing/2014/main" id="{55B12EBA-06DC-0D87-0AFC-6AA19145A1D0}"/>
+              </a:ext>
+            </a:extLst>
+          </p:cNvPr>
+          <p:cNvSpPr>
+            <a:spLocks noGrp="1"/>
+          </p:cNvSpPr>
+          <p:nvPr>
+            <p:ph type="body" sz="quarter" idx="12"/>
+          </p:nvPr>
+        </p:nvSpPr>
+        <p:spPr>
+          <a:xfrm>
+            <a:off x="555625" y="5683250"/>
+            <a:ext cx="11036300" cy="878915"/>
+          </a:xfrm>
+        </p:spPr>
         <p:txBody>
           <a:bodyPr/>
           <a:lstStyle/>
           <a:p>
             <a:r>
               <a:rPr lang="en-US" dirty="0"/>
-              <a:t>When a data center contains tens of thousands of physical computers, it is almost a certainty that one or more will fail every day.</a:t>
-            </a:r>
-          </a:p>
-          <a:p>
-            <a:pPr lvl="1"/>
-            <a:r>
-              <a:rPr lang="en-US" dirty="0"/>
-              <a:t> Amazon reports that in a data center with around 64,000 computers, each with two spinning disk drives, approximately 5 computers and 17 disks will fail every day.</a:t>
-            </a:r>
-          </a:p>
-          <a:p>
-            <a:r>
-              <a:rPr lang="en-US" dirty="0"/>
-              <a:t>In addition to computer and disk failures, network switches can fail; the data center can overheat, causing all the computers to fail.</a:t>
-            </a:r>
-          </a:p>
-          <a:p>
-            <a:r>
-              <a:rPr lang="en-US" dirty="0"/>
-              <a:t>Although your cloud provider will have relatively few total outages, the physical computer on which your specific VM is running may fail.</a:t>
-            </a:r>
-          </a:p>
-          <a:p>
-            <a:r>
-              <a:rPr lang="en-US" dirty="0"/>
-              <a:t>We’ll discuss two concepts especially relevant to failure in the cloud: </a:t>
-            </a:r>
-            <a:r>
-              <a:rPr lang="en-US" dirty="0">
-                <a:solidFill>
-                  <a:schemeClr val="accent1"/>
-                </a:solidFill>
-              </a:rPr>
-              <a:t>timeouts</a:t>
-            </a:r>
-            <a:r>
-              <a:rPr lang="en-US" dirty="0"/>
-              <a:t> and </a:t>
-            </a:r>
-            <a:r>
-              <a:rPr lang="en-US" dirty="0">
-                <a:solidFill>
-                  <a:schemeClr val="accent1"/>
-                </a:solidFill>
-              </a:rPr>
-              <a:t>long tail latency</a:t>
-            </a:r>
-            <a:r>
-              <a:rPr lang="en-US" dirty="0"/>
-              <a:t>.</a:t>
-            </a:r>
-          </a:p>
-        </p:txBody>
-      </p:sp>
-      <p:sp>
-        <p:nvSpPr>
-          <p:cNvPr id="3" name="Title 2">
-            <a:extLst>
-              <a:ext uri="{FF2B5EF4-FFF2-40B4-BE49-F238E27FC236}">
-                <a16:creationId xmlns:a16="http://schemas.microsoft.com/office/drawing/2014/main" id="{30772A3B-84AA-EA49-54FA-0856935E1540}"/>
-              </a:ext>
-            </a:extLst>
-          </p:cNvPr>
-          <p:cNvSpPr>
-            <a:spLocks noGrp="1"/>
-          </p:cNvSpPr>
-          <p:nvPr>
-            <p:ph type="title"/>
-          </p:nvPr>
-        </p:nvSpPr>
-        <p:spPr/>
-        <p:txBody>
-          <a:bodyPr/>
-          <a:lstStyle/>
-          <a:p>
-            <a:r>
-              <a:rPr lang="en-US" dirty="0"/>
-              <a:t>17.2 Failure in the Cloud</a:t>
-            </a:r>
-          </a:p>
-        </p:txBody>
-      </p:sp>
-      <p:sp>
-        <p:nvSpPr>
-          <p:cNvPr id="4" name="Slide Number Placeholder 3">
-            <a:extLst>
-              <a:ext uri="{FF2B5EF4-FFF2-40B4-BE49-F238E27FC236}">
-                <a16:creationId xmlns:a16="http://schemas.microsoft.com/office/drawing/2014/main" id="{ACCDF35E-DCE7-A79E-66A4-C704B4E938D7}"/>
-              </a:ext>
-            </a:extLst>
-          </p:cNvPr>
-          <p:cNvSpPr>
-            <a:spLocks noGrp="1"/>
-          </p:cNvSpPr>
-          <p:nvPr>
-            <p:ph type="sldNum" sz="quarter" idx="10"/>
-          </p:nvPr>
-        </p:nvSpPr>
-        <p:spPr/>
+              <a:t>management gateway vs message gateway</a:t>
+            </a:r>
+          </a:p>
+        </p:txBody>
+      </p:sp>
+      <p:sp>
+        <p:nvSpPr>
+          <p:cNvPr id="5" name="Slide Number Placeholder 4">
+            <a:extLst>
+              <a:ext uri="{FF2B5EF4-FFF2-40B4-BE49-F238E27FC236}">
+                <a16:creationId xmlns:a16="http://schemas.microsoft.com/office/drawing/2014/main" id="{1D85CE4E-3DE3-7B82-0CBD-5CBD20708DFA}"/>
+              </a:ext>
+            </a:extLst>
+          </p:cNvPr>
+          <p:cNvSpPr>
+            <a:spLocks noGrp="1"/>
+          </p:cNvSpPr>
+          <p:nvPr>
+            <p:ph type="sldNum" sz="quarter" idx="13"/>
+          </p:nvPr>
+        </p:nvSpPr>
+        <p:spPr>
+          <a:xfrm>
+            <a:off x="556149" y="153671"/>
+            <a:ext cx="670079" cy="641281"/>
+          </a:xfrm>
+        </p:spPr>
         <p:txBody>
           <a:bodyPr/>
           <a:lstStyle/>
@@ -5746,7 +6298,7 @@
     </p:spTree>
     <p:extLst>
       <p:ext uri="{BB962C8B-B14F-4D97-AF65-F5344CB8AC3E}">
-        <p14:creationId xmlns:p14="http://schemas.microsoft.com/office/powerpoint/2010/main" val="4113126826"/>
+        <p14:creationId xmlns:p14="http://schemas.microsoft.com/office/powerpoint/2010/main" val="538104930"/>
       </p:ext>
     </p:extLst>
   </p:cSld>
@@ -5778,7 +6330,7 @@
           <p:cNvPr id="2" name="Content Placeholder 1">
             <a:extLst>
               <a:ext uri="{FF2B5EF4-FFF2-40B4-BE49-F238E27FC236}">
-                <a16:creationId xmlns:a16="http://schemas.microsoft.com/office/drawing/2014/main" id="{16E5DD95-8172-F85A-C6E1-5215400C709D}"/>
+                <a16:creationId xmlns:a16="http://schemas.microsoft.com/office/drawing/2014/main" id="{9F576ADD-90E3-70B5-5281-4ED5C41F8800}"/>
               </a:ext>
             </a:extLst>
           </p:cNvPr>
@@ -5796,7 +6348,28 @@
           <a:p>
             <a:r>
               <a:rPr lang="en-US" dirty="0"/>
-              <a:t>Recall that </a:t>
+              <a:t>Steps to have a VM allocated for you in the cloud:</a:t>
+            </a:r>
+          </a:p>
+          <a:p>
+            <a:pPr lvl="1"/>
+            <a:r>
+              <a:rPr lang="en-US" dirty="0"/>
+              <a:t>You send a request with parameters like region and instance type (e.g., CPU and memory size). </a:t>
+            </a:r>
+          </a:p>
+          <a:p>
+            <a:pPr lvl="1"/>
+            <a:r>
+              <a:rPr lang="en-US" dirty="0"/>
+              <a:t>The management gateway is responsible for many physical computers, and each has a hypervisor that manages the VMs on it.</a:t>
+            </a:r>
+          </a:p>
+          <a:p>
+            <a:pPr lvl="1"/>
+            <a:r>
+              <a:rPr lang="en-US" dirty="0"/>
+              <a:t>The </a:t>
             </a:r>
             <a:r>
               <a:rPr lang="en-US" dirty="0">
@@ -5804,45 +6377,52 @@
                   <a:schemeClr val="accent1"/>
                 </a:solidFill>
               </a:rPr>
-              <a:t>timeout</a:t>
-            </a:r>
-            <a:r>
-              <a:rPr lang="en-US" dirty="0"/>
-              <a:t> is a tactic for availability. In a distributed system, timeouts are used to detect failure. There are several consequences of using timeouts:</a:t>
+              <a:t>management gateway </a:t>
+            </a:r>
+            <a:r>
+              <a:rPr lang="en-US" dirty="0"/>
+              <a:t>finds a hypervisor with enough free resources then asks that hypervisor to create an additional VM.</a:t>
             </a:r>
           </a:p>
           <a:p>
             <a:pPr lvl="1"/>
             <a:r>
               <a:rPr lang="en-US" dirty="0"/>
-              <a:t>Timeouts can’t distinguish between a failed computer or broken network connection and a slow reply to a message that exceeds the timeout period. This will cause you to label some slow responses as failures.</a:t>
+              <a:t>Once created, you receive its IP address. Cloud providers ensure resources are always available.</a:t>
+            </a:r>
+          </a:p>
+          <a:p>
+            <a:r>
+              <a:rPr lang="en-US" dirty="0"/>
+              <a:t>The management gateway performs other functions besides allocating new VMs. </a:t>
             </a:r>
           </a:p>
           <a:p>
             <a:pPr lvl="1"/>
             <a:r>
               <a:rPr lang="en-US" dirty="0"/>
-              <a:t>A timeout will not tell you where the failure or slowness occurs.</a:t>
+              <a:t>collecting billing information about the VM.</a:t>
             </a:r>
           </a:p>
           <a:p>
             <a:pPr lvl="1"/>
             <a:r>
               <a:rPr lang="en-US" dirty="0"/>
-              <a:t>Many times, a request to a service triggers that service to make requests to other services, which make more requests. Even if each of the responses in this chain has a latency that is close to (but slower than) the expected average response time, the overall latency may falsely suggest a failure.</a:t>
-            </a:r>
-          </a:p>
-          <a:p>
-            <a:r>
-              <a:rPr lang="en-US" dirty="0"/>
-              <a:t>There is usually a cost for a recovery action. Jumping to a conclusion that there was a failure, when there was actually just a temporary delay, may add a recovery cost when it isn’t necessary.</a:t>
-            </a:r>
-          </a:p>
-          <a:p>
-            <a:endParaRPr lang="en-US" dirty="0"/>
-          </a:p>
-          <a:p>
-            <a:endParaRPr lang="en-US" dirty="0"/>
+              <a:t>providing the capability to monitor and destroy the VM.</a:t>
+            </a:r>
+          </a:p>
+          <a:p>
+            <a:r>
+              <a:rPr lang="en-US" dirty="0"/>
+              <a:t>The management gateway is accessed through its API.</a:t>
+            </a:r>
+          </a:p>
+          <a:p>
+            <a:pPr lvl="1"/>
+            <a:r>
+              <a:rPr lang="en-US" dirty="0"/>
+              <a:t>Usually there is also a web interface (like AWS Console), but it's mostly useful for simple tasks.</a:t>
+            </a:r>
           </a:p>
         </p:txBody>
       </p:sp>
@@ -5851,7 +6431,7 @@
           <p:cNvPr id="3" name="Title 2">
             <a:extLst>
               <a:ext uri="{FF2B5EF4-FFF2-40B4-BE49-F238E27FC236}">
-                <a16:creationId xmlns:a16="http://schemas.microsoft.com/office/drawing/2014/main" id="{533A58F3-0DEA-56E3-4521-E4C1E8C569A6}"/>
+                <a16:creationId xmlns:a16="http://schemas.microsoft.com/office/drawing/2014/main" id="{00205917-227A-694F-46C0-3F83497FC5CA}"/>
               </a:ext>
             </a:extLst>
           </p:cNvPr>
@@ -5869,7 +6449,7 @@
           <a:p>
             <a:r>
               <a:rPr lang="en-US" dirty="0"/>
-              <a:t>Timeouts</a:t>
+              <a:t>17.1 Cloud Basics</a:t>
             </a:r>
           </a:p>
         </p:txBody>
@@ -5879,7 +6459,7 @@
           <p:cNvPr id="4" name="Slide Number Placeholder 3">
             <a:extLst>
               <a:ext uri="{FF2B5EF4-FFF2-40B4-BE49-F238E27FC236}">
-                <a16:creationId xmlns:a16="http://schemas.microsoft.com/office/drawing/2014/main" id="{FC6B1EDC-ADFF-73F4-6772-A9A33AF40ED6}"/>
+                <a16:creationId xmlns:a16="http://schemas.microsoft.com/office/drawing/2014/main" id="{B11FF0F3-CD28-A5F3-312E-020B13D9A278}"/>
               </a:ext>
             </a:extLst>
           </p:cNvPr>
@@ -5907,7 +6487,7 @@
     </p:spTree>
     <p:extLst>
       <p:ext uri="{BB962C8B-B14F-4D97-AF65-F5344CB8AC3E}">
-        <p14:creationId xmlns:p14="http://schemas.microsoft.com/office/powerpoint/2010/main" val="3918695811"/>
+        <p14:creationId xmlns:p14="http://schemas.microsoft.com/office/powerpoint/2010/main" val="2215206880"/>
       </p:ext>
     </p:extLst>
   </p:cSld>

--- a/chapter 17.pptx
+++ b/chapter 17.pptx
@@ -245,7 +245,7 @@
           <a:p>
             <a:fld id="{13928E3B-7122-43E6-B3BB-09448C56C96C}" type="datetimeFigureOut">
               <a:rPr lang="en-US" smtClean="0"/>
-              <a:t>25/07/20</a:t>
+              <a:t>25/07/25</a:t>
             </a:fld>
             <a:endParaRPr lang="en-US"/>
           </a:p>
@@ -423,7 +423,7 @@
           <a:p>
             <a:fld id="{B98C9CAF-43DF-44BF-8016-DC193E4E594B}" type="datetimeFigureOut">
               <a:rPr lang="en-US" smtClean="0"/>
-              <a:t>25/07/20</a:t>
+              <a:t>25/07/25</a:t>
             </a:fld>
             <a:endParaRPr lang="en-US"/>
           </a:p>
@@ -3425,7 +3425,7 @@
           <a:p>
             <a:r>
               <a:rPr lang="en-US" dirty="0"/>
-              <a:t>17.2 Failure in the Cloud</a:t>
+              <a:t>Failure in the Cloud</a:t>
             </a:r>
           </a:p>
         </p:txBody>
@@ -4130,7 +4130,7 @@
           <a:p>
             <a:r>
               <a:rPr lang="en-US" sz="3200" dirty="0"/>
-              <a:t>17.3 Multiple Instances for Performance and Availability</a:t>
+              <a:t>Multiple Instances for Performance and Availability</a:t>
             </a:r>
           </a:p>
         </p:txBody>
@@ -5303,7 +5303,39 @@
           <a:bodyPr/>
           <a:lstStyle/>
           <a:p>
-            <a:endParaRPr lang="en-US"/>
+            <a:r>
+              <a:rPr lang="en-US" dirty="0"/>
+              <a:t>The cloud is composed of distributed data centers, with each data center containing tens of thousands of computers. </a:t>
+            </a:r>
+          </a:p>
+          <a:p>
+            <a:r>
+              <a:rPr lang="en-US" dirty="0"/>
+              <a:t>Because of the large number of computers in a data center, failure of a computer in such a center happens quite frequently.</a:t>
+            </a:r>
+          </a:p>
+          <a:p>
+            <a:pPr lvl="1"/>
+            <a:r>
+              <a:rPr lang="en-US" dirty="0"/>
+              <a:t>You, as an architect of a service, should assume that at some point, the VMs on which your service is executing will fail.</a:t>
+            </a:r>
+          </a:p>
+          <a:p>
+            <a:r>
+              <a:rPr lang="en-US" dirty="0"/>
+              <a:t>You may decide to run multiple VMs or containers containing instances of your service. These multiple instances sit behind a load balancer.</a:t>
+            </a:r>
+          </a:p>
+          <a:p>
+            <a:r>
+              <a:rPr lang="en-US"/>
+              <a:t>The </a:t>
+            </a:r>
+            <a:r>
+              <a:rPr lang="en-US" dirty="0"/>
+              <a:t>cloud infrastructure can automatically scale your service by creating new instances when demand grows and removing instances when demand shrinks. </a:t>
+            </a:r>
           </a:p>
         </p:txBody>
       </p:sp>
@@ -5532,7 +5564,62 @@
           <a:bodyPr/>
           <a:lstStyle/>
           <a:p>
-            <a:endParaRPr lang="en-US" dirty="0"/>
+            <a:r>
+              <a:rPr lang="en-US" dirty="0"/>
+              <a:t>Introduction</a:t>
+            </a:r>
+          </a:p>
+          <a:p>
+            <a:r>
+              <a:rPr lang="en-US" dirty="0"/>
+              <a:t>Cloud Basics</a:t>
+            </a:r>
+          </a:p>
+          <a:p>
+            <a:r>
+              <a:rPr lang="en-US" dirty="0"/>
+              <a:t>Failure in the Cloud</a:t>
+            </a:r>
+          </a:p>
+          <a:p>
+            <a:pPr lvl="1"/>
+            <a:r>
+              <a:rPr lang="en-US" dirty="0"/>
+              <a:t>Timeouts</a:t>
+            </a:r>
+          </a:p>
+          <a:p>
+            <a:pPr lvl="1"/>
+            <a:r>
+              <a:rPr lang="en-US" dirty="0"/>
+              <a:t>Long Tail Latency</a:t>
+            </a:r>
+          </a:p>
+          <a:p>
+            <a:r>
+              <a:rPr lang="en-US" dirty="0"/>
+              <a:t>Multiple Instances for Performance and Availability</a:t>
+            </a:r>
+          </a:p>
+          <a:p>
+            <a:pPr lvl="1"/>
+            <a:r>
+              <a:rPr lang="en-US" dirty="0"/>
+              <a:t>Load Balancers</a:t>
+            </a:r>
+          </a:p>
+          <a:p>
+            <a:pPr lvl="1"/>
+            <a:r>
+              <a:rPr lang="en-US" dirty="0"/>
+              <a:t>Autoscaling</a:t>
+            </a:r>
+          </a:p>
+          <a:p>
+            <a:r>
+              <a:rPr lang="en-US" dirty="0"/>
+              <a:t>Summary</a:t>
+            </a:r>
           </a:p>
         </p:txBody>
       </p:sp>
@@ -5894,7 +5981,7 @@
           <a:p>
             <a:r>
               <a:rPr lang="en-US" dirty="0"/>
-              <a:t>17.1 Cloud Basics</a:t>
+              <a:t>Cloud Basics</a:t>
             </a:r>
           </a:p>
         </p:txBody>
@@ -6128,7 +6215,7 @@
           <a:p>
             <a:r>
               <a:rPr lang="en-US" dirty="0"/>
-              <a:t>17.1 Cloud Basics</a:t>
+              <a:t>Cloud Basics</a:t>
             </a:r>
           </a:p>
         </p:txBody>
@@ -6449,7 +6536,7 @@
           <a:p>
             <a:r>
               <a:rPr lang="en-US" dirty="0"/>
-              <a:t>17.1 Cloud Basics</a:t>
+              <a:t>Cloud Basics</a:t>
             </a:r>
           </a:p>
         </p:txBody>

--- a/chapter 17.pptx
+++ b/chapter 17.pptx
@@ -5,10 +5,10 @@
     <p:sldMasterId id="2147483648" r:id="rId1"/>
   </p:sldMasterIdLst>
   <p:notesMasterIdLst>
-    <p:notesMasterId r:id="rId22"/>
+    <p:notesMasterId r:id="rId23"/>
   </p:notesMasterIdLst>
   <p:handoutMasterIdLst>
-    <p:handoutMasterId r:id="rId23"/>
+    <p:handoutMasterId r:id="rId24"/>
   </p:handoutMasterIdLst>
   <p:sldIdLst>
     <p:sldId id="259" r:id="rId2"/>
@@ -16,21 +16,22 @@
     <p:sldId id="296" r:id="rId4"/>
     <p:sldId id="297" r:id="rId5"/>
     <p:sldId id="280" r:id="rId6"/>
-    <p:sldId id="281" r:id="rId7"/>
-    <p:sldId id="282" r:id="rId8"/>
-    <p:sldId id="283" r:id="rId9"/>
-    <p:sldId id="284" r:id="rId10"/>
-    <p:sldId id="285" r:id="rId11"/>
-    <p:sldId id="286" r:id="rId12"/>
-    <p:sldId id="287" r:id="rId13"/>
-    <p:sldId id="289" r:id="rId14"/>
-    <p:sldId id="288" r:id="rId15"/>
-    <p:sldId id="291" r:id="rId16"/>
-    <p:sldId id="292" r:id="rId17"/>
-    <p:sldId id="293" r:id="rId18"/>
-    <p:sldId id="294" r:id="rId19"/>
-    <p:sldId id="295" r:id="rId20"/>
-    <p:sldId id="298" r:id="rId21"/>
+    <p:sldId id="299" r:id="rId7"/>
+    <p:sldId id="281" r:id="rId8"/>
+    <p:sldId id="282" r:id="rId9"/>
+    <p:sldId id="283" r:id="rId10"/>
+    <p:sldId id="284" r:id="rId11"/>
+    <p:sldId id="285" r:id="rId12"/>
+    <p:sldId id="286" r:id="rId13"/>
+    <p:sldId id="287" r:id="rId14"/>
+    <p:sldId id="289" r:id="rId15"/>
+    <p:sldId id="288" r:id="rId16"/>
+    <p:sldId id="291" r:id="rId17"/>
+    <p:sldId id="292" r:id="rId18"/>
+    <p:sldId id="293" r:id="rId19"/>
+    <p:sldId id="294" r:id="rId20"/>
+    <p:sldId id="295" r:id="rId21"/>
+    <p:sldId id="298" r:id="rId22"/>
   </p:sldIdLst>
   <p:sldSz cx="12192000" cy="6858000"/>
   <p:notesSz cx="6858000" cy="9144000"/>
@@ -3330,7 +3331,7 @@
           <p:cNvPr id="2" name="Content Placeholder 1">
             <a:extLst>
               <a:ext uri="{FF2B5EF4-FFF2-40B4-BE49-F238E27FC236}">
-                <a16:creationId xmlns:a16="http://schemas.microsoft.com/office/drawing/2014/main" id="{A54E6E08-C4BF-BDD5-8F2E-5710EDC31ADC}"/>
+                <a16:creationId xmlns:a16="http://schemas.microsoft.com/office/drawing/2014/main" id="{9F576ADD-90E3-70B5-5281-4ED5C41F8800}"/>
               </a:ext>
             </a:extLst>
           </p:cNvPr>
@@ -3348,32 +3349,28 @@
           <a:p>
             <a:r>
               <a:rPr lang="en-US" dirty="0"/>
-              <a:t>When a data center contains tens of thousands of physical computers, it is almost a certainty that one or more will fail every day.</a:t>
+              <a:t>Steps to have a VM allocated for you in the cloud:</a:t>
             </a:r>
           </a:p>
           <a:p>
             <a:pPr lvl="1"/>
             <a:r>
               <a:rPr lang="en-US" dirty="0"/>
-              <a:t> Amazon reports that in a data center with around 64,000 computers, each with two spinning disk drives, approximately 5 computers and 17 disks will fail every day.</a:t>
-            </a:r>
-          </a:p>
-          <a:p>
-            <a:r>
-              <a:rPr lang="en-US" dirty="0"/>
-              <a:t>In addition to computer and disk failures, network switches can fail; the data center can overheat, causing all the computers to fail.</a:t>
-            </a:r>
-          </a:p>
-          <a:p>
-            <a:r>
-              <a:rPr lang="en-US" dirty="0"/>
-              <a:t>Although your cloud provider will have relatively few total outages, the physical computer on which your specific VM is running may fail.</a:t>
-            </a:r>
-          </a:p>
-          <a:p>
-            <a:r>
-              <a:rPr lang="en-US" dirty="0"/>
-              <a:t>We’ll discuss two concepts especially relevant to failure in the cloud: </a:t>
+              <a:t>You send a request with parameters like region and instance type (e.g., CPU and memory size). </a:t>
+            </a:r>
+          </a:p>
+          <a:p>
+            <a:pPr lvl="1"/>
+            <a:r>
+              <a:rPr lang="en-US" dirty="0"/>
+              <a:t>The management gateway is responsible for many physical computers, and each has a hypervisor that manages the VMs on it.</a:t>
+            </a:r>
+          </a:p>
+          <a:p>
+            <a:pPr lvl="1"/>
+            <a:r>
+              <a:rPr lang="en-US" dirty="0"/>
+              <a:t>The </a:t>
             </a:r>
             <a:r>
               <a:rPr lang="en-US" dirty="0">
@@ -3381,23 +3378,51 @@
                   <a:schemeClr val="accent1"/>
                 </a:solidFill>
               </a:rPr>
-              <a:t>timeouts</a:t>
-            </a:r>
-            <a:r>
-              <a:rPr lang="en-US" dirty="0"/>
-              <a:t> and </a:t>
-            </a:r>
-            <a:r>
-              <a:rPr lang="en-US" dirty="0">
-                <a:solidFill>
-                  <a:schemeClr val="accent1"/>
-                </a:solidFill>
-              </a:rPr>
-              <a:t>long tail latency</a:t>
-            </a:r>
-            <a:r>
-              <a:rPr lang="en-US" dirty="0"/>
-              <a:t>.</a:t>
+              <a:t>management gateway </a:t>
+            </a:r>
+            <a:r>
+              <a:rPr lang="en-US" dirty="0"/>
+              <a:t>finds a hypervisor with enough free resources then asks that hypervisor to create an additional VM.</a:t>
+            </a:r>
+          </a:p>
+          <a:p>
+            <a:pPr lvl="1"/>
+            <a:r>
+              <a:rPr lang="en-US" dirty="0"/>
+              <a:t>Once created, you receive its IP address. Cloud providers ensure resources are always available.</a:t>
+            </a:r>
+          </a:p>
+          <a:p>
+            <a:r>
+              <a:rPr lang="en-US" dirty="0"/>
+              <a:t>The management gateway performs other functions besides allocating new VMs. </a:t>
+            </a:r>
+          </a:p>
+          <a:p>
+            <a:pPr lvl="1"/>
+            <a:r>
+              <a:rPr lang="en-US" dirty="0"/>
+              <a:t>collecting billing information about the VM.</a:t>
+            </a:r>
+          </a:p>
+          <a:p>
+            <a:pPr lvl="1"/>
+            <a:r>
+              <a:rPr lang="en-US" dirty="0"/>
+              <a:t>providing the capability to monitor and destroy the VM.</a:t>
+            </a:r>
+          </a:p>
+          <a:p>
+            <a:r>
+              <a:rPr lang="en-US" dirty="0"/>
+              <a:t>The management gateway is accessed through its API.</a:t>
+            </a:r>
+          </a:p>
+          <a:p>
+            <a:pPr lvl="1"/>
+            <a:r>
+              <a:rPr lang="en-US" dirty="0"/>
+              <a:t>Usually there is also a web interface (like AWS Console), but it's mostly useful for simple tasks.</a:t>
             </a:r>
           </a:p>
         </p:txBody>
@@ -3407,7 +3432,7 @@
           <p:cNvPr id="3" name="Title 2">
             <a:extLst>
               <a:ext uri="{FF2B5EF4-FFF2-40B4-BE49-F238E27FC236}">
-                <a16:creationId xmlns:a16="http://schemas.microsoft.com/office/drawing/2014/main" id="{30772A3B-84AA-EA49-54FA-0856935E1540}"/>
+                <a16:creationId xmlns:a16="http://schemas.microsoft.com/office/drawing/2014/main" id="{00205917-227A-694F-46C0-3F83497FC5CA}"/>
               </a:ext>
             </a:extLst>
           </p:cNvPr>
@@ -3425,7 +3450,7 @@
           <a:p>
             <a:r>
               <a:rPr lang="en-US" dirty="0"/>
-              <a:t>Failure in the Cloud</a:t>
+              <a:t>Cloud Basics</a:t>
             </a:r>
           </a:p>
         </p:txBody>
@@ -3435,7 +3460,7 @@
           <p:cNvPr id="4" name="Slide Number Placeholder 3">
             <a:extLst>
               <a:ext uri="{FF2B5EF4-FFF2-40B4-BE49-F238E27FC236}">
-                <a16:creationId xmlns:a16="http://schemas.microsoft.com/office/drawing/2014/main" id="{ACCDF35E-DCE7-A79E-66A4-C704B4E938D7}"/>
+                <a16:creationId xmlns:a16="http://schemas.microsoft.com/office/drawing/2014/main" id="{B11FF0F3-CD28-A5F3-312E-020B13D9A278}"/>
               </a:ext>
             </a:extLst>
           </p:cNvPr>
@@ -3463,7 +3488,7 @@
     </p:spTree>
     <p:extLst>
       <p:ext uri="{BB962C8B-B14F-4D97-AF65-F5344CB8AC3E}">
-        <p14:creationId xmlns:p14="http://schemas.microsoft.com/office/powerpoint/2010/main" val="4113126826"/>
+        <p14:creationId xmlns:p14="http://schemas.microsoft.com/office/powerpoint/2010/main" val="2215206880"/>
       </p:ext>
     </p:extLst>
   </p:cSld>
@@ -3495,7 +3520,7 @@
           <p:cNvPr id="2" name="Content Placeholder 1">
             <a:extLst>
               <a:ext uri="{FF2B5EF4-FFF2-40B4-BE49-F238E27FC236}">
-                <a16:creationId xmlns:a16="http://schemas.microsoft.com/office/drawing/2014/main" id="{16E5DD95-8172-F85A-C6E1-5215400C709D}"/>
+                <a16:creationId xmlns:a16="http://schemas.microsoft.com/office/drawing/2014/main" id="{A54E6E08-C4BF-BDD5-8F2E-5710EDC31ADC}"/>
               </a:ext>
             </a:extLst>
           </p:cNvPr>
@@ -3513,7 +3538,32 @@
           <a:p>
             <a:r>
               <a:rPr lang="en-US" dirty="0"/>
-              <a:t>Recall that </a:t>
+              <a:t>When a data center contains tens of thousands of physical computers, it is almost a certainty that one or more will fail every day.</a:t>
+            </a:r>
+          </a:p>
+          <a:p>
+            <a:pPr lvl="1"/>
+            <a:r>
+              <a:rPr lang="en-US" dirty="0"/>
+              <a:t> Amazon reports that in a data center with around 64,000 computers, each with two spinning disk drives, approximately 5 computers and 17 disks will fail every day.</a:t>
+            </a:r>
+          </a:p>
+          <a:p>
+            <a:r>
+              <a:rPr lang="en-US" dirty="0"/>
+              <a:t>In addition to computer and disk failures, network switches can fail; the data center can overheat, causing all the computers to fail.</a:t>
+            </a:r>
+          </a:p>
+          <a:p>
+            <a:r>
+              <a:rPr lang="en-US" dirty="0"/>
+              <a:t>Although your cloud provider will have relatively few total outages, the physical computer on which your specific VM is running may fail.</a:t>
+            </a:r>
+          </a:p>
+          <a:p>
+            <a:r>
+              <a:rPr lang="en-US" dirty="0"/>
+              <a:t>We’ll discuss two concepts especially relevant to failure in the cloud: </a:t>
             </a:r>
             <a:r>
               <a:rPr lang="en-US" dirty="0">
@@ -3521,45 +3571,24 @@
                   <a:schemeClr val="accent1"/>
                 </a:solidFill>
               </a:rPr>
-              <a:t>timeout</a:t>
-            </a:r>
-            <a:r>
-              <a:rPr lang="en-US" dirty="0"/>
-              <a:t> is a tactic for availability. In a distributed system, timeouts are used to detect failure. There are several consequences of using timeouts:</a:t>
-            </a:r>
-          </a:p>
-          <a:p>
-            <a:pPr lvl="1"/>
-            <a:r>
-              <a:rPr lang="en-US" dirty="0"/>
-              <a:t>Timeouts can’t distinguish between a failed computer or broken network connection and a slow reply to a message that exceeds the timeout period. This will cause you to label some slow responses as failures.</a:t>
-            </a:r>
-          </a:p>
-          <a:p>
-            <a:pPr lvl="1"/>
-            <a:r>
-              <a:rPr lang="en-US" dirty="0"/>
-              <a:t>A timeout will not tell you where the failure or slowness occurs.</a:t>
-            </a:r>
-          </a:p>
-          <a:p>
-            <a:pPr lvl="1"/>
-            <a:r>
-              <a:rPr lang="en-US" dirty="0"/>
-              <a:t>Many times, a request to a service triggers that service to make requests to other services, which make more requests. Even if each of the responses in this chain has a latency that is close to (but slower than) the expected average response time, the overall latency may falsely suggest a failure.</a:t>
-            </a:r>
-          </a:p>
-          <a:p>
-            <a:r>
-              <a:rPr lang="en-US" dirty="0"/>
-              <a:t>There is usually a cost for a recovery action. Jumping to a conclusion that there was a failure, when there was actually just a temporary delay, may add a recovery cost when it isn’t necessary.</a:t>
-            </a:r>
-          </a:p>
-          <a:p>
-            <a:endParaRPr lang="en-US" dirty="0"/>
-          </a:p>
-          <a:p>
-            <a:endParaRPr lang="en-US" dirty="0"/>
+              <a:t>timeouts</a:t>
+            </a:r>
+            <a:r>
+              <a:rPr lang="en-US" dirty="0"/>
+              <a:t> and </a:t>
+            </a:r>
+            <a:r>
+              <a:rPr lang="en-US" dirty="0">
+                <a:solidFill>
+                  <a:schemeClr val="accent1"/>
+                </a:solidFill>
+              </a:rPr>
+              <a:t>long tail latency</a:t>
+            </a:r>
+            <a:r>
+              <a:rPr lang="en-US" dirty="0"/>
+              <a:t>.</a:t>
+            </a:r>
           </a:p>
         </p:txBody>
       </p:sp>
@@ -3568,7 +3597,7 @@
           <p:cNvPr id="3" name="Title 2">
             <a:extLst>
               <a:ext uri="{FF2B5EF4-FFF2-40B4-BE49-F238E27FC236}">
-                <a16:creationId xmlns:a16="http://schemas.microsoft.com/office/drawing/2014/main" id="{533A58F3-0DEA-56E3-4521-E4C1E8C569A6}"/>
+                <a16:creationId xmlns:a16="http://schemas.microsoft.com/office/drawing/2014/main" id="{30772A3B-84AA-EA49-54FA-0856935E1540}"/>
               </a:ext>
             </a:extLst>
           </p:cNvPr>
@@ -3586,7 +3615,7 @@
           <a:p>
             <a:r>
               <a:rPr lang="en-US" dirty="0"/>
-              <a:t>Timeouts</a:t>
+              <a:t>Failure in the Cloud</a:t>
             </a:r>
           </a:p>
         </p:txBody>
@@ -3596,7 +3625,7 @@
           <p:cNvPr id="4" name="Slide Number Placeholder 3">
             <a:extLst>
               <a:ext uri="{FF2B5EF4-FFF2-40B4-BE49-F238E27FC236}">
-                <a16:creationId xmlns:a16="http://schemas.microsoft.com/office/drawing/2014/main" id="{FC6B1EDC-ADFF-73F4-6772-A9A33AF40ED6}"/>
+                <a16:creationId xmlns:a16="http://schemas.microsoft.com/office/drawing/2014/main" id="{ACCDF35E-DCE7-A79E-66A4-C704B4E938D7}"/>
               </a:ext>
             </a:extLst>
           </p:cNvPr>
@@ -3624,7 +3653,7 @@
     </p:spTree>
     <p:extLst>
       <p:ext uri="{BB962C8B-B14F-4D97-AF65-F5344CB8AC3E}">
-        <p14:creationId xmlns:p14="http://schemas.microsoft.com/office/powerpoint/2010/main" val="3918695811"/>
+        <p14:creationId xmlns:p14="http://schemas.microsoft.com/office/powerpoint/2010/main" val="4113126826"/>
       </p:ext>
     </p:extLst>
   </p:cSld>
@@ -3656,7 +3685,7 @@
           <p:cNvPr id="2" name="Content Placeholder 1">
             <a:extLst>
               <a:ext uri="{FF2B5EF4-FFF2-40B4-BE49-F238E27FC236}">
-                <a16:creationId xmlns:a16="http://schemas.microsoft.com/office/drawing/2014/main" id="{9C8BBB0D-C999-99C5-EAE9-1E6F097DDBF8}"/>
+                <a16:creationId xmlns:a16="http://schemas.microsoft.com/office/drawing/2014/main" id="{16E5DD95-8172-F85A-C6E1-5215400C709D}"/>
               </a:ext>
             </a:extLst>
           </p:cNvPr>
@@ -3674,78 +3703,54 @@
           <a:p>
             <a:r>
               <a:rPr lang="en-US" dirty="0"/>
-              <a:t>Distributed system designers generally parameterize the timeout detection mechanism so that it can be tuned for a system or infrastructure.</a:t>
+              <a:t>Recall that </a:t>
+            </a:r>
+            <a:r>
+              <a:rPr lang="en-US" dirty="0">
+                <a:solidFill>
+                  <a:schemeClr val="accent1"/>
+                </a:solidFill>
+              </a:rPr>
+              <a:t>timeout</a:t>
+            </a:r>
+            <a:r>
+              <a:rPr lang="en-US" dirty="0"/>
+              <a:t> is a tactic for availability. In a distributed system, timeouts are used to detect failure. There are several consequences of using timeouts:</a:t>
             </a:r>
           </a:p>
           <a:p>
             <a:pPr lvl="1"/>
             <a:r>
               <a:rPr lang="en-US" dirty="0"/>
-              <a:t>One parameter is the </a:t>
-            </a:r>
-            <a:r>
-              <a:rPr lang="en-US" dirty="0">
-                <a:solidFill>
-                  <a:schemeClr val="accent1"/>
-                </a:solidFill>
-              </a:rPr>
-              <a:t>timeout interval</a:t>
-            </a:r>
-            <a:r>
-              <a:rPr lang="en-US" dirty="0"/>
-              <a:t>.</a:t>
+              <a:t>Timeouts can’t distinguish between a failed computer or broken network connection and a slow reply to a message that exceeds the timeout period. This will cause you to label some slow responses as failures.</a:t>
             </a:r>
           </a:p>
           <a:p>
             <a:pPr lvl="1"/>
             <a:r>
               <a:rPr lang="en-US" dirty="0"/>
-              <a:t>Most systems do not trigger failure recovery after a single missed response. The number of missed responses before failure recovery is a second parameter for the timeout mechanism.</a:t>
-            </a:r>
-            <a:endParaRPr lang="en-US" dirty="0">
-              <a:solidFill>
-                <a:schemeClr val="accent4">
-                  <a:lumMod val="50000"/>
-                </a:schemeClr>
-              </a:solidFill>
-            </a:endParaRPr>
-          </a:p>
-          <a:p>
-            <a:r>
-              <a:rPr lang="en-US" dirty="0">
-                <a:solidFill>
-                  <a:schemeClr val="tx1">
-                    <a:lumMod val="95000"/>
-                    <a:lumOff val="5000"/>
-                  </a:schemeClr>
-                </a:solidFill>
-              </a:rPr>
-              <a:t>Timeout settings differ by environment:</a:t>
-            </a:r>
-          </a:p>
-          <a:p>
-            <a:pPr lvl="1">
-              <a:buFont typeface="Arial" panose="020B0604020202020204" pitchFamily="34" charset="0"/>
-              <a:buChar char="•"/>
-            </a:pPr>
-            <a:r>
-              <a:rPr lang="en-US" dirty="0"/>
-              <a:t>In single data center systems, you can use shorter timeouts since delays are rare and failures are often real.</a:t>
-            </a:r>
-          </a:p>
-          <a:p>
-            <a:pPr lvl="1">
-              <a:buFont typeface="Arial" panose="020B0604020202020204" pitchFamily="34" charset="0"/>
-              <a:buChar char="•"/>
-            </a:pPr>
-            <a:r>
-              <a:rPr lang="en-US" dirty="0"/>
-              <a:t>In wider, less reliable networks you should use more relaxed timeout settings to avoid reacting to normal delays as if they were failures.</a:t>
+              <a:t>A timeout will not tell you where the failure or slowness occurs.</a:t>
+            </a:r>
+          </a:p>
+          <a:p>
+            <a:pPr lvl="1"/>
+            <a:r>
+              <a:rPr lang="en-US" dirty="0"/>
+              <a:t>Many times, a request to a service triggers that service to make requests to other services, which make more requests. Even if each of the responses in this chain has a latency that is close to (but slower than) the expected average response time, the overall latency may falsely suggest a failure.</a:t>
+            </a:r>
+          </a:p>
+          <a:p>
+            <a:r>
+              <a:rPr lang="en-US" dirty="0"/>
+              <a:t>There is usually a cost for a recovery action. Jumping to a conclusion that there was a failure, when there was actually just a temporary delay, may add a recovery cost when it isn’t necessary.</a:t>
             </a:r>
           </a:p>
           <a:p>
             <a:endParaRPr lang="en-US" dirty="0"/>
           </a:p>
+          <a:p>
+            <a:endParaRPr lang="en-US" dirty="0"/>
+          </a:p>
         </p:txBody>
       </p:sp>
       <p:sp>
@@ -3753,7 +3758,7 @@
           <p:cNvPr id="3" name="Title 2">
             <a:extLst>
               <a:ext uri="{FF2B5EF4-FFF2-40B4-BE49-F238E27FC236}">
-                <a16:creationId xmlns:a16="http://schemas.microsoft.com/office/drawing/2014/main" id="{B3E82180-CF63-569E-C9B6-F71C612D27A7}"/>
+                <a16:creationId xmlns:a16="http://schemas.microsoft.com/office/drawing/2014/main" id="{533A58F3-0DEA-56E3-4521-E4C1E8C569A6}"/>
               </a:ext>
             </a:extLst>
           </p:cNvPr>
@@ -3781,7 +3786,7 @@
           <p:cNvPr id="4" name="Slide Number Placeholder 3">
             <a:extLst>
               <a:ext uri="{FF2B5EF4-FFF2-40B4-BE49-F238E27FC236}">
-                <a16:creationId xmlns:a16="http://schemas.microsoft.com/office/drawing/2014/main" id="{328516FA-42DF-A57E-E93E-62E1BBDEF1CF}"/>
+                <a16:creationId xmlns:a16="http://schemas.microsoft.com/office/drawing/2014/main" id="{FC6B1EDC-ADFF-73F4-6772-A9A33AF40ED6}"/>
               </a:ext>
             </a:extLst>
           </p:cNvPr>
@@ -3809,7 +3814,7 @@
     </p:spTree>
     <p:extLst>
       <p:ext uri="{BB962C8B-B14F-4D97-AF65-F5344CB8AC3E}">
-        <p14:creationId xmlns:p14="http://schemas.microsoft.com/office/powerpoint/2010/main" val="3221678274"/>
+        <p14:creationId xmlns:p14="http://schemas.microsoft.com/office/powerpoint/2010/main" val="3918695811"/>
       </p:ext>
     </p:extLst>
   </p:cSld>
@@ -3836,43 +3841,12 @@
           <a:chExt cx="0" cy="0"/>
         </a:xfrm>
       </p:grpSpPr>
-      <p:pic>
-        <p:nvPicPr>
-          <p:cNvPr id="8" name="Picture Placeholder 7">
-            <a:extLst>
-              <a:ext uri="{FF2B5EF4-FFF2-40B4-BE49-F238E27FC236}">
-                <a16:creationId xmlns:a16="http://schemas.microsoft.com/office/drawing/2014/main" id="{C311109B-940C-652E-8BD8-F30C168A96C4}"/>
-              </a:ext>
-            </a:extLst>
-          </p:cNvPr>
-          <p:cNvPicPr>
-            <a:picLocks noGrp="1" noChangeAspect="1"/>
-          </p:cNvPicPr>
-          <p:nvPr>
-            <p:ph type="pic" sz="quarter" idx="11"/>
-          </p:nvPr>
-        </p:nvPicPr>
-        <p:blipFill>
-          <a:blip r:embed="rId2">
-            <a:extLst>
-              <a:ext uri="{28A0092B-C50C-407E-A947-70E740481C1C}">
-                <a14:useLocalDpi xmlns:a14="http://schemas.microsoft.com/office/drawing/2010/main" val="0"/>
-              </a:ext>
-            </a:extLst>
-          </a:blip>
-          <a:srcRect l="663" r="663"/>
-          <a:stretch>
-            <a:fillRect/>
-          </a:stretch>
-        </p:blipFill>
-        <p:spPr/>
-      </p:pic>
-      <p:sp>
-        <p:nvSpPr>
-          <p:cNvPr id="3" name="Content Placeholder 2">
-            <a:extLst>
-              <a:ext uri="{FF2B5EF4-FFF2-40B4-BE49-F238E27FC236}">
-                <a16:creationId xmlns:a16="http://schemas.microsoft.com/office/drawing/2014/main" id="{D163E54C-6A35-D85A-4410-85DEA1A85275}"/>
+      <p:sp>
+        <p:nvSpPr>
+          <p:cNvPr id="2" name="Content Placeholder 1">
+            <a:extLst>
+              <a:ext uri="{FF2B5EF4-FFF2-40B4-BE49-F238E27FC236}">
+                <a16:creationId xmlns:a16="http://schemas.microsoft.com/office/drawing/2014/main" id="{9C8BBB0D-C999-99C5-EAE9-1E6F097DDBF8}"/>
               </a:ext>
             </a:extLst>
           </p:cNvPr>
@@ -3889,40 +3863,95 @@
           <a:lstStyle/>
           <a:p>
             <a:r>
+              <a:rPr lang="en-US" dirty="0"/>
+              <a:t>Distributed system designers generally parameterize the timeout detection mechanism so that it can be tuned for a system or infrastructure.</a:t>
+            </a:r>
+          </a:p>
+          <a:p>
+            <a:pPr lvl="1"/>
+            <a:r>
+              <a:rPr lang="en-US" dirty="0"/>
+              <a:t>One parameter is the </a:t>
+            </a:r>
+            <a:r>
               <a:rPr lang="en-US" dirty="0">
                 <a:solidFill>
                   <a:schemeClr val="accent1"/>
                 </a:solidFill>
               </a:rPr>
-              <a:t>Long-tail latency </a:t>
-            </a:r>
-            <a:r>
-              <a:rPr lang="en-US" dirty="0"/>
-              <a:t>refers to the impact of a small percentage of requests that take significantly longer to process than the majority of requests.</a:t>
-            </a:r>
-          </a:p>
-          <a:p>
-            <a:r>
-              <a:rPr lang="en-US" dirty="0"/>
-              <a:t>This figure shows a histogram of the latency of 1,000 “launch instance” requests to Amazon Web Services. </a:t>
-            </a:r>
-          </a:p>
-        </p:txBody>
-      </p:sp>
-      <p:sp>
-        <p:nvSpPr>
-          <p:cNvPr id="4" name="Content Placeholder 3">
-            <a:extLst>
-              <a:ext uri="{FF2B5EF4-FFF2-40B4-BE49-F238E27FC236}">
-                <a16:creationId xmlns:a16="http://schemas.microsoft.com/office/drawing/2014/main" id="{AAAF8368-E5EB-D9D6-B666-E24F86CDDAB3}"/>
-              </a:ext>
-            </a:extLst>
-          </p:cNvPr>
-          <p:cNvSpPr>
-            <a:spLocks noGrp="1"/>
-          </p:cNvSpPr>
-          <p:nvPr>
-            <p:ph sz="half" idx="12"/>
+              <a:t>timeout interval</a:t>
+            </a:r>
+            <a:r>
+              <a:rPr lang="en-US" dirty="0"/>
+              <a:t>.</a:t>
+            </a:r>
+          </a:p>
+          <a:p>
+            <a:pPr lvl="1"/>
+            <a:r>
+              <a:rPr lang="en-US" dirty="0"/>
+              <a:t>Most systems do not trigger failure recovery after a single missed response. The number of missed responses before failure recovery is a second parameter for the timeout mechanism.</a:t>
+            </a:r>
+            <a:endParaRPr lang="en-US" dirty="0">
+              <a:solidFill>
+                <a:schemeClr val="accent4">
+                  <a:lumMod val="50000"/>
+                </a:schemeClr>
+              </a:solidFill>
+            </a:endParaRPr>
+          </a:p>
+          <a:p>
+            <a:r>
+              <a:rPr lang="en-US" dirty="0">
+                <a:solidFill>
+                  <a:schemeClr val="tx1">
+                    <a:lumMod val="95000"/>
+                    <a:lumOff val="5000"/>
+                  </a:schemeClr>
+                </a:solidFill>
+              </a:rPr>
+              <a:t>Timeout settings differ by environment:</a:t>
+            </a:r>
+          </a:p>
+          <a:p>
+            <a:pPr lvl="1">
+              <a:buFont typeface="Arial" panose="020B0604020202020204" pitchFamily="34" charset="0"/>
+              <a:buChar char="•"/>
+            </a:pPr>
+            <a:r>
+              <a:rPr lang="en-US" dirty="0"/>
+              <a:t>In single data center systems, you can use shorter timeouts since delays are rare and failures are often real.</a:t>
+            </a:r>
+          </a:p>
+          <a:p>
+            <a:pPr lvl="1">
+              <a:buFont typeface="Arial" panose="020B0604020202020204" pitchFamily="34" charset="0"/>
+              <a:buChar char="•"/>
+            </a:pPr>
+            <a:r>
+              <a:rPr lang="en-US" dirty="0"/>
+              <a:t>In wider, less reliable networks you should use more relaxed timeout settings to avoid reacting to normal delays as if they were failures.</a:t>
+            </a:r>
+          </a:p>
+          <a:p>
+            <a:endParaRPr lang="en-US" dirty="0"/>
+          </a:p>
+        </p:txBody>
+      </p:sp>
+      <p:sp>
+        <p:nvSpPr>
+          <p:cNvPr id="3" name="Title 2">
+            <a:extLst>
+              <a:ext uri="{FF2B5EF4-FFF2-40B4-BE49-F238E27FC236}">
+                <a16:creationId xmlns:a16="http://schemas.microsoft.com/office/drawing/2014/main" id="{B3E82180-CF63-569E-C9B6-F71C612D27A7}"/>
+              </a:ext>
+            </a:extLst>
+          </p:cNvPr>
+          <p:cNvSpPr>
+            <a:spLocks noGrp="1"/>
+          </p:cNvSpPr>
+          <p:nvPr>
+            <p:ph type="title"/>
           </p:nvPr>
         </p:nvSpPr>
         <p:spPr/>
@@ -3932,67 +3961,25 @@
           <a:p>
             <a:r>
               <a:rPr lang="en-US" dirty="0"/>
-              <a:t>You must be careful which statistic you use. In this case, the histogram peaks at a latency of 22 seconds, the average latency over all the measurements is 28 seconds, and the median latency is 23 seconds.</a:t>
-            </a:r>
-          </a:p>
-          <a:p>
-            <a:pPr lvl="1"/>
-            <a:r>
-              <a:rPr lang="en-US" dirty="0"/>
-              <a:t>Although the mean latency for each service-to-service request to a cloud-based service may be within tolerable limits, a reasonable number of these requests can have much greater latency.</a:t>
-            </a:r>
-          </a:p>
-          <a:p>
-            <a:pPr lvl="1"/>
-            <a:r>
-              <a:rPr lang="en-US" dirty="0"/>
-              <a:t>Notice how right side of the histogram looks like a long tail on the ground.</a:t>
-            </a:r>
-          </a:p>
-        </p:txBody>
-      </p:sp>
-      <p:sp>
-        <p:nvSpPr>
-          <p:cNvPr id="5" name="Title 4">
-            <a:extLst>
-              <a:ext uri="{FF2B5EF4-FFF2-40B4-BE49-F238E27FC236}">
-                <a16:creationId xmlns:a16="http://schemas.microsoft.com/office/drawing/2014/main" id="{6E44E832-10D6-DA1F-377B-09B7684AA281}"/>
-              </a:ext>
-            </a:extLst>
-          </p:cNvPr>
-          <p:cNvSpPr>
-            <a:spLocks noGrp="1"/>
-          </p:cNvSpPr>
-          <p:nvPr>
-            <p:ph type="title"/>
-          </p:nvPr>
-        </p:nvSpPr>
-        <p:spPr/>
-        <p:txBody>
-          <a:bodyPr/>
-          <a:lstStyle/>
-          <a:p>
-            <a:r>
-              <a:rPr lang="en-US" dirty="0"/>
-              <a:t>Long Tail Latency</a:t>
-            </a:r>
-          </a:p>
-        </p:txBody>
-      </p:sp>
-      <p:sp>
-        <p:nvSpPr>
-          <p:cNvPr id="6" name="Slide Number Placeholder 5">
-            <a:extLst>
-              <a:ext uri="{FF2B5EF4-FFF2-40B4-BE49-F238E27FC236}">
-                <a16:creationId xmlns:a16="http://schemas.microsoft.com/office/drawing/2014/main" id="{6762A936-F40E-CFD3-EB01-7C0351991945}"/>
-              </a:ext>
-            </a:extLst>
-          </p:cNvPr>
-          <p:cNvSpPr>
-            <a:spLocks noGrp="1"/>
-          </p:cNvSpPr>
-          <p:nvPr>
-            <p:ph type="sldNum" sz="quarter" idx="13"/>
+              <a:t>Timeouts</a:t>
+            </a:r>
+          </a:p>
+        </p:txBody>
+      </p:sp>
+      <p:sp>
+        <p:nvSpPr>
+          <p:cNvPr id="4" name="Slide Number Placeholder 3">
+            <a:extLst>
+              <a:ext uri="{FF2B5EF4-FFF2-40B4-BE49-F238E27FC236}">
+                <a16:creationId xmlns:a16="http://schemas.microsoft.com/office/drawing/2014/main" id="{328516FA-42DF-A57E-E93E-62E1BBDEF1CF}"/>
+              </a:ext>
+            </a:extLst>
+          </p:cNvPr>
+          <p:cNvSpPr>
+            <a:spLocks noGrp="1"/>
+          </p:cNvSpPr>
+          <p:nvPr>
+            <p:ph type="sldNum" sz="quarter" idx="10"/>
           </p:nvPr>
         </p:nvSpPr>
         <p:spPr/>
@@ -4012,7 +3999,7 @@
     </p:spTree>
     <p:extLst>
       <p:ext uri="{BB962C8B-B14F-4D97-AF65-F5344CB8AC3E}">
-        <p14:creationId xmlns:p14="http://schemas.microsoft.com/office/powerpoint/2010/main" val="3507271902"/>
+        <p14:creationId xmlns:p14="http://schemas.microsoft.com/office/powerpoint/2010/main" val="3221678274"/>
       </p:ext>
     </p:extLst>
   </p:cSld>
@@ -4039,12 +4026,43 @@
           <a:chExt cx="0" cy="0"/>
         </a:xfrm>
       </p:grpSpPr>
-      <p:sp>
-        <p:nvSpPr>
-          <p:cNvPr id="2" name="Content Placeholder 1">
-            <a:extLst>
-              <a:ext uri="{FF2B5EF4-FFF2-40B4-BE49-F238E27FC236}">
-                <a16:creationId xmlns:a16="http://schemas.microsoft.com/office/drawing/2014/main" id="{4B7584A5-2EAE-4DDD-A22B-3B929133188E}"/>
+      <p:pic>
+        <p:nvPicPr>
+          <p:cNvPr id="8" name="Picture Placeholder 7">
+            <a:extLst>
+              <a:ext uri="{FF2B5EF4-FFF2-40B4-BE49-F238E27FC236}">
+                <a16:creationId xmlns:a16="http://schemas.microsoft.com/office/drawing/2014/main" id="{C311109B-940C-652E-8BD8-F30C168A96C4}"/>
+              </a:ext>
+            </a:extLst>
+          </p:cNvPr>
+          <p:cNvPicPr>
+            <a:picLocks noGrp="1" noChangeAspect="1"/>
+          </p:cNvPicPr>
+          <p:nvPr>
+            <p:ph type="pic" sz="quarter" idx="11"/>
+          </p:nvPr>
+        </p:nvPicPr>
+        <p:blipFill>
+          <a:blip r:embed="rId2">
+            <a:extLst>
+              <a:ext uri="{28A0092B-C50C-407E-A947-70E740481C1C}">
+                <a14:useLocalDpi xmlns:a14="http://schemas.microsoft.com/office/drawing/2010/main" val="0"/>
+              </a:ext>
+            </a:extLst>
+          </a:blip>
+          <a:srcRect l="663" r="663"/>
+          <a:stretch>
+            <a:fillRect/>
+          </a:stretch>
+        </p:blipFill>
+        <p:spPr/>
+      </p:pic>
+      <p:sp>
+        <p:nvSpPr>
+          <p:cNvPr id="3" name="Content Placeholder 2">
+            <a:extLst>
+              <a:ext uri="{FF2B5EF4-FFF2-40B4-BE49-F238E27FC236}">
+                <a16:creationId xmlns:a16="http://schemas.microsoft.com/office/drawing/2014/main" id="{D163E54C-6A35-D85A-4410-85DEA1A85275}"/>
               </a:ext>
             </a:extLst>
           </p:cNvPr>
@@ -4061,56 +4079,74 @@
           <a:lstStyle/>
           <a:p>
             <a:r>
-              <a:rPr lang="en-US" dirty="0"/>
-              <a:t>If a service hosted in a cloud receives more requests than it can process within the required latency, the service becomes overloaded.</a:t>
-            </a:r>
-          </a:p>
-          <a:p>
-            <a:r>
-              <a:rPr lang="en-US" dirty="0"/>
-              <a:t>Sometimes, you can fix this problem by running the service on a different virtual machine that has more resources. This is called </a:t>
-            </a:r>
-            <a:r>
               <a:rPr lang="en-US" dirty="0">
                 <a:solidFill>
                   <a:schemeClr val="accent1"/>
                 </a:solidFill>
               </a:rPr>
-              <a:t>vertical scaling</a:t>
-            </a:r>
-            <a:r>
-              <a:rPr lang="en-US" dirty="0"/>
-              <a:t>.</a:t>
-            </a:r>
-          </a:p>
-          <a:p>
-            <a:r>
-              <a:rPr lang="en-US" dirty="0"/>
-              <a:t>There are limits to what can be achieved with vertical scaling. In particular, there may not be a large enough VM instance type to support the workload.</a:t>
-            </a:r>
-          </a:p>
-          <a:p>
-            <a:r>
-              <a:rPr lang="en-US" dirty="0">
-                <a:solidFill>
-                  <a:schemeClr val="accent1"/>
-                </a:solidFill>
-              </a:rPr>
-              <a:t>Horizontal scaling</a:t>
-            </a:r>
-            <a:r>
-              <a:rPr lang="en-US" dirty="0"/>
-              <a:t> involves having multiple copies of the same service and using a load balancer to distribute requests among them—equivalent to the maintain multiple copies of computations tactic and the load balancer pattern.</a:t>
-            </a:r>
-          </a:p>
-        </p:txBody>
-      </p:sp>
-      <p:sp>
-        <p:nvSpPr>
-          <p:cNvPr id="3" name="Title 2">
-            <a:extLst>
-              <a:ext uri="{FF2B5EF4-FFF2-40B4-BE49-F238E27FC236}">
-                <a16:creationId xmlns:a16="http://schemas.microsoft.com/office/drawing/2014/main" id="{3FF002B1-8C75-84E0-923B-F639313513BA}"/>
+              <a:t>Long-tail latency </a:t>
+            </a:r>
+            <a:r>
+              <a:rPr lang="en-US" dirty="0"/>
+              <a:t>refers to the impact of a small percentage of requests that take significantly longer to process than the majority of requests.</a:t>
+            </a:r>
+          </a:p>
+          <a:p>
+            <a:r>
+              <a:rPr lang="en-US" dirty="0"/>
+              <a:t>This figure shows a histogram of the latency of 1,000 “launch instance” requests to Amazon Web Services. </a:t>
+            </a:r>
+          </a:p>
+        </p:txBody>
+      </p:sp>
+      <p:sp>
+        <p:nvSpPr>
+          <p:cNvPr id="4" name="Content Placeholder 3">
+            <a:extLst>
+              <a:ext uri="{FF2B5EF4-FFF2-40B4-BE49-F238E27FC236}">
+                <a16:creationId xmlns:a16="http://schemas.microsoft.com/office/drawing/2014/main" id="{AAAF8368-E5EB-D9D6-B666-E24F86CDDAB3}"/>
+              </a:ext>
+            </a:extLst>
+          </p:cNvPr>
+          <p:cNvSpPr>
+            <a:spLocks noGrp="1"/>
+          </p:cNvSpPr>
+          <p:nvPr>
+            <p:ph sz="half" idx="12"/>
+          </p:nvPr>
+        </p:nvSpPr>
+        <p:spPr/>
+        <p:txBody>
+          <a:bodyPr/>
+          <a:lstStyle/>
+          <a:p>
+            <a:r>
+              <a:rPr lang="en-US" dirty="0"/>
+              <a:t>You must be careful which statistic you use. In this case, the histogram peaks at a latency of 22 seconds, the average latency over all the measurements is 28 seconds, and the median latency is 23 seconds.</a:t>
+            </a:r>
+          </a:p>
+          <a:p>
+            <a:pPr lvl="1"/>
+            <a:r>
+              <a:rPr lang="en-US" dirty="0"/>
+              <a:t>Although the mean latency for each service-to-service request to a cloud-based service may be within tolerable limits, a reasonable number of these requests can have much greater latency.</a:t>
+            </a:r>
+          </a:p>
+          <a:p>
+            <a:pPr lvl="1"/>
+            <a:r>
+              <a:rPr lang="en-US" dirty="0"/>
+              <a:t>Notice how right side of the histogram looks like a long tail on the ground.</a:t>
+            </a:r>
+          </a:p>
+        </p:txBody>
+      </p:sp>
+      <p:sp>
+        <p:nvSpPr>
+          <p:cNvPr id="5" name="Title 4">
+            <a:extLst>
+              <a:ext uri="{FF2B5EF4-FFF2-40B4-BE49-F238E27FC236}">
+                <a16:creationId xmlns:a16="http://schemas.microsoft.com/office/drawing/2014/main" id="{6E44E832-10D6-DA1F-377B-09B7684AA281}"/>
               </a:ext>
             </a:extLst>
           </p:cNvPr>
@@ -4123,32 +4159,30 @@
         </p:nvSpPr>
         <p:spPr/>
         <p:txBody>
-          <a:bodyPr>
-            <a:noAutofit/>
-          </a:bodyPr>
+          <a:bodyPr/>
           <a:lstStyle/>
           <a:p>
             <a:r>
-              <a:rPr lang="en-US" sz="3200" dirty="0"/>
-              <a:t>Multiple Instances for Performance and Availability</a:t>
-            </a:r>
-          </a:p>
-        </p:txBody>
-      </p:sp>
-      <p:sp>
-        <p:nvSpPr>
-          <p:cNvPr id="4" name="Slide Number Placeholder 3">
-            <a:extLst>
-              <a:ext uri="{FF2B5EF4-FFF2-40B4-BE49-F238E27FC236}">
-                <a16:creationId xmlns:a16="http://schemas.microsoft.com/office/drawing/2014/main" id="{535C1357-5EDE-7790-CCDF-203B74BB53BB}"/>
-              </a:ext>
-            </a:extLst>
-          </p:cNvPr>
-          <p:cNvSpPr>
-            <a:spLocks noGrp="1"/>
-          </p:cNvSpPr>
-          <p:nvPr>
-            <p:ph type="sldNum" sz="quarter" idx="10"/>
+              <a:rPr lang="en-US" dirty="0"/>
+              <a:t>Long Tail Latency</a:t>
+            </a:r>
+          </a:p>
+        </p:txBody>
+      </p:sp>
+      <p:sp>
+        <p:nvSpPr>
+          <p:cNvPr id="6" name="Slide Number Placeholder 5">
+            <a:extLst>
+              <a:ext uri="{FF2B5EF4-FFF2-40B4-BE49-F238E27FC236}">
+                <a16:creationId xmlns:a16="http://schemas.microsoft.com/office/drawing/2014/main" id="{6762A936-F40E-CFD3-EB01-7C0351991945}"/>
+              </a:ext>
+            </a:extLst>
+          </p:cNvPr>
+          <p:cNvSpPr>
+            <a:spLocks noGrp="1"/>
+          </p:cNvSpPr>
+          <p:nvPr>
+            <p:ph type="sldNum" sz="quarter" idx="13"/>
           </p:nvPr>
         </p:nvSpPr>
         <p:spPr/>
@@ -4168,7 +4202,7 @@
     </p:spTree>
     <p:extLst>
       <p:ext uri="{BB962C8B-B14F-4D97-AF65-F5344CB8AC3E}">
-        <p14:creationId xmlns:p14="http://schemas.microsoft.com/office/powerpoint/2010/main" val="2368022643"/>
+        <p14:creationId xmlns:p14="http://schemas.microsoft.com/office/powerpoint/2010/main" val="3507271902"/>
       </p:ext>
     </p:extLst>
   </p:cSld>
@@ -4195,43 +4229,12 @@
           <a:chExt cx="0" cy="0"/>
         </a:xfrm>
       </p:grpSpPr>
-      <p:pic>
-        <p:nvPicPr>
-          <p:cNvPr id="8" name="Picture Placeholder 7">
-            <a:extLst>
-              <a:ext uri="{FF2B5EF4-FFF2-40B4-BE49-F238E27FC236}">
-                <a16:creationId xmlns:a16="http://schemas.microsoft.com/office/drawing/2014/main" id="{724870F5-897E-9915-8588-1D62A52AEEBB}"/>
-              </a:ext>
-            </a:extLst>
-          </p:cNvPr>
-          <p:cNvPicPr>
-            <a:picLocks noGrp="1" noChangeAspect="1"/>
-          </p:cNvPicPr>
-          <p:nvPr>
-            <p:ph type="pic" sz="quarter" idx="11"/>
-          </p:nvPr>
-        </p:nvPicPr>
-        <p:blipFill>
-          <a:blip r:embed="rId2">
-            <a:extLst>
-              <a:ext uri="{28A0092B-C50C-407E-A947-70E740481C1C}">
-                <a14:useLocalDpi xmlns:a14="http://schemas.microsoft.com/office/drawing/2010/main" val="0"/>
-              </a:ext>
-            </a:extLst>
-          </a:blip>
-          <a:srcRect l="536" r="536"/>
-          <a:stretch>
-            <a:fillRect/>
-          </a:stretch>
-        </p:blipFill>
-        <p:spPr/>
-      </p:pic>
-      <p:sp>
-        <p:nvSpPr>
-          <p:cNvPr id="3" name="Content Placeholder 2">
-            <a:extLst>
-              <a:ext uri="{FF2B5EF4-FFF2-40B4-BE49-F238E27FC236}">
-                <a16:creationId xmlns:a16="http://schemas.microsoft.com/office/drawing/2014/main" id="{5D89FAB1-63EB-FFEB-94C4-A72CCB440963}"/>
+      <p:sp>
+        <p:nvSpPr>
+          <p:cNvPr id="2" name="Content Placeholder 1">
+            <a:extLst>
+              <a:ext uri="{FF2B5EF4-FFF2-40B4-BE49-F238E27FC236}">
+                <a16:creationId xmlns:a16="http://schemas.microsoft.com/office/drawing/2014/main" id="{4B7584A5-2EAE-4DDD-A22B-3B929133188E}"/>
               </a:ext>
             </a:extLst>
           </p:cNvPr>
@@ -4249,14 +4252,13 @@
           <a:p>
             <a:r>
               <a:rPr lang="en-US" dirty="0"/>
-              <a:t>Suppose the load balancer sends the first request to instance 1, the second request to instance 2, the third request back to instance 1, and so forth.</a:t>
-            </a:r>
-          </a:p>
-          <a:p>
-            <a:pPr lvl="1"/>
-            <a:r>
-              <a:rPr lang="en-US" dirty="0"/>
-              <a:t>The algorithm we provided is called </a:t>
+              <a:t>If a service hosted in a cloud receives more requests than it can process within the required latency, the service becomes overloaded.</a:t>
+            </a:r>
+          </a:p>
+          <a:p>
+            <a:r>
+              <a:rPr lang="en-US" dirty="0"/>
+              <a:t>Sometimes, you can fix this problem by running the service on a different virtual machine that has more resources. This is called </a:t>
             </a:r>
             <a:r>
               <a:rPr lang="en-US" dirty="0">
@@ -4264,7 +4266,7 @@
                   <a:schemeClr val="accent1"/>
                 </a:solidFill>
               </a:rPr>
-              <a:t>round-robin</a:t>
+              <a:t>vertical scaling</a:t>
             </a:r>
             <a:r>
               <a:rPr lang="en-US" dirty="0"/>
@@ -4272,126 +4274,71 @@
             </a:r>
           </a:p>
           <a:p>
-            <a:pPr lvl="1"/>
+            <a:r>
+              <a:rPr lang="en-US" dirty="0"/>
+              <a:t>There are limits to what can be achieved with vertical scaling. In particular, there may not be a large enough VM instance type to support the workload.</a:t>
+            </a:r>
+          </a:p>
+          <a:p>
             <a:r>
               <a:rPr lang="en-US" dirty="0">
                 <a:solidFill>
-                  <a:schemeClr val="tx1"/>
+                  <a:schemeClr val="accent1"/>
                 </a:solidFill>
               </a:rPr>
-              <a:t>round-robin</a:t>
-            </a:r>
-            <a:r>
-              <a:rPr lang="en-US" dirty="0">
-                <a:solidFill>
-                  <a:schemeClr val="accent1"/>
-                </a:solidFill>
-              </a:rPr>
-              <a:t> </a:t>
-            </a:r>
-            <a:r>
-              <a:rPr lang="en-US" dirty="0"/>
-              <a:t>balances the load uniformly if every request consumes roughly the same resources.</a:t>
-            </a:r>
-          </a:p>
-        </p:txBody>
-      </p:sp>
-      <p:sp>
-        <p:nvSpPr>
-          <p:cNvPr id="4" name="Content Placeholder 3">
-            <a:extLst>
-              <a:ext uri="{FF2B5EF4-FFF2-40B4-BE49-F238E27FC236}">
-                <a16:creationId xmlns:a16="http://schemas.microsoft.com/office/drawing/2014/main" id="{F56C0A6D-DBB7-F434-73A9-B3FBA4AF365B}"/>
-              </a:ext>
-            </a:extLst>
-          </p:cNvPr>
-          <p:cNvSpPr>
-            <a:spLocks noGrp="1"/>
-          </p:cNvSpPr>
-          <p:nvPr>
-            <p:ph sz="half" idx="12"/>
+              <a:t>Horizontal scaling</a:t>
+            </a:r>
+            <a:r>
+              <a:rPr lang="en-US" dirty="0"/>
+              <a:t> involves having multiple copies of the same service and using a load balancer to distribute requests among them—equivalent to the maintain multiple copies of computations tactic and the load balancer pattern.</a:t>
+            </a:r>
+          </a:p>
+        </p:txBody>
+      </p:sp>
+      <p:sp>
+        <p:nvSpPr>
+          <p:cNvPr id="3" name="Title 2">
+            <a:extLst>
+              <a:ext uri="{FF2B5EF4-FFF2-40B4-BE49-F238E27FC236}">
+                <a16:creationId xmlns:a16="http://schemas.microsoft.com/office/drawing/2014/main" id="{3FF002B1-8C75-84E0-923B-F639313513BA}"/>
+              </a:ext>
+            </a:extLst>
+          </p:cNvPr>
+          <p:cNvSpPr>
+            <a:spLocks noGrp="1"/>
+          </p:cNvSpPr>
+          <p:nvPr>
+            <p:ph type="title"/>
           </p:nvPr>
         </p:nvSpPr>
         <p:spPr/>
         <p:txBody>
-          <a:bodyPr/>
+          <a:bodyPr>
+            <a:noAutofit/>
+          </a:bodyPr>
           <a:lstStyle/>
           <a:p>
-            <a:pPr lvl="1"/>
-            <a:r>
-              <a:rPr lang="en-US" dirty="0"/>
-              <a:t>From a client’s perspective, the service’s IP address is actually the address of the load balancer.</a:t>
-            </a:r>
-          </a:p>
-          <a:p>
-            <a:pPr lvl="1"/>
-            <a:r>
-              <a:rPr lang="en-US" dirty="0"/>
-              <a:t>Load balancers may get overloaded. In this case, the solution is to balance the load of the load balancer, sometimes referred to as </a:t>
-            </a:r>
-            <a:r>
-              <a:rPr lang="en-US" dirty="0">
-                <a:solidFill>
-                  <a:schemeClr val="accent1"/>
-                </a:solidFill>
-              </a:rPr>
-              <a:t>global load balancing</a:t>
-            </a:r>
-            <a:r>
-              <a:rPr lang="en-US" dirty="0"/>
-              <a:t>. That is, a message goes through a hierarchy of load balancers before arriving at the service instance.</a:t>
-            </a:r>
-          </a:p>
-          <a:p>
-            <a:r>
-              <a:rPr lang="en-US" dirty="0"/>
-              <a:t>Load balancers increase the amount of work that can be handled. We'll see how load balancers also serve to increase the availability of services.</a:t>
-            </a:r>
-          </a:p>
-        </p:txBody>
-      </p:sp>
-      <p:sp>
-        <p:nvSpPr>
-          <p:cNvPr id="5" name="Title 4">
-            <a:extLst>
-              <a:ext uri="{FF2B5EF4-FFF2-40B4-BE49-F238E27FC236}">
-                <a16:creationId xmlns:a16="http://schemas.microsoft.com/office/drawing/2014/main" id="{880C7085-0CFE-0FA4-1531-85760CE5A07B}"/>
-              </a:ext>
-            </a:extLst>
-          </p:cNvPr>
-          <p:cNvSpPr>
-            <a:spLocks noGrp="1"/>
-          </p:cNvSpPr>
-          <p:nvPr>
-            <p:ph type="title"/>
-          </p:nvPr>
-        </p:nvSpPr>
-        <p:spPr/>
-        <p:txBody>
-          <a:bodyPr/>
-          <a:lstStyle/>
-          <a:p>
-            <a:r>
-              <a:rPr lang="en-US" dirty="0"/>
-              <a:t>Load Balancers</a:t>
-            </a:r>
-          </a:p>
-        </p:txBody>
-      </p:sp>
-      <p:sp>
-        <p:nvSpPr>
-          <p:cNvPr id="6" name="Slide Number Placeholder 5">
-            <a:extLst>
-              <a:ext uri="{FF2B5EF4-FFF2-40B4-BE49-F238E27FC236}">
-                <a16:creationId xmlns:a16="http://schemas.microsoft.com/office/drawing/2014/main" id="{6BC41EE5-BF20-5664-564F-590A9CA53507}"/>
-              </a:ext>
-            </a:extLst>
-          </p:cNvPr>
-          <p:cNvSpPr>
-            <a:spLocks noGrp="1"/>
-          </p:cNvSpPr>
-          <p:nvPr>
-            <p:ph type="sldNum" sz="quarter" idx="13"/>
+            <a:r>
+              <a:rPr lang="en-US" sz="3200" dirty="0"/>
+              <a:t>Multiple Instances for Performance and Availability</a:t>
+            </a:r>
+          </a:p>
+        </p:txBody>
+      </p:sp>
+      <p:sp>
+        <p:nvSpPr>
+          <p:cNvPr id="4" name="Slide Number Placeholder 3">
+            <a:extLst>
+              <a:ext uri="{FF2B5EF4-FFF2-40B4-BE49-F238E27FC236}">
+                <a16:creationId xmlns:a16="http://schemas.microsoft.com/office/drawing/2014/main" id="{535C1357-5EDE-7790-CCDF-203B74BB53BB}"/>
+              </a:ext>
+            </a:extLst>
+          </p:cNvPr>
+          <p:cNvSpPr>
+            <a:spLocks noGrp="1"/>
+          </p:cNvSpPr>
+          <p:nvPr>
+            <p:ph type="sldNum" sz="quarter" idx="10"/>
           </p:nvPr>
         </p:nvSpPr>
         <p:spPr/>
@@ -4411,7 +4358,7 @@
     </p:spTree>
     <p:extLst>
       <p:ext uri="{BB962C8B-B14F-4D97-AF65-F5344CB8AC3E}">
-        <p14:creationId xmlns:p14="http://schemas.microsoft.com/office/powerpoint/2010/main" val="2571040086"/>
+        <p14:creationId xmlns:p14="http://schemas.microsoft.com/office/powerpoint/2010/main" val="2368022643"/>
       </p:ext>
     </p:extLst>
   </p:cSld>
@@ -4438,12 +4385,43 @@
           <a:chExt cx="0" cy="0"/>
         </a:xfrm>
       </p:grpSpPr>
-      <p:sp>
-        <p:nvSpPr>
-          <p:cNvPr id="2" name="Content Placeholder 1">
-            <a:extLst>
-              <a:ext uri="{FF2B5EF4-FFF2-40B4-BE49-F238E27FC236}">
-                <a16:creationId xmlns:a16="http://schemas.microsoft.com/office/drawing/2014/main" id="{D24B453F-8A55-9D54-DCDF-0DEFDE240B07}"/>
+      <p:pic>
+        <p:nvPicPr>
+          <p:cNvPr id="8" name="Picture Placeholder 7">
+            <a:extLst>
+              <a:ext uri="{FF2B5EF4-FFF2-40B4-BE49-F238E27FC236}">
+                <a16:creationId xmlns:a16="http://schemas.microsoft.com/office/drawing/2014/main" id="{724870F5-897E-9915-8588-1D62A52AEEBB}"/>
+              </a:ext>
+            </a:extLst>
+          </p:cNvPr>
+          <p:cNvPicPr>
+            <a:picLocks noGrp="1" noChangeAspect="1"/>
+          </p:cNvPicPr>
+          <p:nvPr>
+            <p:ph type="pic" sz="quarter" idx="11"/>
+          </p:nvPr>
+        </p:nvPicPr>
+        <p:blipFill>
+          <a:blip r:embed="rId2">
+            <a:extLst>
+              <a:ext uri="{28A0092B-C50C-407E-A947-70E740481C1C}">
+                <a14:useLocalDpi xmlns:a14="http://schemas.microsoft.com/office/drawing/2010/main" val="0"/>
+              </a:ext>
+            </a:extLst>
+          </a:blip>
+          <a:srcRect l="536" r="536"/>
+          <a:stretch>
+            <a:fillRect/>
+          </a:stretch>
+        </p:blipFill>
+        <p:spPr/>
+      </p:pic>
+      <p:sp>
+        <p:nvSpPr>
+          <p:cNvPr id="3" name="Content Placeholder 2">
+            <a:extLst>
+              <a:ext uri="{FF2B5EF4-FFF2-40B4-BE49-F238E27FC236}">
+                <a16:creationId xmlns:a16="http://schemas.microsoft.com/office/drawing/2014/main" id="{5D89FAB1-63EB-FFEB-94C4-A72CCB440963}"/>
               </a:ext>
             </a:extLst>
           </p:cNvPr>
@@ -4461,120 +4439,67 @@
           <a:p>
             <a:r>
               <a:rPr lang="en-US" dirty="0"/>
-              <a:t>While requests go </a:t>
-            </a:r>
-            <a:r>
-              <a:rPr lang="en-US" i="1" dirty="0"/>
-              <a:t>through</a:t>
-            </a:r>
-            <a:r>
-              <a:rPr lang="en-US" dirty="0"/>
-              <a:t> the load balancer, responses go </a:t>
-            </a:r>
-            <a:r>
-              <a:rPr lang="en-US" i="1" dirty="0"/>
-              <a:t>directly</a:t>
-            </a:r>
-            <a:r>
-              <a:rPr lang="en-US" dirty="0"/>
-              <a:t> back to the clients.</a:t>
+              <a:t>Suppose the load balancer sends the first request to instance 1, the second request to instance 2, the third request back to instance 1, and so forth.</a:t>
             </a:r>
           </a:p>
           <a:p>
             <a:pPr lvl="1"/>
             <a:r>
               <a:rPr lang="en-US" dirty="0"/>
-              <a:t>As a consequence, the load balancer has no information about whether a message was processed by a service instance, or how long it took to process a message.</a:t>
+              <a:t>The algorithm we provided is called </a:t>
+            </a:r>
+            <a:r>
+              <a:rPr lang="en-US" dirty="0">
+                <a:solidFill>
+                  <a:schemeClr val="accent1"/>
+                </a:solidFill>
+              </a:rPr>
+              <a:t>round-robin</a:t>
+            </a:r>
+            <a:r>
+              <a:rPr lang="en-US" dirty="0"/>
+              <a:t>.</a:t>
             </a:r>
           </a:p>
           <a:p>
             <a:pPr lvl="1"/>
             <a:r>
-              <a:rPr lang="en-US" dirty="0"/>
-              <a:t>Hence the load balancer would not know whether any service instance was alive or if it had failed.</a:t>
-            </a:r>
-          </a:p>
-          <a:p>
-            <a:r>
               <a:rPr lang="en-US" dirty="0">
                 <a:solidFill>
+                  <a:schemeClr val="tx1"/>
+                </a:solidFill>
+              </a:rPr>
+              <a:t>round-robin</a:t>
+            </a:r>
+            <a:r>
+              <a:rPr lang="en-US" dirty="0">
+                <a:solidFill>
                   <a:schemeClr val="accent1"/>
                 </a:solidFill>
               </a:rPr>
-              <a:t>Health checks </a:t>
-            </a:r>
-            <a:r>
-              <a:rPr lang="en-US" dirty="0"/>
-              <a:t>are a mechanism that allow the load balancer to determine whether an instance is performing properly.</a:t>
-            </a:r>
-          </a:p>
-          <a:p>
-            <a:pPr lvl="1"/>
-            <a:r>
-              <a:rPr lang="en-US" dirty="0"/>
-              <a:t>The load balancer will periodically check the health of the instances assigned to it.</a:t>
-            </a:r>
-          </a:p>
-          <a:p>
-            <a:pPr lvl="1"/>
-            <a:r>
-              <a:rPr lang="en-US" dirty="0"/>
-              <a:t>If an instance fails to respond to a health check, it is marked as unhealthy and no further messages are sent to it.</a:t>
-            </a:r>
-          </a:p>
-          <a:p>
-            <a:pPr lvl="1"/>
-            <a:r>
-              <a:rPr lang="en-US" dirty="0"/>
-              <a:t>Health checks can consist of </a:t>
-            </a:r>
-            <a:r>
-              <a:rPr lang="en-US" i="1" dirty="0">
-                <a:solidFill>
-                  <a:schemeClr val="tx1"/>
-                </a:solidFill>
-              </a:rPr>
-              <a:t>pings</a:t>
-            </a:r>
-            <a:r>
-              <a:rPr lang="en-US" dirty="0"/>
-              <a:t> from the load balancer to the instance, opening a </a:t>
-            </a:r>
-            <a:r>
-              <a:rPr lang="en-US" i="1" dirty="0">
-                <a:solidFill>
-                  <a:schemeClr val="tx1"/>
-                </a:solidFill>
-              </a:rPr>
-              <a:t>TCP</a:t>
-            </a:r>
-            <a:r>
-              <a:rPr lang="en-US" dirty="0"/>
-              <a:t> connection to the instance or even sending a message for processing.</a:t>
-            </a:r>
-          </a:p>
-          <a:p>
-            <a:r>
-              <a:rPr lang="en-US" dirty="0"/>
-              <a:t>A load balancer with health checking improves availability by hiding the failure of a service instance from clients.</a:t>
-            </a:r>
-          </a:p>
-        </p:txBody>
-      </p:sp>
-      <p:sp>
-        <p:nvSpPr>
-          <p:cNvPr id="3" name="Title 2">
-            <a:extLst>
-              <a:ext uri="{FF2B5EF4-FFF2-40B4-BE49-F238E27FC236}">
-                <a16:creationId xmlns:a16="http://schemas.microsoft.com/office/drawing/2014/main" id="{E5DB2526-D329-E7EF-1C6A-7A7CECA98CA7}"/>
-              </a:ext>
-            </a:extLst>
-          </p:cNvPr>
-          <p:cNvSpPr>
-            <a:spLocks noGrp="1"/>
-          </p:cNvSpPr>
-          <p:nvPr>
-            <p:ph type="title"/>
+              <a:t> </a:t>
+            </a:r>
+            <a:r>
+              <a:rPr lang="en-US" dirty="0"/>
+              <a:t>balances the load uniformly if every request consumes roughly the same resources.</a:t>
+            </a:r>
+          </a:p>
+        </p:txBody>
+      </p:sp>
+      <p:sp>
+        <p:nvSpPr>
+          <p:cNvPr id="4" name="Content Placeholder 3">
+            <a:extLst>
+              <a:ext uri="{FF2B5EF4-FFF2-40B4-BE49-F238E27FC236}">
+                <a16:creationId xmlns:a16="http://schemas.microsoft.com/office/drawing/2014/main" id="{F56C0A6D-DBB7-F434-73A9-B3FBA4AF365B}"/>
+              </a:ext>
+            </a:extLst>
+          </p:cNvPr>
+          <p:cNvSpPr>
+            <a:spLocks noGrp="1"/>
+          </p:cNvSpPr>
+          <p:nvPr>
+            <p:ph sz="half" idx="12"/>
           </p:nvPr>
         </p:nvSpPr>
         <p:spPr/>
@@ -4582,6 +4507,60 @@
           <a:bodyPr/>
           <a:lstStyle/>
           <a:p>
+            <a:pPr lvl="1"/>
+            <a:r>
+              <a:rPr lang="en-US" dirty="0"/>
+              <a:t>From a client’s perspective, the service’s IP address is actually the address of the load balancer.</a:t>
+            </a:r>
+          </a:p>
+          <a:p>
+            <a:pPr lvl="1"/>
+            <a:r>
+              <a:rPr lang="en-US" dirty="0"/>
+              <a:t>Load balancers may get overloaded. In this case, the solution is to balance the load of the load balancer, sometimes referred to as </a:t>
+            </a:r>
+            <a:r>
+              <a:rPr lang="en-US" dirty="0">
+                <a:solidFill>
+                  <a:schemeClr val="accent1"/>
+                </a:solidFill>
+              </a:rPr>
+              <a:t>global load balancing</a:t>
+            </a:r>
+            <a:r>
+              <a:rPr lang="en-US" dirty="0"/>
+              <a:t>. That is, a message goes through a hierarchy of load balancers before arriving at the service instance.</a:t>
+            </a:r>
+          </a:p>
+          <a:p>
+            <a:r>
+              <a:rPr lang="en-US" dirty="0"/>
+              <a:t>Load balancers increase the amount of work that can be handled. We'll see how load balancers also serve to increase the availability of services.</a:t>
+            </a:r>
+          </a:p>
+        </p:txBody>
+      </p:sp>
+      <p:sp>
+        <p:nvSpPr>
+          <p:cNvPr id="5" name="Title 4">
+            <a:extLst>
+              <a:ext uri="{FF2B5EF4-FFF2-40B4-BE49-F238E27FC236}">
+                <a16:creationId xmlns:a16="http://schemas.microsoft.com/office/drawing/2014/main" id="{880C7085-0CFE-0FA4-1531-85760CE5A07B}"/>
+              </a:ext>
+            </a:extLst>
+          </p:cNvPr>
+          <p:cNvSpPr>
+            <a:spLocks noGrp="1"/>
+          </p:cNvSpPr>
+          <p:nvPr>
+            <p:ph type="title"/>
+          </p:nvPr>
+        </p:nvSpPr>
+        <p:spPr/>
+        <p:txBody>
+          <a:bodyPr/>
+          <a:lstStyle/>
+          <a:p>
             <a:r>
               <a:rPr lang="en-US" dirty="0"/>
               <a:t>Load Balancers</a:t>
@@ -4591,18 +4570,18 @@
       </p:sp>
       <p:sp>
         <p:nvSpPr>
-          <p:cNvPr id="4" name="Slide Number Placeholder 3">
-            <a:extLst>
-              <a:ext uri="{FF2B5EF4-FFF2-40B4-BE49-F238E27FC236}">
-                <a16:creationId xmlns:a16="http://schemas.microsoft.com/office/drawing/2014/main" id="{53A7559B-8452-76EB-9371-DB186974718C}"/>
-              </a:ext>
-            </a:extLst>
-          </p:cNvPr>
-          <p:cNvSpPr>
-            <a:spLocks noGrp="1"/>
-          </p:cNvSpPr>
-          <p:nvPr>
-            <p:ph type="sldNum" sz="quarter" idx="10"/>
+          <p:cNvPr id="6" name="Slide Number Placeholder 5">
+            <a:extLst>
+              <a:ext uri="{FF2B5EF4-FFF2-40B4-BE49-F238E27FC236}">
+                <a16:creationId xmlns:a16="http://schemas.microsoft.com/office/drawing/2014/main" id="{6BC41EE5-BF20-5664-564F-590A9CA53507}"/>
+              </a:ext>
+            </a:extLst>
+          </p:cNvPr>
+          <p:cNvSpPr>
+            <a:spLocks noGrp="1"/>
+          </p:cNvSpPr>
+          <p:nvPr>
+            <p:ph type="sldNum" sz="quarter" idx="13"/>
           </p:nvPr>
         </p:nvSpPr>
         <p:spPr/>
@@ -4622,7 +4601,7 @@
     </p:spTree>
     <p:extLst>
       <p:ext uri="{BB962C8B-B14F-4D97-AF65-F5344CB8AC3E}">
-        <p14:creationId xmlns:p14="http://schemas.microsoft.com/office/powerpoint/2010/main" val="1641035556"/>
+        <p14:creationId xmlns:p14="http://schemas.microsoft.com/office/powerpoint/2010/main" val="2571040086"/>
       </p:ext>
     </p:extLst>
   </p:cSld>
@@ -4654,7 +4633,7 @@
           <p:cNvPr id="2" name="Content Placeholder 1">
             <a:extLst>
               <a:ext uri="{FF2B5EF4-FFF2-40B4-BE49-F238E27FC236}">
-                <a16:creationId xmlns:a16="http://schemas.microsoft.com/office/drawing/2014/main" id="{2F139890-0649-79B5-043E-4232FDE65EF1}"/>
+                <a16:creationId xmlns:a16="http://schemas.microsoft.com/office/drawing/2014/main" id="{D24B453F-8A55-9D54-DCDF-0DEFDE240B07}"/>
               </a:ext>
             </a:extLst>
           </p:cNvPr>
@@ -4672,84 +4651,102 @@
           <a:p>
             <a:r>
               <a:rPr lang="en-US" dirty="0"/>
-              <a:t>In a traditional data center, organizations must buy enough hardware for the peak workload, which leads to wasted capacity when usage is low. In contrast, cloud computing allows you to dynamically adjust resources based on your needs—this is the concept of </a:t>
-            </a:r>
+              <a:t>While requests go </a:t>
+            </a:r>
+            <a:r>
+              <a:rPr lang="en-US" i="1" dirty="0"/>
+              <a:t>through</a:t>
+            </a:r>
+            <a:r>
+              <a:rPr lang="en-US" dirty="0"/>
+              <a:t> the load balancer, responses go </a:t>
+            </a:r>
+            <a:r>
+              <a:rPr lang="en-US" i="1" dirty="0"/>
+              <a:t>directly</a:t>
+            </a:r>
+            <a:r>
+              <a:rPr lang="en-US" dirty="0"/>
+              <a:t> back to the clients.</a:t>
+            </a:r>
+          </a:p>
+          <a:p>
+            <a:pPr lvl="1"/>
+            <a:r>
+              <a:rPr lang="en-US" dirty="0"/>
+              <a:t>As a consequence, the load balancer has no information about whether a message was processed by a service instance, or how long it took to process a message.</a:t>
+            </a:r>
+          </a:p>
+          <a:p>
+            <a:pPr lvl="1"/>
+            <a:r>
+              <a:rPr lang="en-US" dirty="0"/>
+              <a:t>Hence the load balancer would not know whether any service instance was alive or if it had failed.</a:t>
+            </a:r>
+          </a:p>
+          <a:p>
             <a:r>
               <a:rPr lang="en-US" dirty="0">
                 <a:solidFill>
                   <a:schemeClr val="accent1"/>
                 </a:solidFill>
               </a:rPr>
-              <a:t>elasticity</a:t>
-            </a:r>
-            <a:r>
-              <a:rPr lang="en-US" b="1" dirty="0"/>
-              <a:t>.</a:t>
-            </a:r>
-          </a:p>
-          <a:p>
-            <a:r>
-              <a:rPr lang="en-US" dirty="0">
-                <a:solidFill>
-                  <a:schemeClr val="accent1"/>
+              <a:t>Health checks </a:t>
+            </a:r>
+            <a:r>
+              <a:rPr lang="en-US" dirty="0"/>
+              <a:t>are a mechanism that allow the load balancer to determine whether an instance is performing properly.</a:t>
+            </a:r>
+          </a:p>
+          <a:p>
+            <a:pPr lvl="1"/>
+            <a:r>
+              <a:rPr lang="en-US" dirty="0"/>
+              <a:t>The load balancer will periodically check the health of the instances assigned to it.</a:t>
+            </a:r>
+          </a:p>
+          <a:p>
+            <a:pPr lvl="1"/>
+            <a:r>
+              <a:rPr lang="en-US" dirty="0"/>
+              <a:t>If an instance fails to respond to a health check, it is marked as unhealthy and no further messages are sent to it.</a:t>
+            </a:r>
+          </a:p>
+          <a:p>
+            <a:pPr lvl="1"/>
+            <a:r>
+              <a:rPr lang="en-US" dirty="0"/>
+              <a:t>Health checks can consist of </a:t>
+            </a:r>
+            <a:r>
+              <a:rPr lang="en-US" i="1" dirty="0">
+                <a:solidFill>
+                  <a:schemeClr val="tx1"/>
                 </a:solidFill>
               </a:rPr>
-              <a:t>Autoscaling</a:t>
-            </a:r>
-            <a:r>
-              <a:rPr lang="en-US" dirty="0"/>
-              <a:t> is an infrastructure service that </a:t>
-            </a:r>
-            <a:r>
-              <a:rPr lang="en-US" i="1" dirty="0"/>
-              <a:t>automatically adds or removes VM or container instances</a:t>
-            </a:r>
-            <a:r>
-              <a:rPr lang="en-US" dirty="0"/>
-              <a:t> based on current demand. </a:t>
-            </a:r>
-          </a:p>
-          <a:p>
-            <a:pPr lvl="1"/>
-            <a:r>
-              <a:rPr lang="en-US" dirty="0"/>
-              <a:t>It usually works with load balancers to manage traffic to these instances. </a:t>
-            </a:r>
-          </a:p>
-          <a:p>
-            <a:pPr lvl="1"/>
-            <a:r>
-              <a:rPr lang="en-US" dirty="0"/>
-              <a:t>Autoscaling containers is slightly different from autoscaling VMs.</a:t>
-            </a:r>
-          </a:p>
-          <a:p>
-            <a:r>
-              <a:rPr lang="en-US" dirty="0"/>
-              <a:t>Autoscaling containers is slightly different from autoscaling VMs.</a:t>
-            </a:r>
-          </a:p>
-          <a:p>
-            <a:r>
-              <a:rPr lang="en-US" dirty="0">
-                <a:solidFill>
-                  <a:schemeClr val="accent4">
-                    <a:lumMod val="50000"/>
-                  </a:schemeClr>
+              <a:t>pings</a:t>
+            </a:r>
+            <a:r>
+              <a:rPr lang="en-US" dirty="0"/>
+              <a:t> from the load balancer to the instance, opening a </a:t>
+            </a:r>
+            <a:r>
+              <a:rPr lang="en-US" i="1" dirty="0">
+                <a:solidFill>
+                  <a:schemeClr val="tx1"/>
                 </a:solidFill>
               </a:rPr>
-              <a:t>Autoscaling VMs:</a:t>
-            </a:r>
-          </a:p>
-          <a:p>
-            <a:pPr lvl="1"/>
-            <a:r>
-              <a:rPr lang="en-US" dirty="0"/>
-              <a:t>When the existing service instances can’t handle all the incoming client requests, autoscaling creates another instance using the same VM image and registers it with the load balancer</a:t>
-            </a:r>
-            <a:r>
-              <a:rPr lang="en-US" b="1" i="1" dirty="0"/>
-              <a:t>.</a:t>
+              <a:t>TCP</a:t>
+            </a:r>
+            <a:r>
+              <a:rPr lang="en-US" dirty="0"/>
+              <a:t> connection to the instance or even sending a message for processing.</a:t>
+            </a:r>
+          </a:p>
+          <a:p>
+            <a:r>
+              <a:rPr lang="en-US" dirty="0"/>
+              <a:t>A load balancer with health checking improves availability by hiding the failure of a service instance from clients.</a:t>
             </a:r>
           </a:p>
         </p:txBody>
@@ -4759,7 +4756,7 @@
           <p:cNvPr id="3" name="Title 2">
             <a:extLst>
               <a:ext uri="{FF2B5EF4-FFF2-40B4-BE49-F238E27FC236}">
-                <a16:creationId xmlns:a16="http://schemas.microsoft.com/office/drawing/2014/main" id="{A8797769-4FA8-0C80-3383-A929A701892F}"/>
+                <a16:creationId xmlns:a16="http://schemas.microsoft.com/office/drawing/2014/main" id="{E5DB2526-D329-E7EF-1C6A-7A7CECA98CA7}"/>
               </a:ext>
             </a:extLst>
           </p:cNvPr>
@@ -4777,7 +4774,7 @@
           <a:p>
             <a:r>
               <a:rPr lang="en-US" dirty="0"/>
-              <a:t>Autoscaling</a:t>
+              <a:t>Load Balancers</a:t>
             </a:r>
           </a:p>
         </p:txBody>
@@ -4787,7 +4784,7 @@
           <p:cNvPr id="4" name="Slide Number Placeholder 3">
             <a:extLst>
               <a:ext uri="{FF2B5EF4-FFF2-40B4-BE49-F238E27FC236}">
-                <a16:creationId xmlns:a16="http://schemas.microsoft.com/office/drawing/2014/main" id="{05FBCF61-4AB8-E32F-CD3F-1DDA9110D882}"/>
+                <a16:creationId xmlns:a16="http://schemas.microsoft.com/office/drawing/2014/main" id="{53A7559B-8452-76EB-9371-DB186974718C}"/>
               </a:ext>
             </a:extLst>
           </p:cNvPr>
@@ -4815,7 +4812,7 @@
     </p:spTree>
     <p:extLst>
       <p:ext uri="{BB962C8B-B14F-4D97-AF65-F5344CB8AC3E}">
-        <p14:creationId xmlns:p14="http://schemas.microsoft.com/office/powerpoint/2010/main" val="4139797072"/>
+        <p14:creationId xmlns:p14="http://schemas.microsoft.com/office/powerpoint/2010/main" val="1641035556"/>
       </p:ext>
     </p:extLst>
   </p:cSld>
@@ -4847,7 +4844,7 @@
           <p:cNvPr id="2" name="Content Placeholder 1">
             <a:extLst>
               <a:ext uri="{FF2B5EF4-FFF2-40B4-BE49-F238E27FC236}">
-                <a16:creationId xmlns:a16="http://schemas.microsoft.com/office/drawing/2014/main" id="{1CCBEDC6-5BB1-BDF5-A906-6E48A0A7FDB5}"/>
+                <a16:creationId xmlns:a16="http://schemas.microsoft.com/office/drawing/2014/main" id="{2F139890-0649-79B5-043E-4232FDE65EF1}"/>
               </a:ext>
             </a:extLst>
           </p:cNvPr>
@@ -4863,36 +4860,63 @@
           <a:bodyPr/>
           <a:lstStyle/>
           <a:p>
+            <a:r>
+              <a:rPr lang="en-US" dirty="0"/>
+              <a:t>In a traditional data center, organizations must buy enough hardware for the peak workload, which leads to wasted capacity when usage is low. In contrast, cloud computing allows you to dynamically adjust resources based on your needs—this is the concept of </a:t>
+            </a:r>
+            <a:r>
+              <a:rPr lang="en-US" dirty="0">
+                <a:solidFill>
+                  <a:schemeClr val="accent1"/>
+                </a:solidFill>
+              </a:rPr>
+              <a:t>elasticity</a:t>
+            </a:r>
+            <a:r>
+              <a:rPr lang="en-US" b="1" dirty="0"/>
+              <a:t>.</a:t>
+            </a:r>
+          </a:p>
+          <a:p>
+            <a:r>
+              <a:rPr lang="en-US" dirty="0">
+                <a:solidFill>
+                  <a:schemeClr val="accent1"/>
+                </a:solidFill>
+              </a:rPr>
+              <a:t>Autoscaling</a:t>
+            </a:r>
+            <a:r>
+              <a:rPr lang="en-US" dirty="0"/>
+              <a:t> is an infrastructure service that </a:t>
+            </a:r>
+            <a:r>
+              <a:rPr lang="en-US" i="1" dirty="0"/>
+              <a:t>automatically adds or removes VM or container instances</a:t>
+            </a:r>
+            <a:r>
+              <a:rPr lang="en-US" dirty="0"/>
+              <a:t> based on current demand. </a:t>
+            </a:r>
+          </a:p>
+          <a:p>
             <a:pPr lvl="1"/>
             <a:r>
               <a:rPr lang="en-US" dirty="0"/>
-              <a:t>if the client request rate decreases, an instance can be removed from the load balancer pool, halted, and deallocated</a:t>
-            </a:r>
-            <a:r>
-              <a:rPr lang="en-US" b="1" i="1" dirty="0"/>
-              <a:t>.</a:t>
-            </a:r>
-            <a:endParaRPr lang="en-US" dirty="0"/>
+              <a:t>It usually works with load balancers to manage traffic to these instances. </a:t>
+            </a:r>
           </a:p>
           <a:p>
             <a:pPr lvl="1"/>
             <a:r>
               <a:rPr lang="en-US" dirty="0"/>
-              <a:t>Autoscalers don’t react to short-term spikes in resource usage. Instead, they look at averages over several minutes because:</a:t>
-            </a:r>
-          </a:p>
-          <a:p>
-            <a:pPr lvl="2"/>
-            <a:r>
-              <a:rPr lang="en-US" dirty="0"/>
-              <a:t>Resource usage can spike briefly but doesn't always mean more capacity is needed</a:t>
-            </a:r>
-          </a:p>
-          <a:p>
-            <a:pPr lvl="2"/>
-            <a:r>
-              <a:rPr lang="en-US" dirty="0"/>
-              <a:t>allocating and starting a new VM takes a relatively long time, on the order of minutes.</a:t>
+              <a:t>Autoscaling containers is slightly different from autoscaling VMs.</a:t>
+            </a:r>
+          </a:p>
+          <a:p>
+            <a:r>
+              <a:rPr lang="en-US" dirty="0"/>
+              <a:t>Autoscaling containers is slightly different from autoscaling VMs.</a:t>
             </a:r>
           </a:p>
           <a:p>
@@ -4904,75 +4928,19 @@
                   </a:schemeClr>
                 </a:solidFill>
               </a:rPr>
-              <a:t>Autoscaling Containers:</a:t>
+              <a:t>Autoscaling VMs:</a:t>
             </a:r>
           </a:p>
           <a:p>
             <a:pPr lvl="1"/>
             <a:r>
               <a:rPr lang="en-US" dirty="0"/>
-              <a:t>Because containers are executing on runtime engines that are hosted on VMs, scaling containers involves two different types of decisions.</a:t>
-            </a:r>
-          </a:p>
-          <a:p>
-            <a:pPr lvl="2"/>
-            <a:r>
-              <a:rPr lang="en-US" dirty="0"/>
-              <a:t>Should you add a new </a:t>
-            </a:r>
-            <a:r>
-              <a:rPr lang="en-US" b="1" dirty="0"/>
-              <a:t>container </a:t>
-            </a:r>
-            <a:r>
-              <a:rPr lang="en-US" dirty="0"/>
-              <a:t>(or Pod) based on workload?</a:t>
-            </a:r>
-            <a:endParaRPr lang="fa-IR" dirty="0"/>
-          </a:p>
-          <a:p>
-            <a:pPr lvl="2"/>
-            <a:r>
-              <a:rPr lang="en-US" dirty="0"/>
-              <a:t>If yes then can it be run on an </a:t>
-            </a:r>
-            <a:r>
-              <a:rPr lang="en-US" b="1" dirty="0"/>
-              <a:t>existing VM</a:t>
-            </a:r>
-            <a:r>
-              <a:rPr lang="en-US" dirty="0"/>
-              <a:t>, or do you need to create a </a:t>
-            </a:r>
-            <a:r>
-              <a:rPr lang="en-US" b="1" dirty="0"/>
-              <a:t>new VM</a:t>
-            </a:r>
-            <a:r>
-              <a:rPr lang="en-US" dirty="0"/>
-              <a:t> for it?</a:t>
-            </a:r>
-            <a:endParaRPr lang="en-US" dirty="0">
-              <a:solidFill>
-                <a:schemeClr val="accent4">
-                  <a:lumMod val="50000"/>
-                </a:schemeClr>
-              </a:solidFill>
-            </a:endParaRPr>
-          </a:p>
-          <a:p>
-            <a:pPr lvl="1"/>
-            <a:r>
-              <a:rPr lang="en-US" dirty="0"/>
-              <a:t>The software that controls the scaling of containers is independent of the software that controls the scaling of VMs. This allows the scaling of containers to be portable across different cloud providers.</a:t>
-            </a:r>
-            <a:endParaRPr lang="en-US" dirty="0">
-              <a:solidFill>
-                <a:schemeClr val="accent4">
-                  <a:lumMod val="50000"/>
-                </a:schemeClr>
-              </a:solidFill>
-            </a:endParaRPr>
+              <a:t>When the existing service instances can’t handle all the incoming client requests, autoscaling creates another instance using the same VM image and registers it with the load balancer</a:t>
+            </a:r>
+            <a:r>
+              <a:rPr lang="en-US" b="1" i="1" dirty="0"/>
+              <a:t>.</a:t>
+            </a:r>
           </a:p>
         </p:txBody>
       </p:sp>
@@ -4981,7 +4949,7 @@
           <p:cNvPr id="3" name="Title 2">
             <a:extLst>
               <a:ext uri="{FF2B5EF4-FFF2-40B4-BE49-F238E27FC236}">
-                <a16:creationId xmlns:a16="http://schemas.microsoft.com/office/drawing/2014/main" id="{41B99649-811A-D3BC-8382-696D7D271327}"/>
+                <a16:creationId xmlns:a16="http://schemas.microsoft.com/office/drawing/2014/main" id="{A8797769-4FA8-0C80-3383-A929A701892F}"/>
               </a:ext>
             </a:extLst>
           </p:cNvPr>
@@ -5009,7 +4977,7 @@
           <p:cNvPr id="4" name="Slide Number Placeholder 3">
             <a:extLst>
               <a:ext uri="{FF2B5EF4-FFF2-40B4-BE49-F238E27FC236}">
-                <a16:creationId xmlns:a16="http://schemas.microsoft.com/office/drawing/2014/main" id="{76FA2490-085D-B94A-7E5C-10B4564AC494}"/>
+                <a16:creationId xmlns:a16="http://schemas.microsoft.com/office/drawing/2014/main" id="{05FBCF61-4AB8-E32F-CD3F-1DDA9110D882}"/>
               </a:ext>
             </a:extLst>
           </p:cNvPr>
@@ -5037,7 +5005,7 @@
     </p:spTree>
     <p:extLst>
       <p:ext uri="{BB962C8B-B14F-4D97-AF65-F5344CB8AC3E}">
-        <p14:creationId xmlns:p14="http://schemas.microsoft.com/office/powerpoint/2010/main" val="1129629048"/>
+        <p14:creationId xmlns:p14="http://schemas.microsoft.com/office/powerpoint/2010/main" val="4139797072"/>
       </p:ext>
     </p:extLst>
   </p:cSld>
@@ -5064,95 +5032,185 @@
           <a:chExt cx="0" cy="0"/>
         </a:xfrm>
       </p:grpSpPr>
-      <p:pic>
-        <p:nvPicPr>
-          <p:cNvPr id="7" name="Picture Placeholder 6">
-            <a:extLst>
-              <a:ext uri="{FF2B5EF4-FFF2-40B4-BE49-F238E27FC236}">
-                <a16:creationId xmlns:a16="http://schemas.microsoft.com/office/drawing/2014/main" id="{9E19DDCE-F41B-F0F5-235B-3088776AA04D}"/>
-              </a:ext>
-            </a:extLst>
-          </p:cNvPr>
-          <p:cNvPicPr>
-            <a:picLocks noGrp="1" noChangeAspect="1"/>
-          </p:cNvPicPr>
-          <p:nvPr>
-            <p:ph type="pic" sz="quarter" idx="11"/>
-          </p:nvPr>
-        </p:nvPicPr>
-        <p:blipFill>
-          <a:blip r:embed="rId2">
-            <a:extLst>
-              <a:ext uri="{28A0092B-C50C-407E-A947-70E740481C1C}">
-                <a14:useLocalDpi xmlns:a14="http://schemas.microsoft.com/office/drawing/2010/main" val="0"/>
-              </a:ext>
-            </a:extLst>
-          </a:blip>
-          <a:srcRect l="6227" r="6227"/>
-          <a:stretch/>
-        </p:blipFill>
-        <p:spPr>
-          <a:xfrm>
-            <a:off x="1650709" y="518312"/>
-            <a:ext cx="8890581" cy="5000952"/>
-          </a:xfrm>
-        </p:spPr>
-      </p:pic>
-      <p:sp>
-        <p:nvSpPr>
-          <p:cNvPr id="3" name="Text Placeholder 2">
-            <a:extLst>
-              <a:ext uri="{FF2B5EF4-FFF2-40B4-BE49-F238E27FC236}">
-                <a16:creationId xmlns:a16="http://schemas.microsoft.com/office/drawing/2014/main" id="{34926C42-484E-942F-623C-AB23BE9BFD08}"/>
-              </a:ext>
-            </a:extLst>
-          </p:cNvPr>
-          <p:cNvSpPr>
-            <a:spLocks noGrp="1"/>
-          </p:cNvSpPr>
-          <p:nvPr>
-            <p:ph type="body" sz="quarter" idx="12"/>
-          </p:nvPr>
-        </p:nvSpPr>
-        <p:spPr>
-          <a:xfrm>
-            <a:off x="555625" y="5683250"/>
-            <a:ext cx="11036300" cy="878915"/>
-          </a:xfrm>
-        </p:spPr>
+      <p:sp>
+        <p:nvSpPr>
+          <p:cNvPr id="2" name="Content Placeholder 1">
+            <a:extLst>
+              <a:ext uri="{FF2B5EF4-FFF2-40B4-BE49-F238E27FC236}">
+                <a16:creationId xmlns:a16="http://schemas.microsoft.com/office/drawing/2014/main" id="{1CCBEDC6-5BB1-BDF5-A906-6E48A0A7FDB5}"/>
+              </a:ext>
+            </a:extLst>
+          </p:cNvPr>
+          <p:cNvSpPr>
+            <a:spLocks noGrp="1"/>
+          </p:cNvSpPr>
+          <p:nvPr>
+            <p:ph sz="half" idx="2"/>
+          </p:nvPr>
+        </p:nvSpPr>
+        <p:spPr/>
         <p:txBody>
           <a:bodyPr/>
           <a:lstStyle/>
           <a:p>
-            <a:r>
-              <a:rPr lang="en-US" dirty="0"/>
-              <a:t>This figure shows a new component, the autoscaler, that monitors and autoscales the utilization of the server instances.</a:t>
-            </a:r>
-          </a:p>
-        </p:txBody>
-      </p:sp>
-      <p:sp>
-        <p:nvSpPr>
-          <p:cNvPr id="5" name="Slide Number Placeholder 4">
-            <a:extLst>
-              <a:ext uri="{FF2B5EF4-FFF2-40B4-BE49-F238E27FC236}">
-                <a16:creationId xmlns:a16="http://schemas.microsoft.com/office/drawing/2014/main" id="{6B2C772F-938A-BF8E-554C-D3F084DCA687}"/>
-              </a:ext>
-            </a:extLst>
-          </p:cNvPr>
-          <p:cNvSpPr>
-            <a:spLocks noGrp="1"/>
-          </p:cNvSpPr>
-          <p:nvPr>
-            <p:ph type="sldNum" sz="quarter" idx="13"/>
-          </p:nvPr>
-        </p:nvSpPr>
-        <p:spPr>
-          <a:xfrm>
-            <a:off x="556149" y="153671"/>
-            <a:ext cx="670079" cy="641281"/>
-          </a:xfrm>
-        </p:spPr>
+            <a:pPr lvl="1"/>
+            <a:r>
+              <a:rPr lang="en-US" dirty="0"/>
+              <a:t>if the client request rate decreases, an instance can be removed from the load balancer pool, halted, and deallocated</a:t>
+            </a:r>
+            <a:r>
+              <a:rPr lang="en-US" b="1" i="1" dirty="0"/>
+              <a:t>.</a:t>
+            </a:r>
+            <a:endParaRPr lang="en-US" dirty="0"/>
+          </a:p>
+          <a:p>
+            <a:pPr lvl="1"/>
+            <a:r>
+              <a:rPr lang="en-US" dirty="0"/>
+              <a:t>Autoscalers don’t react to short-term spikes in resource usage. Instead, they look at averages over several minutes because:</a:t>
+            </a:r>
+          </a:p>
+          <a:p>
+            <a:pPr lvl="2"/>
+            <a:r>
+              <a:rPr lang="en-US" dirty="0"/>
+              <a:t>Resource usage can spike briefly but doesn't always mean more capacity is needed</a:t>
+            </a:r>
+          </a:p>
+          <a:p>
+            <a:pPr lvl="2"/>
+            <a:r>
+              <a:rPr lang="en-US" dirty="0"/>
+              <a:t>allocating and starting a new VM takes a relatively long time, on the order of minutes.</a:t>
+            </a:r>
+          </a:p>
+          <a:p>
+            <a:r>
+              <a:rPr lang="en-US" dirty="0">
+                <a:solidFill>
+                  <a:schemeClr val="accent4">
+                    <a:lumMod val="50000"/>
+                  </a:schemeClr>
+                </a:solidFill>
+              </a:rPr>
+              <a:t>Autoscaling Containers:</a:t>
+            </a:r>
+          </a:p>
+          <a:p>
+            <a:pPr lvl="1"/>
+            <a:r>
+              <a:rPr lang="en-US" dirty="0"/>
+              <a:t>Because containers are executing on runtime engines that are hosted on VMs, scaling containers involves two different types of decisions.</a:t>
+            </a:r>
+          </a:p>
+          <a:p>
+            <a:pPr lvl="2"/>
+            <a:r>
+              <a:rPr lang="en-US" dirty="0"/>
+              <a:t>Should you add a new </a:t>
+            </a:r>
+            <a:r>
+              <a:rPr lang="en-US" b="1" dirty="0"/>
+              <a:t>container </a:t>
+            </a:r>
+            <a:r>
+              <a:rPr lang="en-US" dirty="0"/>
+              <a:t>(or Pod) based on workload?</a:t>
+            </a:r>
+            <a:endParaRPr lang="fa-IR" dirty="0"/>
+          </a:p>
+          <a:p>
+            <a:pPr lvl="2"/>
+            <a:r>
+              <a:rPr lang="en-US" dirty="0"/>
+              <a:t>If yes then can it be run on an </a:t>
+            </a:r>
+            <a:r>
+              <a:rPr lang="en-US" b="1" dirty="0"/>
+              <a:t>existing VM</a:t>
+            </a:r>
+            <a:r>
+              <a:rPr lang="en-US" dirty="0"/>
+              <a:t>, or do you need to create a </a:t>
+            </a:r>
+            <a:r>
+              <a:rPr lang="en-US" b="1" dirty="0"/>
+              <a:t>new VM</a:t>
+            </a:r>
+            <a:r>
+              <a:rPr lang="en-US" dirty="0"/>
+              <a:t> for it?</a:t>
+            </a:r>
+            <a:endParaRPr lang="en-US" dirty="0">
+              <a:solidFill>
+                <a:schemeClr val="accent4">
+                  <a:lumMod val="50000"/>
+                </a:schemeClr>
+              </a:solidFill>
+            </a:endParaRPr>
+          </a:p>
+          <a:p>
+            <a:pPr lvl="1"/>
+            <a:r>
+              <a:rPr lang="en-US" dirty="0"/>
+              <a:t>The software that controls the scaling of containers is independent of the software that controls the scaling of VMs. This allows the scaling of containers to be portable across different cloud providers.</a:t>
+            </a:r>
+            <a:endParaRPr lang="en-US" dirty="0">
+              <a:solidFill>
+                <a:schemeClr val="accent4">
+                  <a:lumMod val="50000"/>
+                </a:schemeClr>
+              </a:solidFill>
+            </a:endParaRPr>
+          </a:p>
+        </p:txBody>
+      </p:sp>
+      <p:sp>
+        <p:nvSpPr>
+          <p:cNvPr id="3" name="Title 2">
+            <a:extLst>
+              <a:ext uri="{FF2B5EF4-FFF2-40B4-BE49-F238E27FC236}">
+                <a16:creationId xmlns:a16="http://schemas.microsoft.com/office/drawing/2014/main" id="{41B99649-811A-D3BC-8382-696D7D271327}"/>
+              </a:ext>
+            </a:extLst>
+          </p:cNvPr>
+          <p:cNvSpPr>
+            <a:spLocks noGrp="1"/>
+          </p:cNvSpPr>
+          <p:nvPr>
+            <p:ph type="title"/>
+          </p:nvPr>
+        </p:nvSpPr>
+        <p:spPr/>
+        <p:txBody>
+          <a:bodyPr/>
+          <a:lstStyle/>
+          <a:p>
+            <a:r>
+              <a:rPr lang="en-US" dirty="0"/>
+              <a:t>Autoscaling</a:t>
+            </a:r>
+          </a:p>
+        </p:txBody>
+      </p:sp>
+      <p:sp>
+        <p:nvSpPr>
+          <p:cNvPr id="4" name="Slide Number Placeholder 3">
+            <a:extLst>
+              <a:ext uri="{FF2B5EF4-FFF2-40B4-BE49-F238E27FC236}">
+                <a16:creationId xmlns:a16="http://schemas.microsoft.com/office/drawing/2014/main" id="{76FA2490-085D-B94A-7E5C-10B4564AC494}"/>
+              </a:ext>
+            </a:extLst>
+          </p:cNvPr>
+          <p:cNvSpPr>
+            <a:spLocks noGrp="1"/>
+          </p:cNvSpPr>
+          <p:nvPr>
+            <p:ph type="sldNum" sz="quarter" idx="10"/>
+          </p:nvPr>
+        </p:nvSpPr>
+        <p:spPr/>
         <p:txBody>
           <a:bodyPr/>
           <a:lstStyle/>
@@ -5169,7 +5227,7 @@
     </p:spTree>
     <p:extLst>
       <p:ext uri="{BB962C8B-B14F-4D97-AF65-F5344CB8AC3E}">
-        <p14:creationId xmlns:p14="http://schemas.microsoft.com/office/powerpoint/2010/main" val="2583101060"/>
+        <p14:creationId xmlns:p14="http://schemas.microsoft.com/office/powerpoint/2010/main" val="1129629048"/>
       </p:ext>
     </p:extLst>
   </p:cSld>
@@ -5282,108 +5340,95 @@
           <a:chExt cx="0" cy="0"/>
         </a:xfrm>
       </p:grpSpPr>
-      <p:sp>
-        <p:nvSpPr>
-          <p:cNvPr id="2" name="Content Placeholder 1">
-            <a:extLst>
-              <a:ext uri="{FF2B5EF4-FFF2-40B4-BE49-F238E27FC236}">
-                <a16:creationId xmlns:a16="http://schemas.microsoft.com/office/drawing/2014/main" id="{EF87E895-2B91-5058-AC60-8131B1E3FF3D}"/>
-              </a:ext>
-            </a:extLst>
-          </p:cNvPr>
-          <p:cNvSpPr>
-            <a:spLocks noGrp="1"/>
-          </p:cNvSpPr>
-          <p:nvPr>
-            <p:ph sz="half" idx="2"/>
-          </p:nvPr>
-        </p:nvSpPr>
-        <p:spPr/>
+      <p:pic>
+        <p:nvPicPr>
+          <p:cNvPr id="7" name="Picture Placeholder 6">
+            <a:extLst>
+              <a:ext uri="{FF2B5EF4-FFF2-40B4-BE49-F238E27FC236}">
+                <a16:creationId xmlns:a16="http://schemas.microsoft.com/office/drawing/2014/main" id="{9E19DDCE-F41B-F0F5-235B-3088776AA04D}"/>
+              </a:ext>
+            </a:extLst>
+          </p:cNvPr>
+          <p:cNvPicPr>
+            <a:picLocks noGrp="1" noChangeAspect="1"/>
+          </p:cNvPicPr>
+          <p:nvPr>
+            <p:ph type="pic" sz="quarter" idx="11"/>
+          </p:nvPr>
+        </p:nvPicPr>
+        <p:blipFill>
+          <a:blip r:embed="rId2">
+            <a:extLst>
+              <a:ext uri="{28A0092B-C50C-407E-A947-70E740481C1C}">
+                <a14:useLocalDpi xmlns:a14="http://schemas.microsoft.com/office/drawing/2010/main" val="0"/>
+              </a:ext>
+            </a:extLst>
+          </a:blip>
+          <a:srcRect l="6227" r="6227"/>
+          <a:stretch/>
+        </p:blipFill>
+        <p:spPr>
+          <a:xfrm>
+            <a:off x="1650709" y="518312"/>
+            <a:ext cx="8890581" cy="5000952"/>
+          </a:xfrm>
+        </p:spPr>
+      </p:pic>
+      <p:sp>
+        <p:nvSpPr>
+          <p:cNvPr id="3" name="Text Placeholder 2">
+            <a:extLst>
+              <a:ext uri="{FF2B5EF4-FFF2-40B4-BE49-F238E27FC236}">
+                <a16:creationId xmlns:a16="http://schemas.microsoft.com/office/drawing/2014/main" id="{34926C42-484E-942F-623C-AB23BE9BFD08}"/>
+              </a:ext>
+            </a:extLst>
+          </p:cNvPr>
+          <p:cNvSpPr>
+            <a:spLocks noGrp="1"/>
+          </p:cNvSpPr>
+          <p:nvPr>
+            <p:ph type="body" sz="quarter" idx="12"/>
+          </p:nvPr>
+        </p:nvSpPr>
+        <p:spPr>
+          <a:xfrm>
+            <a:off x="555625" y="5683250"/>
+            <a:ext cx="11036300" cy="878915"/>
+          </a:xfrm>
+        </p:spPr>
         <p:txBody>
           <a:bodyPr/>
           <a:lstStyle/>
           <a:p>
             <a:r>
               <a:rPr lang="en-US" dirty="0"/>
-              <a:t>The cloud is composed of distributed data centers, with each data center containing tens of thousands of computers. </a:t>
-            </a:r>
-          </a:p>
-          <a:p>
-            <a:r>
-              <a:rPr lang="en-US" dirty="0"/>
-              <a:t>Because of the large number of computers in a data center, failure of a computer in such a center happens quite frequently.</a:t>
-            </a:r>
-          </a:p>
-          <a:p>
-            <a:pPr lvl="1"/>
-            <a:r>
-              <a:rPr lang="en-US" dirty="0"/>
-              <a:t>You, as an architect of a service, should assume that at some point, the VMs on which your service is executing will fail.</a:t>
-            </a:r>
-          </a:p>
-          <a:p>
-            <a:r>
-              <a:rPr lang="en-US" dirty="0"/>
-              <a:t>You may decide to run multiple VMs or containers containing instances of your service. These multiple instances sit behind a load balancer.</a:t>
-            </a:r>
-          </a:p>
-          <a:p>
-            <a:r>
-              <a:rPr lang="en-US"/>
-              <a:t>The </a:t>
-            </a:r>
-            <a:r>
-              <a:rPr lang="en-US" dirty="0"/>
-              <a:t>cloud infrastructure can automatically scale your service by creating new instances when demand grows and removing instances when demand shrinks. </a:t>
-            </a:r>
-          </a:p>
-        </p:txBody>
-      </p:sp>
-      <p:sp>
-        <p:nvSpPr>
-          <p:cNvPr id="3" name="Title 2">
-            <a:extLst>
-              <a:ext uri="{FF2B5EF4-FFF2-40B4-BE49-F238E27FC236}">
-                <a16:creationId xmlns:a16="http://schemas.microsoft.com/office/drawing/2014/main" id="{9EF6E8BB-A3AA-8BBB-9D09-1F248225FF3E}"/>
-              </a:ext>
-            </a:extLst>
-          </p:cNvPr>
-          <p:cNvSpPr>
-            <a:spLocks noGrp="1"/>
-          </p:cNvSpPr>
-          <p:nvPr>
-            <p:ph type="title"/>
-          </p:nvPr>
-        </p:nvSpPr>
-        <p:spPr/>
-        <p:txBody>
-          <a:bodyPr/>
-          <a:lstStyle/>
-          <a:p>
-            <a:r>
-              <a:rPr lang="en-US" dirty="0"/>
-              <a:t>Summary</a:t>
-            </a:r>
-          </a:p>
-        </p:txBody>
-      </p:sp>
-      <p:sp>
-        <p:nvSpPr>
-          <p:cNvPr id="4" name="Slide Number Placeholder 3">
-            <a:extLst>
-              <a:ext uri="{FF2B5EF4-FFF2-40B4-BE49-F238E27FC236}">
-                <a16:creationId xmlns:a16="http://schemas.microsoft.com/office/drawing/2014/main" id="{645DA133-531F-16FD-7F0D-0B9F16475796}"/>
-              </a:ext>
-            </a:extLst>
-          </p:cNvPr>
-          <p:cNvSpPr>
-            <a:spLocks noGrp="1"/>
-          </p:cNvSpPr>
-          <p:nvPr>
-            <p:ph type="sldNum" sz="quarter" idx="10"/>
-          </p:nvPr>
-        </p:nvSpPr>
-        <p:spPr/>
+              <a:t>This figure shows a new component, the autoscaler, that monitors and autoscales the utilization of the server instances.</a:t>
+            </a:r>
+          </a:p>
+        </p:txBody>
+      </p:sp>
+      <p:sp>
+        <p:nvSpPr>
+          <p:cNvPr id="5" name="Slide Number Placeholder 4">
+            <a:extLst>
+              <a:ext uri="{FF2B5EF4-FFF2-40B4-BE49-F238E27FC236}">
+                <a16:creationId xmlns:a16="http://schemas.microsoft.com/office/drawing/2014/main" id="{6B2C772F-938A-BF8E-554C-D3F084DCA687}"/>
+              </a:ext>
+            </a:extLst>
+          </p:cNvPr>
+          <p:cNvSpPr>
+            <a:spLocks noGrp="1"/>
+          </p:cNvSpPr>
+          <p:nvPr>
+            <p:ph type="sldNum" sz="quarter" idx="13"/>
+          </p:nvPr>
+        </p:nvSpPr>
+        <p:spPr>
+          <a:xfrm>
+            <a:off x="556149" y="153671"/>
+            <a:ext cx="670079" cy="641281"/>
+          </a:xfrm>
+        </p:spPr>
         <p:txBody>
           <a:bodyPr/>
           <a:lstStyle/>
@@ -5392,6 +5437,151 @@
               <a:rPr lang="en-US" smtClean="0"/>
               <a:pPr/>
               <a:t>20</a:t>
+            </a:fld>
+            <a:endParaRPr lang="en-US" dirty="0"/>
+          </a:p>
+        </p:txBody>
+      </p:sp>
+    </p:spTree>
+    <p:extLst>
+      <p:ext uri="{BB962C8B-B14F-4D97-AF65-F5344CB8AC3E}">
+        <p14:creationId xmlns:p14="http://schemas.microsoft.com/office/powerpoint/2010/main" val="2583101060"/>
+      </p:ext>
+    </p:extLst>
+  </p:cSld>
+  <p:clrMapOvr>
+    <a:masterClrMapping/>
+  </p:clrMapOvr>
+</p:sld>
+</file>
+
+<file path=ppt/slides/slide21.xml><?xml version="1.0" encoding="utf-8"?>
+<p:sld xmlns:a="http://schemas.openxmlformats.org/drawingml/2006/main" xmlns:r="http://schemas.openxmlformats.org/officeDocument/2006/relationships" xmlns:p="http://schemas.openxmlformats.org/presentationml/2006/main">
+  <p:cSld>
+    <p:spTree>
+      <p:nvGrpSpPr>
+        <p:cNvPr id="1" name=""/>
+        <p:cNvGrpSpPr/>
+        <p:nvPr/>
+      </p:nvGrpSpPr>
+      <p:grpSpPr>
+        <a:xfrm>
+          <a:off x="0" y="0"/>
+          <a:ext cx="0" cy="0"/>
+          <a:chOff x="0" y="0"/>
+          <a:chExt cx="0" cy="0"/>
+        </a:xfrm>
+      </p:grpSpPr>
+      <p:sp>
+        <p:nvSpPr>
+          <p:cNvPr id="2" name="Content Placeholder 1">
+            <a:extLst>
+              <a:ext uri="{FF2B5EF4-FFF2-40B4-BE49-F238E27FC236}">
+                <a16:creationId xmlns:a16="http://schemas.microsoft.com/office/drawing/2014/main" id="{EF87E895-2B91-5058-AC60-8131B1E3FF3D}"/>
+              </a:ext>
+            </a:extLst>
+          </p:cNvPr>
+          <p:cNvSpPr>
+            <a:spLocks noGrp="1"/>
+          </p:cNvSpPr>
+          <p:nvPr>
+            <p:ph sz="half" idx="2"/>
+          </p:nvPr>
+        </p:nvSpPr>
+        <p:spPr/>
+        <p:txBody>
+          <a:bodyPr/>
+          <a:lstStyle/>
+          <a:p>
+            <a:r>
+              <a:rPr lang="en-US" dirty="0"/>
+              <a:t>The cloud is composed of distributed data centers, with each data center containing tens of thousands of computers. </a:t>
+            </a:r>
+          </a:p>
+          <a:p>
+            <a:r>
+              <a:rPr lang="en-US" dirty="0"/>
+              <a:t>Because of the large number of computers in a data center, failure of a computer in such a center happens quite frequently.</a:t>
+            </a:r>
+          </a:p>
+          <a:p>
+            <a:pPr lvl="1"/>
+            <a:r>
+              <a:rPr lang="en-US" dirty="0"/>
+              <a:t>You, as an architect of a service, should assume that at some point, the VMs on which your service is executing will fail.</a:t>
+            </a:r>
+          </a:p>
+          <a:p>
+            <a:r>
+              <a:rPr lang="en-US" dirty="0"/>
+              <a:t>You may decide to run multiple VMs or containers containing instances of your service. These multiple instances sit behind a load balancer.</a:t>
+            </a:r>
+          </a:p>
+          <a:p>
+            <a:r>
+              <a:rPr lang="en-US"/>
+              <a:t>The </a:t>
+            </a:r>
+            <a:r>
+              <a:rPr lang="en-US" dirty="0"/>
+              <a:t>cloud infrastructure can automatically scale your service by creating new instances when demand grows and removing instances when demand shrinks. </a:t>
+            </a:r>
+          </a:p>
+        </p:txBody>
+      </p:sp>
+      <p:sp>
+        <p:nvSpPr>
+          <p:cNvPr id="3" name="Title 2">
+            <a:extLst>
+              <a:ext uri="{FF2B5EF4-FFF2-40B4-BE49-F238E27FC236}">
+                <a16:creationId xmlns:a16="http://schemas.microsoft.com/office/drawing/2014/main" id="{9EF6E8BB-A3AA-8BBB-9D09-1F248225FF3E}"/>
+              </a:ext>
+            </a:extLst>
+          </p:cNvPr>
+          <p:cNvSpPr>
+            <a:spLocks noGrp="1"/>
+          </p:cNvSpPr>
+          <p:nvPr>
+            <p:ph type="title"/>
+          </p:nvPr>
+        </p:nvSpPr>
+        <p:spPr/>
+        <p:txBody>
+          <a:bodyPr/>
+          <a:lstStyle/>
+          <a:p>
+            <a:r>
+              <a:rPr lang="en-US" dirty="0"/>
+              <a:t>Summary</a:t>
+            </a:r>
+          </a:p>
+        </p:txBody>
+      </p:sp>
+      <p:sp>
+        <p:nvSpPr>
+          <p:cNvPr id="4" name="Slide Number Placeholder 3">
+            <a:extLst>
+              <a:ext uri="{FF2B5EF4-FFF2-40B4-BE49-F238E27FC236}">
+                <a16:creationId xmlns:a16="http://schemas.microsoft.com/office/drawing/2014/main" id="{645DA133-531F-16FD-7F0D-0B9F16475796}"/>
+              </a:ext>
+            </a:extLst>
+          </p:cNvPr>
+          <p:cNvSpPr>
+            <a:spLocks noGrp="1"/>
+          </p:cNvSpPr>
+          <p:nvPr>
+            <p:ph type="sldNum" sz="quarter" idx="10"/>
+          </p:nvPr>
+        </p:nvSpPr>
+        <p:spPr/>
+        <p:txBody>
+          <a:bodyPr/>
+          <a:lstStyle/>
+          <a:p>
+            <a:fld id="{AE311D09-C3D9-45E8-99CE-78E12234EEAD}" type="slidenum">
+              <a:rPr lang="en-US" smtClean="0"/>
+              <a:pPr/>
+              <a:t>21</a:t>
             </a:fld>
             <a:endParaRPr lang="en-US" dirty="0"/>
           </a:p>
@@ -5860,20 +6050,51 @@
           <a:chExt cx="0" cy="0"/>
         </a:xfrm>
       </p:grpSpPr>
-      <p:sp>
-        <p:nvSpPr>
-          <p:cNvPr id="2" name="Content Placeholder 1">
-            <a:extLst>
-              <a:ext uri="{FF2B5EF4-FFF2-40B4-BE49-F238E27FC236}">
-                <a16:creationId xmlns:a16="http://schemas.microsoft.com/office/drawing/2014/main" id="{FC2F0CFE-5D4D-35DF-1FD3-B502033DA23D}"/>
-              </a:ext>
-            </a:extLst>
-          </p:cNvPr>
-          <p:cNvSpPr>
-            <a:spLocks noGrp="1"/>
-          </p:cNvSpPr>
-          <p:nvPr>
-            <p:ph sz="half" idx="2"/>
+      <p:pic>
+        <p:nvPicPr>
+          <p:cNvPr id="6" name="Picture Placeholder 5">
+            <a:extLst>
+              <a:ext uri="{FF2B5EF4-FFF2-40B4-BE49-F238E27FC236}">
+                <a16:creationId xmlns:a16="http://schemas.microsoft.com/office/drawing/2014/main" id="{0BDD3CC9-E784-943E-38D3-09EF86124485}"/>
+              </a:ext>
+            </a:extLst>
+          </p:cNvPr>
+          <p:cNvPicPr>
+            <a:picLocks noGrp="1" noChangeAspect="1"/>
+          </p:cNvPicPr>
+          <p:nvPr>
+            <p:ph type="pic" sz="quarter" idx="11"/>
+          </p:nvPr>
+        </p:nvPicPr>
+        <p:blipFill rotWithShape="1">
+          <a:blip r:embed="rId2">
+            <a:extLst>
+              <a:ext uri="{28A0092B-C50C-407E-A947-70E740481C1C}">
+                <a14:useLocalDpi xmlns:a14="http://schemas.microsoft.com/office/drawing/2010/main" val="0"/>
+              </a:ext>
+            </a:extLst>
+          </a:blip>
+          <a:srcRect l="-10833" r="-10833"/>
+          <a:stretch>
+            <a:fillRect/>
+          </a:stretch>
+        </p:blipFill>
+        <p:spPr/>
+      </p:pic>
+      <p:sp>
+        <p:nvSpPr>
+          <p:cNvPr id="3" name="Text Placeholder 2">
+            <a:extLst>
+              <a:ext uri="{FF2B5EF4-FFF2-40B4-BE49-F238E27FC236}">
+                <a16:creationId xmlns:a16="http://schemas.microsoft.com/office/drawing/2014/main" id="{209F1ED2-813D-A019-5DA4-DEBC751FFDA5}"/>
+              </a:ext>
+            </a:extLst>
+          </p:cNvPr>
+          <p:cNvSpPr>
+            <a:spLocks noGrp="1"/>
+          </p:cNvSpPr>
+          <p:nvPr>
+            <p:ph type="body" sz="quarter" idx="12"/>
           </p:nvPr>
         </p:nvSpPr>
         <p:spPr/>
@@ -5882,106 +6103,8 @@
           <a:lstStyle/>
           <a:p>
             <a:r>
-              <a:rPr lang="en-US" dirty="0">
-                <a:solidFill>
-                  <a:schemeClr val="accent1"/>
-                </a:solidFill>
-              </a:rPr>
-              <a:t>Public clouds </a:t>
-            </a:r>
-            <a:r>
-              <a:rPr lang="en-US" dirty="0"/>
-              <a:t>are owned and provided by cloud service providers. </a:t>
-            </a:r>
-          </a:p>
-          <a:p>
-            <a:pPr lvl="1"/>
-            <a:r>
-              <a:rPr lang="en-US" dirty="0"/>
-              <a:t>companies like AWS, Azure, or Google Cloud.</a:t>
-            </a:r>
-          </a:p>
-          <a:p>
-            <a:r>
-              <a:rPr lang="en-US" dirty="0">
-                <a:solidFill>
-                  <a:schemeClr val="accent1"/>
-                </a:solidFill>
-              </a:rPr>
-              <a:t>Private clouds </a:t>
-            </a:r>
-            <a:r>
-              <a:rPr lang="en-US" dirty="0"/>
-              <a:t>are owned and operated by an organization for the use of members of that organization.</a:t>
-            </a:r>
-          </a:p>
-          <a:p>
-            <a:pPr lvl="1"/>
-            <a:r>
-              <a:rPr lang="en-US" dirty="0"/>
-              <a:t>An organization might choose a private cloud because of concerns such as control, security, etc.</a:t>
-            </a:r>
-          </a:p>
-          <a:p>
-            <a:r>
-              <a:rPr lang="en-US" dirty="0"/>
-              <a:t>The </a:t>
-            </a:r>
-            <a:r>
-              <a:rPr lang="en-US" dirty="0">
-                <a:solidFill>
-                  <a:schemeClr val="accent1"/>
-                </a:solidFill>
-              </a:rPr>
-              <a:t>hybrid cloud </a:t>
-            </a:r>
-            <a:r>
-              <a:rPr lang="en-US" dirty="0"/>
-              <a:t>approach is a mixed model, in which some workloads are run in a private cloud and other workloads are run in a public cloud.</a:t>
-            </a:r>
-          </a:p>
-          <a:p>
-            <a:pPr lvl="1"/>
-            <a:r>
-              <a:rPr lang="en-US" dirty="0"/>
-              <a:t>It might be used because some data are legally required to be subject to greater control and scrutiny.</a:t>
-            </a:r>
-          </a:p>
-          <a:p>
-            <a:r>
-              <a:rPr lang="en-US" dirty="0"/>
-              <a:t>For an architect designing software using cloud services, there is not much difference, from a technical perspective, between private clouds and public clouds.</a:t>
-            </a:r>
-          </a:p>
-          <a:p>
-            <a:endParaRPr lang="en-US" dirty="0"/>
-          </a:p>
-        </p:txBody>
-      </p:sp>
-      <p:sp>
-        <p:nvSpPr>
-          <p:cNvPr id="3" name="Title 2">
-            <a:extLst>
-              <a:ext uri="{FF2B5EF4-FFF2-40B4-BE49-F238E27FC236}">
-                <a16:creationId xmlns:a16="http://schemas.microsoft.com/office/drawing/2014/main" id="{64A1F920-947D-F23F-97DE-0BFEFE12B804}"/>
-              </a:ext>
-            </a:extLst>
-          </p:cNvPr>
-          <p:cNvSpPr>
-            <a:spLocks noGrp="1"/>
-          </p:cNvSpPr>
-          <p:nvPr>
-            <p:ph type="title"/>
-          </p:nvPr>
-        </p:nvSpPr>
-        <p:spPr/>
-        <p:txBody>
-          <a:bodyPr/>
-          <a:lstStyle/>
-          <a:p>
-            <a:r>
-              <a:rPr lang="en-US" dirty="0"/>
-              <a:t>Cloud Basics</a:t>
+              <a:rPr lang="en-US" dirty="0"/>
+              <a:t>Cloud computing</a:t>
             </a:r>
           </a:p>
         </p:txBody>
@@ -5991,15 +6114,15 @@
           <p:cNvPr id="4" name="Slide Number Placeholder 3">
             <a:extLst>
               <a:ext uri="{FF2B5EF4-FFF2-40B4-BE49-F238E27FC236}">
-                <a16:creationId xmlns:a16="http://schemas.microsoft.com/office/drawing/2014/main" id="{C42C0315-C056-9812-EF7E-A26F61F487AD}"/>
-              </a:ext>
-            </a:extLst>
-          </p:cNvPr>
-          <p:cNvSpPr>
-            <a:spLocks noGrp="1"/>
-          </p:cNvSpPr>
-          <p:nvPr>
-            <p:ph type="sldNum" sz="quarter" idx="10"/>
+                <a16:creationId xmlns:a16="http://schemas.microsoft.com/office/drawing/2014/main" id="{1C43B6EB-4169-52C9-99E8-EFC156EE4005}"/>
+              </a:ext>
+            </a:extLst>
+          </p:cNvPr>
+          <p:cNvSpPr>
+            <a:spLocks noGrp="1"/>
+          </p:cNvSpPr>
+          <p:nvPr>
+            <p:ph type="sldNum" sz="quarter" idx="13"/>
           </p:nvPr>
         </p:nvSpPr>
         <p:spPr/>
@@ -6019,7 +6142,7 @@
     </p:spTree>
     <p:extLst>
       <p:ext uri="{BB962C8B-B14F-4D97-AF65-F5344CB8AC3E}">
-        <p14:creationId xmlns:p14="http://schemas.microsoft.com/office/powerpoint/2010/main" val="1594606508"/>
+        <p14:creationId xmlns:p14="http://schemas.microsoft.com/office/powerpoint/2010/main" val="4025757746"/>
       </p:ext>
     </p:extLst>
   </p:cSld>
@@ -6046,43 +6169,12 @@
           <a:chExt cx="0" cy="0"/>
         </a:xfrm>
       </p:grpSpPr>
-      <p:pic>
-        <p:nvPicPr>
-          <p:cNvPr id="8" name="Picture Placeholder 7">
-            <a:extLst>
-              <a:ext uri="{FF2B5EF4-FFF2-40B4-BE49-F238E27FC236}">
-                <a16:creationId xmlns:a16="http://schemas.microsoft.com/office/drawing/2014/main" id="{1E2B8A1A-A76C-6ED3-C724-1D297270FC19}"/>
-              </a:ext>
-            </a:extLst>
-          </p:cNvPr>
-          <p:cNvPicPr>
-            <a:picLocks noGrp="1" noChangeAspect="1"/>
-          </p:cNvPicPr>
-          <p:nvPr>
-            <p:ph type="pic" sz="quarter" idx="11"/>
-          </p:nvPr>
-        </p:nvPicPr>
-        <p:blipFill>
-          <a:blip r:embed="rId2">
-            <a:extLst>
-              <a:ext uri="{28A0092B-C50C-407E-A947-70E740481C1C}">
-                <a14:useLocalDpi xmlns:a14="http://schemas.microsoft.com/office/drawing/2010/main" val="0"/>
-              </a:ext>
-            </a:extLst>
-          </a:blip>
-          <a:srcRect t="9856" b="9856"/>
-          <a:stretch>
-            <a:fillRect/>
-          </a:stretch>
-        </p:blipFill>
-        <p:spPr/>
-      </p:pic>
-      <p:sp>
-        <p:nvSpPr>
-          <p:cNvPr id="3" name="Content Placeholder 2">
-            <a:extLst>
-              <a:ext uri="{FF2B5EF4-FFF2-40B4-BE49-F238E27FC236}">
-                <a16:creationId xmlns:a16="http://schemas.microsoft.com/office/drawing/2014/main" id="{A3E6E0FB-3525-0424-F677-410C03ED4091}"/>
+      <p:sp>
+        <p:nvSpPr>
+          <p:cNvPr id="2" name="Content Placeholder 1">
+            <a:extLst>
+              <a:ext uri="{FF2B5EF4-FFF2-40B4-BE49-F238E27FC236}">
+                <a16:creationId xmlns:a16="http://schemas.microsoft.com/office/drawing/2014/main" id="{FC2F0CFE-5D4D-35DF-1FD3-B502033DA23D}"/>
               </a:ext>
             </a:extLst>
           </p:cNvPr>
@@ -6099,40 +6191,96 @@
           <a:lstStyle/>
           <a:p>
             <a:r>
-              <a:rPr lang="en-US" dirty="0"/>
-              <a:t>The data center consists of rows and rows of such racks. </a:t>
+              <a:rPr lang="en-US" dirty="0">
+                <a:solidFill>
+                  <a:schemeClr val="accent1"/>
+                </a:solidFill>
+              </a:rPr>
+              <a:t>Public clouds </a:t>
+            </a:r>
+            <a:r>
+              <a:rPr lang="en-US" dirty="0"/>
+              <a:t>are owned and provided by cloud service providers. </a:t>
             </a:r>
           </a:p>
           <a:p>
             <a:pPr lvl="1"/>
             <a:r>
               <a:rPr lang="en-US" dirty="0"/>
-              <a:t>Each rack consists of more than 25 computers (each with multiple CPUs).</a:t>
+              <a:t>companies like AWS, Azure, or Google Cloud.</a:t>
+            </a:r>
+          </a:p>
+          <a:p>
+            <a:r>
+              <a:rPr lang="en-US" dirty="0">
+                <a:solidFill>
+                  <a:schemeClr val="accent1"/>
+                </a:solidFill>
+              </a:rPr>
+              <a:t>Private clouds </a:t>
+            </a:r>
+            <a:r>
+              <a:rPr lang="en-US" dirty="0"/>
+              <a:t>are owned and operated by an organization for the use of members of that organization.</a:t>
             </a:r>
           </a:p>
           <a:p>
             <a:pPr lvl="1"/>
             <a:r>
               <a:rPr lang="en-US" dirty="0"/>
-              <a:t>Cloud data centers are one reason why energy efficiency has become a critical quality attribute in some applications.</a:t>
-            </a:r>
-          </a:p>
-        </p:txBody>
-      </p:sp>
-      <p:sp>
-        <p:nvSpPr>
-          <p:cNvPr id="4" name="Content Placeholder 3">
-            <a:extLst>
-              <a:ext uri="{FF2B5EF4-FFF2-40B4-BE49-F238E27FC236}">
-                <a16:creationId xmlns:a16="http://schemas.microsoft.com/office/drawing/2014/main" id="{FA7B9540-6FFD-A66E-4625-9578FB72DCC0}"/>
-              </a:ext>
-            </a:extLst>
-          </p:cNvPr>
-          <p:cNvSpPr>
-            <a:spLocks noGrp="1"/>
-          </p:cNvSpPr>
-          <p:nvPr>
-            <p:ph sz="half" idx="12"/>
+              <a:t>An organization might choose a private cloud because of concerns such as control, security, etc.</a:t>
+            </a:r>
+          </a:p>
+          <a:p>
+            <a:r>
+              <a:rPr lang="en-US" dirty="0"/>
+              <a:t>The </a:t>
+            </a:r>
+            <a:r>
+              <a:rPr lang="en-US" dirty="0">
+                <a:solidFill>
+                  <a:schemeClr val="accent1"/>
+                </a:solidFill>
+              </a:rPr>
+              <a:t>hybrid cloud </a:t>
+            </a:r>
+            <a:r>
+              <a:rPr lang="en-US" dirty="0"/>
+              <a:t>approach is a mixed model, in which some workloads are run in a private cloud and other workloads are run in a public cloud.</a:t>
+            </a:r>
+          </a:p>
+          <a:p>
+            <a:pPr lvl="1"/>
+            <a:r>
+              <a:rPr lang="en-US" dirty="0"/>
+              <a:t>It might be used because some data are legally required to be subject to greater control and scrutiny.</a:t>
+            </a:r>
+          </a:p>
+          <a:p>
+            <a:r>
+              <a:rPr lang="en-US" dirty="0"/>
+              <a:t>For an architect designing software using cloud services, there is not much difference, from a technical perspective, between private clouds and public clouds.</a:t>
+            </a:r>
+          </a:p>
+          <a:p>
+            <a:endParaRPr lang="en-US" dirty="0"/>
+          </a:p>
+        </p:txBody>
+      </p:sp>
+      <p:sp>
+        <p:nvSpPr>
+          <p:cNvPr id="3" name="Title 2">
+            <a:extLst>
+              <a:ext uri="{FF2B5EF4-FFF2-40B4-BE49-F238E27FC236}">
+                <a16:creationId xmlns:a16="http://schemas.microsoft.com/office/drawing/2014/main" id="{64A1F920-947D-F23F-97DE-0BFEFE12B804}"/>
+              </a:ext>
+            </a:extLst>
+          </p:cNvPr>
+          <p:cNvSpPr>
+            <a:spLocks noGrp="1"/>
+          </p:cNvSpPr>
+          <p:nvPr>
+            <p:ph type="title"/>
           </p:nvPr>
         </p:nvSpPr>
         <p:spPr/>
@@ -6141,79 +6289,6 @@
           <a:lstStyle/>
           <a:p>
             <a:r>
-              <a:rPr lang="en-US" dirty="0">
-                <a:solidFill>
-                  <a:schemeClr val="accent1"/>
-                </a:solidFill>
-              </a:rPr>
-              <a:t>Cloud regions</a:t>
-            </a:r>
-            <a:r>
-              <a:rPr lang="en-US" dirty="0"/>
-              <a:t> are physical and logical groupings of data centers around the world.</a:t>
-            </a:r>
-          </a:p>
-          <a:p>
-            <a:pPr lvl="1"/>
-            <a:r>
-              <a:rPr lang="en-US" dirty="0"/>
-              <a:t>Regions reduce latency by being closer to users and help with legal compliance (like GDPR) by keeping data in-country.</a:t>
-            </a:r>
-          </a:p>
-          <a:p>
-            <a:r>
-              <a:rPr lang="en-US" dirty="0"/>
-              <a:t>There are two main gateways into a cloud: a </a:t>
-            </a:r>
-            <a:r>
-              <a:rPr lang="en-US" dirty="0">
-                <a:solidFill>
-                  <a:schemeClr val="accent1"/>
-                </a:solidFill>
-              </a:rPr>
-              <a:t>management gateway </a:t>
-            </a:r>
-            <a:r>
-              <a:rPr lang="en-US" dirty="0"/>
-              <a:t>and a </a:t>
-            </a:r>
-            <a:r>
-              <a:rPr lang="en-US" dirty="0">
-                <a:solidFill>
-                  <a:schemeClr val="accent1"/>
-                </a:solidFill>
-              </a:rPr>
-              <a:t>message gateway</a:t>
-            </a:r>
-            <a:r>
-              <a:rPr lang="en-US" dirty="0"/>
-              <a:t>. Here we will focus on the management gateway.</a:t>
-            </a:r>
-          </a:p>
-        </p:txBody>
-      </p:sp>
-      <p:sp>
-        <p:nvSpPr>
-          <p:cNvPr id="5" name="Title 4">
-            <a:extLst>
-              <a:ext uri="{FF2B5EF4-FFF2-40B4-BE49-F238E27FC236}">
-                <a16:creationId xmlns:a16="http://schemas.microsoft.com/office/drawing/2014/main" id="{07760120-6E7E-0AFA-ED84-2212D1B22885}"/>
-              </a:ext>
-            </a:extLst>
-          </p:cNvPr>
-          <p:cNvSpPr>
-            <a:spLocks noGrp="1"/>
-          </p:cNvSpPr>
-          <p:nvPr>
-            <p:ph type="title"/>
-          </p:nvPr>
-        </p:nvSpPr>
-        <p:spPr/>
-        <p:txBody>
-          <a:bodyPr/>
-          <a:lstStyle/>
-          <a:p>
-            <a:r>
               <a:rPr lang="en-US" dirty="0"/>
               <a:t>Cloud Basics</a:t>
             </a:r>
@@ -6222,18 +6297,18 @@
       </p:sp>
       <p:sp>
         <p:nvSpPr>
-          <p:cNvPr id="6" name="Slide Number Placeholder 5">
-            <a:extLst>
-              <a:ext uri="{FF2B5EF4-FFF2-40B4-BE49-F238E27FC236}">
-                <a16:creationId xmlns:a16="http://schemas.microsoft.com/office/drawing/2014/main" id="{F39747D8-9C7E-7418-BAF4-A40E542EBB32}"/>
-              </a:ext>
-            </a:extLst>
-          </p:cNvPr>
-          <p:cNvSpPr>
-            <a:spLocks noGrp="1"/>
-          </p:cNvSpPr>
-          <p:nvPr>
-            <p:ph type="sldNum" sz="quarter" idx="13"/>
+          <p:cNvPr id="4" name="Slide Number Placeholder 3">
+            <a:extLst>
+              <a:ext uri="{FF2B5EF4-FFF2-40B4-BE49-F238E27FC236}">
+                <a16:creationId xmlns:a16="http://schemas.microsoft.com/office/drawing/2014/main" id="{C42C0315-C056-9812-EF7E-A26F61F487AD}"/>
+              </a:ext>
+            </a:extLst>
+          </p:cNvPr>
+          <p:cNvSpPr>
+            <a:spLocks noGrp="1"/>
+          </p:cNvSpPr>
+          <p:nvPr>
+            <p:ph type="sldNum" sz="quarter" idx="10"/>
           </p:nvPr>
         </p:nvSpPr>
         <p:spPr/>
@@ -6253,7 +6328,7 @@
     </p:spTree>
     <p:extLst>
       <p:ext uri="{BB962C8B-B14F-4D97-AF65-F5344CB8AC3E}">
-        <p14:creationId xmlns:p14="http://schemas.microsoft.com/office/powerpoint/2010/main" val="418176556"/>
+        <p14:creationId xmlns:p14="http://schemas.microsoft.com/office/powerpoint/2010/main" val="1594606508"/>
       </p:ext>
     </p:extLst>
   </p:cSld>
@@ -6282,10 +6357,10 @@
       </p:grpSpPr>
       <p:pic>
         <p:nvPicPr>
-          <p:cNvPr id="7" name="Picture Placeholder 6">
-            <a:extLst>
-              <a:ext uri="{FF2B5EF4-FFF2-40B4-BE49-F238E27FC236}">
-                <a16:creationId xmlns:a16="http://schemas.microsoft.com/office/drawing/2014/main" id="{6F945284-F800-B4D6-61C3-54A78D9F6163}"/>
+          <p:cNvPr id="8" name="Picture Placeholder 7">
+            <a:extLst>
+              <a:ext uri="{FF2B5EF4-FFF2-40B4-BE49-F238E27FC236}">
+                <a16:creationId xmlns:a16="http://schemas.microsoft.com/office/drawing/2014/main" id="{1E2B8A1A-A76C-6ED3-C724-1D297270FC19}"/>
               </a:ext>
             </a:extLst>
           </p:cNvPr>
@@ -6304,55 +6379,162 @@
               </a:ext>
             </a:extLst>
           </a:blip>
-          <a:srcRect t="238" b="238"/>
-          <a:stretch/>
+          <a:srcRect t="9856" b="9856"/>
+          <a:stretch>
+            <a:fillRect/>
+          </a:stretch>
         </p:blipFill>
-        <p:spPr>
-          <a:xfrm>
-            <a:off x="1650709" y="518312"/>
-            <a:ext cx="8890581" cy="5000952"/>
-          </a:xfrm>
-        </p:spPr>
+        <p:spPr/>
       </p:pic>
       <p:sp>
         <p:nvSpPr>
-          <p:cNvPr id="3" name="Text Placeholder 2">
-            <a:extLst>
-              <a:ext uri="{FF2B5EF4-FFF2-40B4-BE49-F238E27FC236}">
-                <a16:creationId xmlns:a16="http://schemas.microsoft.com/office/drawing/2014/main" id="{55B12EBA-06DC-0D87-0AFC-6AA19145A1D0}"/>
-              </a:ext>
-            </a:extLst>
-          </p:cNvPr>
-          <p:cNvSpPr>
-            <a:spLocks noGrp="1"/>
-          </p:cNvSpPr>
-          <p:nvPr>
-            <p:ph type="body" sz="quarter" idx="12"/>
-          </p:nvPr>
-        </p:nvSpPr>
-        <p:spPr>
-          <a:xfrm>
-            <a:off x="555625" y="5683250"/>
-            <a:ext cx="11036300" cy="878915"/>
-          </a:xfrm>
-        </p:spPr>
+          <p:cNvPr id="3" name="Content Placeholder 2">
+            <a:extLst>
+              <a:ext uri="{FF2B5EF4-FFF2-40B4-BE49-F238E27FC236}">
+                <a16:creationId xmlns:a16="http://schemas.microsoft.com/office/drawing/2014/main" id="{A3E6E0FB-3525-0424-F677-410C03ED4091}"/>
+              </a:ext>
+            </a:extLst>
+          </p:cNvPr>
+          <p:cNvSpPr>
+            <a:spLocks noGrp="1"/>
+          </p:cNvSpPr>
+          <p:nvPr>
+            <p:ph sz="half" idx="2"/>
+          </p:nvPr>
+        </p:nvSpPr>
+        <p:spPr/>
         <p:txBody>
           <a:bodyPr/>
           <a:lstStyle/>
           <a:p>
             <a:r>
               <a:rPr lang="en-US" dirty="0"/>
-              <a:t>management gateway vs message gateway</a:t>
-            </a:r>
-          </a:p>
-        </p:txBody>
-      </p:sp>
-      <p:sp>
-        <p:nvSpPr>
-          <p:cNvPr id="5" name="Slide Number Placeholder 4">
-            <a:extLst>
-              <a:ext uri="{FF2B5EF4-FFF2-40B4-BE49-F238E27FC236}">
-                <a16:creationId xmlns:a16="http://schemas.microsoft.com/office/drawing/2014/main" id="{1D85CE4E-3DE3-7B82-0CBD-5CBD20708DFA}"/>
+              <a:t>The data center consists of rows and rows of such racks. </a:t>
+            </a:r>
+          </a:p>
+          <a:p>
+            <a:pPr lvl="1"/>
+            <a:r>
+              <a:rPr lang="en-US" dirty="0"/>
+              <a:t>Each rack consists of more than 25 computers (each with multiple CPUs).</a:t>
+            </a:r>
+          </a:p>
+          <a:p>
+            <a:pPr lvl="1"/>
+            <a:r>
+              <a:rPr lang="en-US" dirty="0"/>
+              <a:t>Cloud data centers are one reason why energy efficiency has become a critical quality attribute in some applications.</a:t>
+            </a:r>
+          </a:p>
+        </p:txBody>
+      </p:sp>
+      <p:sp>
+        <p:nvSpPr>
+          <p:cNvPr id="4" name="Content Placeholder 3">
+            <a:extLst>
+              <a:ext uri="{FF2B5EF4-FFF2-40B4-BE49-F238E27FC236}">
+                <a16:creationId xmlns:a16="http://schemas.microsoft.com/office/drawing/2014/main" id="{FA7B9540-6FFD-A66E-4625-9578FB72DCC0}"/>
+              </a:ext>
+            </a:extLst>
+          </p:cNvPr>
+          <p:cNvSpPr>
+            <a:spLocks noGrp="1"/>
+          </p:cNvSpPr>
+          <p:nvPr>
+            <p:ph sz="half" idx="12"/>
+          </p:nvPr>
+        </p:nvSpPr>
+        <p:spPr/>
+        <p:txBody>
+          <a:bodyPr/>
+          <a:lstStyle/>
+          <a:p>
+            <a:r>
+              <a:rPr lang="en-US" dirty="0">
+                <a:solidFill>
+                  <a:schemeClr val="accent1"/>
+                </a:solidFill>
+              </a:rPr>
+              <a:t>Cloud regions</a:t>
+            </a:r>
+            <a:r>
+              <a:rPr lang="en-US" dirty="0"/>
+              <a:t> are physical and logical groupings of data centers around the world.</a:t>
+            </a:r>
+          </a:p>
+          <a:p>
+            <a:pPr lvl="1"/>
+            <a:r>
+              <a:rPr lang="en-US" dirty="0"/>
+              <a:t>Regions reduce latency by being closer to users and help with legal compliance (like GDPR) by keeping data in-country.</a:t>
+            </a:r>
+          </a:p>
+          <a:p>
+            <a:r>
+              <a:rPr lang="en-US" dirty="0"/>
+              <a:t>There are two main gateways into a cloud: a </a:t>
+            </a:r>
+            <a:r>
+              <a:rPr lang="en-US" dirty="0">
+                <a:solidFill>
+                  <a:schemeClr val="accent1"/>
+                </a:solidFill>
+              </a:rPr>
+              <a:t>management gateway </a:t>
+            </a:r>
+            <a:r>
+              <a:rPr lang="en-US" dirty="0"/>
+              <a:t>and a </a:t>
+            </a:r>
+            <a:r>
+              <a:rPr lang="en-US" dirty="0">
+                <a:solidFill>
+                  <a:schemeClr val="accent1"/>
+                </a:solidFill>
+              </a:rPr>
+              <a:t>message gateway</a:t>
+            </a:r>
+            <a:r>
+              <a:rPr lang="en-US" dirty="0"/>
+              <a:t>. Here we will focus on the management gateway.</a:t>
+            </a:r>
+          </a:p>
+        </p:txBody>
+      </p:sp>
+      <p:sp>
+        <p:nvSpPr>
+          <p:cNvPr id="5" name="Title 4">
+            <a:extLst>
+              <a:ext uri="{FF2B5EF4-FFF2-40B4-BE49-F238E27FC236}">
+                <a16:creationId xmlns:a16="http://schemas.microsoft.com/office/drawing/2014/main" id="{07760120-6E7E-0AFA-ED84-2212D1B22885}"/>
+              </a:ext>
+            </a:extLst>
+          </p:cNvPr>
+          <p:cNvSpPr>
+            <a:spLocks noGrp="1"/>
+          </p:cNvSpPr>
+          <p:nvPr>
+            <p:ph type="title"/>
+          </p:nvPr>
+        </p:nvSpPr>
+        <p:spPr/>
+        <p:txBody>
+          <a:bodyPr/>
+          <a:lstStyle/>
+          <a:p>
+            <a:r>
+              <a:rPr lang="en-US" dirty="0"/>
+              <a:t>Cloud Basics</a:t>
+            </a:r>
+          </a:p>
+        </p:txBody>
+      </p:sp>
+      <p:sp>
+        <p:nvSpPr>
+          <p:cNvPr id="6" name="Slide Number Placeholder 5">
+            <a:extLst>
+              <a:ext uri="{FF2B5EF4-FFF2-40B4-BE49-F238E27FC236}">
+                <a16:creationId xmlns:a16="http://schemas.microsoft.com/office/drawing/2014/main" id="{F39747D8-9C7E-7418-BAF4-A40E542EBB32}"/>
               </a:ext>
             </a:extLst>
           </p:cNvPr>
@@ -6363,12 +6545,7 @@
             <p:ph type="sldNum" sz="quarter" idx="13"/>
           </p:nvPr>
         </p:nvSpPr>
-        <p:spPr>
-          <a:xfrm>
-            <a:off x="556149" y="153671"/>
-            <a:ext cx="670079" cy="641281"/>
-          </a:xfrm>
-        </p:spPr>
+        <p:spPr/>
         <p:txBody>
           <a:bodyPr/>
           <a:lstStyle/>
@@ -6385,7 +6562,7 @@
     </p:spTree>
     <p:extLst>
       <p:ext uri="{BB962C8B-B14F-4D97-AF65-F5344CB8AC3E}">
-        <p14:creationId xmlns:p14="http://schemas.microsoft.com/office/powerpoint/2010/main" val="538104930"/>
+        <p14:creationId xmlns:p14="http://schemas.microsoft.com/office/powerpoint/2010/main" val="418176556"/>
       </p:ext>
     </p:extLst>
   </p:cSld>
@@ -6412,152 +6589,95 @@
           <a:chExt cx="0" cy="0"/>
         </a:xfrm>
       </p:grpSpPr>
-      <p:sp>
-        <p:nvSpPr>
-          <p:cNvPr id="2" name="Content Placeholder 1">
-            <a:extLst>
-              <a:ext uri="{FF2B5EF4-FFF2-40B4-BE49-F238E27FC236}">
-                <a16:creationId xmlns:a16="http://schemas.microsoft.com/office/drawing/2014/main" id="{9F576ADD-90E3-70B5-5281-4ED5C41F8800}"/>
-              </a:ext>
-            </a:extLst>
-          </p:cNvPr>
-          <p:cNvSpPr>
-            <a:spLocks noGrp="1"/>
-          </p:cNvSpPr>
-          <p:nvPr>
-            <p:ph sz="half" idx="2"/>
-          </p:nvPr>
-        </p:nvSpPr>
-        <p:spPr/>
+      <p:pic>
+        <p:nvPicPr>
+          <p:cNvPr id="7" name="Picture Placeholder 6">
+            <a:extLst>
+              <a:ext uri="{FF2B5EF4-FFF2-40B4-BE49-F238E27FC236}">
+                <a16:creationId xmlns:a16="http://schemas.microsoft.com/office/drawing/2014/main" id="{6F945284-F800-B4D6-61C3-54A78D9F6163}"/>
+              </a:ext>
+            </a:extLst>
+          </p:cNvPr>
+          <p:cNvPicPr>
+            <a:picLocks noGrp="1" noChangeAspect="1"/>
+          </p:cNvPicPr>
+          <p:nvPr>
+            <p:ph type="pic" sz="quarter" idx="11"/>
+          </p:nvPr>
+        </p:nvPicPr>
+        <p:blipFill>
+          <a:blip r:embed="rId2">
+            <a:extLst>
+              <a:ext uri="{28A0092B-C50C-407E-A947-70E740481C1C}">
+                <a14:useLocalDpi xmlns:a14="http://schemas.microsoft.com/office/drawing/2010/main" val="0"/>
+              </a:ext>
+            </a:extLst>
+          </a:blip>
+          <a:srcRect t="238" b="238"/>
+          <a:stretch/>
+        </p:blipFill>
+        <p:spPr>
+          <a:xfrm>
+            <a:off x="1650709" y="518312"/>
+            <a:ext cx="8890581" cy="5000952"/>
+          </a:xfrm>
+        </p:spPr>
+      </p:pic>
+      <p:sp>
+        <p:nvSpPr>
+          <p:cNvPr id="3" name="Text Placeholder 2">
+            <a:extLst>
+              <a:ext uri="{FF2B5EF4-FFF2-40B4-BE49-F238E27FC236}">
+                <a16:creationId xmlns:a16="http://schemas.microsoft.com/office/drawing/2014/main" id="{55B12EBA-06DC-0D87-0AFC-6AA19145A1D0}"/>
+              </a:ext>
+            </a:extLst>
+          </p:cNvPr>
+          <p:cNvSpPr>
+            <a:spLocks noGrp="1"/>
+          </p:cNvSpPr>
+          <p:nvPr>
+            <p:ph type="body" sz="quarter" idx="12"/>
+          </p:nvPr>
+        </p:nvSpPr>
+        <p:spPr>
+          <a:xfrm>
+            <a:off x="555625" y="5683250"/>
+            <a:ext cx="11036300" cy="878915"/>
+          </a:xfrm>
+        </p:spPr>
         <p:txBody>
           <a:bodyPr/>
           <a:lstStyle/>
           <a:p>
             <a:r>
               <a:rPr lang="en-US" dirty="0"/>
-              <a:t>Steps to have a VM allocated for you in the cloud:</a:t>
-            </a:r>
-          </a:p>
-          <a:p>
-            <a:pPr lvl="1"/>
-            <a:r>
-              <a:rPr lang="en-US" dirty="0"/>
-              <a:t>You send a request with parameters like region and instance type (e.g., CPU and memory size). </a:t>
-            </a:r>
-          </a:p>
-          <a:p>
-            <a:pPr lvl="1"/>
-            <a:r>
-              <a:rPr lang="en-US" dirty="0"/>
-              <a:t>The management gateway is responsible for many physical computers, and each has a hypervisor that manages the VMs on it.</a:t>
-            </a:r>
-          </a:p>
-          <a:p>
-            <a:pPr lvl="1"/>
-            <a:r>
-              <a:rPr lang="en-US" dirty="0"/>
-              <a:t>The </a:t>
-            </a:r>
-            <a:r>
-              <a:rPr lang="en-US" dirty="0">
-                <a:solidFill>
-                  <a:schemeClr val="accent1"/>
-                </a:solidFill>
-              </a:rPr>
-              <a:t>management gateway </a:t>
-            </a:r>
-            <a:r>
-              <a:rPr lang="en-US" dirty="0"/>
-              <a:t>finds a hypervisor with enough free resources then asks that hypervisor to create an additional VM.</a:t>
-            </a:r>
-          </a:p>
-          <a:p>
-            <a:pPr lvl="1"/>
-            <a:r>
-              <a:rPr lang="en-US" dirty="0"/>
-              <a:t>Once created, you receive its IP address. Cloud providers ensure resources are always available.</a:t>
-            </a:r>
-          </a:p>
-          <a:p>
-            <a:r>
-              <a:rPr lang="en-US" dirty="0"/>
-              <a:t>The management gateway performs other functions besides allocating new VMs. </a:t>
-            </a:r>
-          </a:p>
-          <a:p>
-            <a:pPr lvl="1"/>
-            <a:r>
-              <a:rPr lang="en-US" dirty="0"/>
-              <a:t>collecting billing information about the VM.</a:t>
-            </a:r>
-          </a:p>
-          <a:p>
-            <a:pPr lvl="1"/>
-            <a:r>
-              <a:rPr lang="en-US" dirty="0"/>
-              <a:t>providing the capability to monitor and destroy the VM.</a:t>
-            </a:r>
-          </a:p>
-          <a:p>
-            <a:r>
-              <a:rPr lang="en-US" dirty="0"/>
-              <a:t>The management gateway is accessed through its API.</a:t>
-            </a:r>
-          </a:p>
-          <a:p>
-            <a:pPr lvl="1"/>
-            <a:r>
-              <a:rPr lang="en-US" dirty="0"/>
-              <a:t>Usually there is also a web interface (like AWS Console), but it's mostly useful for simple tasks.</a:t>
-            </a:r>
-          </a:p>
-        </p:txBody>
-      </p:sp>
-      <p:sp>
-        <p:nvSpPr>
-          <p:cNvPr id="3" name="Title 2">
-            <a:extLst>
-              <a:ext uri="{FF2B5EF4-FFF2-40B4-BE49-F238E27FC236}">
-                <a16:creationId xmlns:a16="http://schemas.microsoft.com/office/drawing/2014/main" id="{00205917-227A-694F-46C0-3F83497FC5CA}"/>
-              </a:ext>
-            </a:extLst>
-          </p:cNvPr>
-          <p:cNvSpPr>
-            <a:spLocks noGrp="1"/>
-          </p:cNvSpPr>
-          <p:nvPr>
-            <p:ph type="title"/>
-          </p:nvPr>
-        </p:nvSpPr>
-        <p:spPr/>
-        <p:txBody>
-          <a:bodyPr/>
-          <a:lstStyle/>
-          <a:p>
-            <a:r>
-              <a:rPr lang="en-US" dirty="0"/>
-              <a:t>Cloud Basics</a:t>
-            </a:r>
-          </a:p>
-        </p:txBody>
-      </p:sp>
-      <p:sp>
-        <p:nvSpPr>
-          <p:cNvPr id="4" name="Slide Number Placeholder 3">
-            <a:extLst>
-              <a:ext uri="{FF2B5EF4-FFF2-40B4-BE49-F238E27FC236}">
-                <a16:creationId xmlns:a16="http://schemas.microsoft.com/office/drawing/2014/main" id="{B11FF0F3-CD28-A5F3-312E-020B13D9A278}"/>
-              </a:ext>
-            </a:extLst>
-          </p:cNvPr>
-          <p:cNvSpPr>
-            <a:spLocks noGrp="1"/>
-          </p:cNvSpPr>
-          <p:nvPr>
-            <p:ph type="sldNum" sz="quarter" idx="10"/>
-          </p:nvPr>
-        </p:nvSpPr>
-        <p:spPr/>
+              <a:t>management gateway vs message gateway</a:t>
+            </a:r>
+          </a:p>
+        </p:txBody>
+      </p:sp>
+      <p:sp>
+        <p:nvSpPr>
+          <p:cNvPr id="5" name="Slide Number Placeholder 4">
+            <a:extLst>
+              <a:ext uri="{FF2B5EF4-FFF2-40B4-BE49-F238E27FC236}">
+                <a16:creationId xmlns:a16="http://schemas.microsoft.com/office/drawing/2014/main" id="{1D85CE4E-3DE3-7B82-0CBD-5CBD20708DFA}"/>
+              </a:ext>
+            </a:extLst>
+          </p:cNvPr>
+          <p:cNvSpPr>
+            <a:spLocks noGrp="1"/>
+          </p:cNvSpPr>
+          <p:nvPr>
+            <p:ph type="sldNum" sz="quarter" idx="13"/>
+          </p:nvPr>
+        </p:nvSpPr>
+        <p:spPr>
+          <a:xfrm>
+            <a:off x="556149" y="153671"/>
+            <a:ext cx="670079" cy="641281"/>
+          </a:xfrm>
+        </p:spPr>
         <p:txBody>
           <a:bodyPr/>
           <a:lstStyle/>
@@ -6574,7 +6694,7 @@
     </p:spTree>
     <p:extLst>
       <p:ext uri="{BB962C8B-B14F-4D97-AF65-F5344CB8AC3E}">
-        <p14:creationId xmlns:p14="http://schemas.microsoft.com/office/powerpoint/2010/main" val="2215206880"/>
+        <p14:creationId xmlns:p14="http://schemas.microsoft.com/office/powerpoint/2010/main" val="538104930"/>
       </p:ext>
     </p:extLst>
   </p:cSld>

--- a/chapter 17.pptx
+++ b/chapter 17.pptx
@@ -246,7 +246,7 @@
           <a:p>
             <a:fld id="{13928E3B-7122-43E6-B3BB-09448C56C96C}" type="datetimeFigureOut">
               <a:rPr lang="en-US" smtClean="0"/>
-              <a:t>25/07/25</a:t>
+              <a:t>25/07/26</a:t>
             </a:fld>
             <a:endParaRPr lang="en-US"/>
           </a:p>
@@ -424,7 +424,7 @@
           <a:p>
             <a:fld id="{B98C9CAF-43DF-44BF-8016-DC193E4E594B}" type="datetimeFigureOut">
               <a:rPr lang="en-US" smtClean="0"/>
-              <a:t>25/07/25</a:t>
+              <a:t>25/07/26</a:t>
             </a:fld>
             <a:endParaRPr lang="en-US"/>
           </a:p>
@@ -4290,7 +4290,7 @@
             </a:r>
             <a:r>
               <a:rPr lang="en-US" dirty="0"/>
-              <a:t> involves having multiple copies of the same service and using a load balancer to distribute requests among them—equivalent to the maintain multiple copies of computations tactic and the load balancer pattern.</a:t>
+              <a:t> involves having multiple copies of the same service and using a load balancer to distribute requests among them (equivalent to the maintain multiple copies of computations tactic and the load balancer pattern.)</a:t>
             </a:r>
           </a:p>
         </p:txBody>
